--- a/decks/incident-response/incident-response.pptx
+++ b/decks/incident-response/incident-response.pptx
@@ -1299,6 +1299,13 @@
 <file path=ppt/slides/slide1.xml><?xml version="1.0" encoding="utf-8"?>
 <p:sld xmlns:a="http://schemas.openxmlformats.org/drawingml/2006/main" xmlns:r="http://schemas.openxmlformats.org/officeDocument/2006/relationships" xmlns:p="http://schemas.openxmlformats.org/presentationml/2006/main">
   <p:cSld name="Slide 1">
+    <p:bg>
+      <p:bgPr>
+        <a:solidFill>
+          <a:srgbClr val="0C0D10"/>
+        </a:solidFill>
+      </p:bgPr>
+    </p:bg>
     <p:spTree>
       <p:nvGrpSpPr>
         <p:cNvPr id="1" name=""/>
@@ -1313,30 +1320,371 @@
           <a:chExt cx="0" cy="0"/>
         </a:xfrm>
       </p:grpSpPr>
-      <p:pic>
-        <p:nvPicPr>
-          <p:cNvPr id="2" name="Image 0" descr="/tmp/slide-1787840577812-4lez9dv9izx.png">    </p:cNvPr>
-          <p:cNvPicPr>
-            <a:picLocks noChangeAspect="1"/>
-          </p:cNvPicPr>
-          <p:nvPr/>
-        </p:nvPicPr>
-        <p:blipFill>
-          <a:blip r:embed="rId1"/>
-          <a:stretch>
-            <a:fillRect/>
-          </a:stretch>
-        </p:blipFill>
-        <p:spPr>
-          <a:xfrm>
-            <a:off x="0" y="0"/>
-            <a:ext cx="12188952" cy="6858000"/>
-          </a:xfrm>
-          <a:prstGeom prst="rect">
-            <a:avLst/>
-          </a:prstGeom>
-        </p:spPr>
-      </p:pic>
+      <p:sp>
+        <p:nvSpPr>
+          <p:cNvPr id="2" name="Text 0"/>
+          <p:cNvSpPr/>
+          <p:nvPr/>
+        </p:nvSpPr>
+        <p:spPr>
+          <a:xfrm>
+            <a:off x="575523" y="440134"/>
+            <a:ext cx="1407384" cy="307975"/>
+          </a:xfrm>
+          <a:prstGeom prst="rect">
+            <a:avLst/>
+          </a:prstGeom>
+          <a:noFill/>
+          <a:ln/>
+        </p:spPr>
+        <p:txBody>
+          <a:bodyPr wrap="square" lIns="0" tIns="0" rIns="0" bIns="0" rtlCol="0" anchor="t"/>
+          <a:lstStyle/>
+          <a:p>
+            <a:pPr algn="l" indent="0" marL="0">
+              <a:lnSpc>
+                <a:spcPts val="2426"/>
+              </a:lnSpc>
+              <a:buNone/>
+            </a:pPr>
+            <a:r>
+              <a:rPr lang="en-US" sz="1733" dirty="0">
+                <a:solidFill>
+                  <a:srgbClr val="3DF5E0"/>
+                </a:solidFill>
+                <a:latin typeface="JetBrainsMono" pitchFamily="34" charset="0"/>
+                <a:ea typeface="JetBrainsMono" pitchFamily="34" charset="-122"/>
+                <a:cs typeface="JetBrainsMono" pitchFamily="34" charset="-120"/>
+              </a:rPr>
+              <a:t>// RUNBOOK</a:t>
+            </a:r>
+            <a:endParaRPr lang="en-US" sz="1733" dirty="0"/>
+          </a:p>
+        </p:txBody>
+      </p:sp>
+      <p:sp>
+        <p:nvSpPr>
+          <p:cNvPr id="3" name="Text 1"/>
+          <p:cNvSpPr/>
+          <p:nvPr/>
+        </p:nvSpPr>
+        <p:spPr>
+          <a:xfrm>
+            <a:off x="10095563" y="440134"/>
+            <a:ext cx="1548223" cy="307975"/>
+          </a:xfrm>
+          <a:prstGeom prst="rect">
+            <a:avLst/>
+          </a:prstGeom>
+          <a:noFill/>
+          <a:ln/>
+        </p:spPr>
+        <p:txBody>
+          <a:bodyPr wrap="square" lIns="0" tIns="0" rIns="0" bIns="0" rtlCol="0" anchor="t"/>
+          <a:lstStyle/>
+          <a:p>
+            <a:pPr algn="l" indent="0" marL="0">
+              <a:lnSpc>
+                <a:spcPts val="2426"/>
+              </a:lnSpc>
+              <a:buNone/>
+            </a:pPr>
+            <a:r>
+              <a:rPr lang="en-US" sz="1733" dirty="0">
+                <a:solidFill>
+                  <a:srgbClr val="8A8F9A"/>
+                </a:solidFill>
+                <a:latin typeface="JetBrainsMono" pitchFamily="34" charset="0"/>
+                <a:ea typeface="JetBrainsMono" pitchFamily="34" charset="-122"/>
+                <a:cs typeface="JetBrainsMono" pitchFamily="34" charset="-120"/>
+              </a:rPr>
+              <a:t>[ 01 / 06 ]</a:t>
+            </a:r>
+            <a:endParaRPr lang="en-US" sz="1733" dirty="0"/>
+          </a:p>
+        </p:txBody>
+      </p:sp>
+      <p:sp>
+        <p:nvSpPr>
+          <p:cNvPr id="4" name="Text 2"/>
+          <p:cNvSpPr/>
+          <p:nvPr/>
+        </p:nvSpPr>
+        <p:spPr>
+          <a:xfrm>
+            <a:off x="575523" y="1708348"/>
+            <a:ext cx="11258664" cy="1608534"/>
+          </a:xfrm>
+          <a:prstGeom prst="rect">
+            <a:avLst/>
+          </a:prstGeom>
+          <a:noFill/>
+          <a:ln/>
+        </p:spPr>
+        <p:txBody>
+          <a:bodyPr wrap="square" lIns="0" tIns="0" rIns="0" bIns="0" rtlCol="0" anchor="t"/>
+          <a:lstStyle/>
+          <a:p>
+            <a:pPr algn="l" indent="0" marL="0">
+              <a:lnSpc>
+                <a:spcPts val="6333"/>
+              </a:lnSpc>
+              <a:spcAft>
+                <a:spcPts val="2400"/>
+              </a:spcAft>
+              <a:buNone/>
+            </a:pPr>
+            <a:r>
+              <a:rPr lang="en-US" sz="5066" dirty="0">
+                <a:solidFill>
+                  <a:srgbClr val="E4E6EB"/>
+                </a:solidFill>
+                <a:latin typeface="SpaceGrotesk" pitchFamily="34" charset="0"/>
+                <a:ea typeface="SpaceGrotesk" pitchFamily="34" charset="-122"/>
+                <a:cs typeface="SpaceGrotesk" pitchFamily="34" charset="-120"/>
+              </a:rPr>
+              <a:t>Incident response:</a:t>
+            </a:r>
+            <a:endParaRPr lang="en-US" sz="5066" dirty="0"/>
+          </a:p>
+          <a:p>
+            <a:pPr algn="l" indent="0" marL="0">
+              <a:lnSpc>
+                <a:spcPts val="6333"/>
+              </a:lnSpc>
+              <a:spcAft>
+                <a:spcPts val="2400"/>
+              </a:spcAft>
+              <a:buNone/>
+            </a:pPr>
+            <a:r>
+              <a:rPr lang="en-US" sz="5066" dirty="0">
+                <a:solidFill>
+                  <a:srgbClr val="E4E6EB"/>
+                </a:solidFill>
+                <a:latin typeface="SpaceGrotesk" pitchFamily="34" charset="0"/>
+                <a:ea typeface="SpaceGrotesk" pitchFamily="34" charset="-122"/>
+                <a:cs typeface="SpaceGrotesk" pitchFamily="34" charset="-120"/>
+              </a:rPr>
+              <a:t>the first 30 minutes</a:t>
+            </a:r>
+            <a:endParaRPr lang="en-US" sz="5066" dirty="0"/>
+          </a:p>
+        </p:txBody>
+      </p:sp>
+      <p:sp>
+        <p:nvSpPr>
+          <p:cNvPr id="5" name="Text 3"/>
+          <p:cNvSpPr/>
+          <p:nvPr/>
+        </p:nvSpPr>
+        <p:spPr>
+          <a:xfrm>
+            <a:off x="575523" y="3621683"/>
+            <a:ext cx="2031492" cy="12700"/>
+          </a:xfrm>
+          <a:prstGeom prst="rect">
+            <a:avLst/>
+          </a:prstGeom>
+          <a:solidFill>
+            <a:srgbClr val="3DF5E0"/>
+          </a:solidFill>
+          <a:ln/>
+          <a:effectLst>
+            <a:outerShdw sx="100000" sy="100000" kx="0" ky="0" algn="bl" rotWithShape="0" blurRad="101587" dist="50800" dir="16200000">
+              <a:srgbClr val="3df5e0">
+                <a:alpha val="75000"/>
+              </a:srgbClr>
+            </a:outerShdw>
+          </a:effectLst>
+        </p:spPr>
+        <p:txBody>
+          <a:bodyPr wrap="square" rtlCol="0" anchor="ctr"/>
+          <a:lstStyle/>
+          <a:p>
+            <a:pPr indent="0" marL="0">
+              <a:buNone/>
+            </a:pPr>
+            <a:endParaRPr lang="en-US" dirty="0"/>
+          </a:p>
+        </p:txBody>
+      </p:sp>
+      <p:sp>
+        <p:nvSpPr>
+          <p:cNvPr id="6" name="Text 4"/>
+          <p:cNvSpPr/>
+          <p:nvPr/>
+        </p:nvSpPr>
+        <p:spPr>
+          <a:xfrm>
+            <a:off x="575523" y="3939183"/>
+            <a:ext cx="10360609" cy="834628"/>
+          </a:xfrm>
+          <a:prstGeom prst="rect">
+            <a:avLst/>
+          </a:prstGeom>
+          <a:noFill/>
+          <a:ln/>
+        </p:spPr>
+        <p:txBody>
+          <a:bodyPr wrap="square" lIns="0" tIns="0" rIns="0" bIns="0" rtlCol="0" anchor="t"/>
+          <a:lstStyle/>
+          <a:p>
+            <a:pPr algn="l" indent="0" marL="0">
+              <a:lnSpc>
+                <a:spcPts val="3286"/>
+              </a:lnSpc>
+              <a:buNone/>
+            </a:pPr>
+            <a:r>
+              <a:rPr lang="en-US" sz="2266" dirty="0">
+                <a:solidFill>
+                  <a:srgbClr val="E4E6EB"/>
+                </a:solidFill>
+                <a:latin typeface="SpaceGrotesk" pitchFamily="34" charset="0"/>
+                <a:ea typeface="SpaceGrotesk" pitchFamily="34" charset="-122"/>
+                <a:cs typeface="SpaceGrotesk" pitchFamily="34" charset="-120"/>
+              </a:rPr>
+              <a:t>The bottleneck in the first half hour is rarely diagnosis.</a:t>
+            </a:r>
+            <a:endParaRPr lang="en-US" sz="2266" dirty="0"/>
+          </a:p>
+          <a:p>
+            <a:pPr algn="l" indent="0" marL="0">
+              <a:lnSpc>
+                <a:spcPts val="3286"/>
+              </a:lnSpc>
+              <a:buNone/>
+            </a:pPr>
+            <a:r>
+              <a:rPr lang="en-US" sz="2266" dirty="0">
+                <a:solidFill>
+                  <a:srgbClr val="E4E6EB"/>
+                </a:solidFill>
+                <a:latin typeface="SpaceGrotesk" pitchFamily="34" charset="0"/>
+                <a:ea typeface="SpaceGrotesk" pitchFamily="34" charset="-122"/>
+                <a:cs typeface="SpaceGrotesk" pitchFamily="34" charset="-120"/>
+              </a:rPr>
+              <a:t>It is that nobody said who is in charge, and nobody told anyone else.</a:t>
+            </a:r>
+            <a:endParaRPr lang="en-US" sz="2266" dirty="0"/>
+          </a:p>
+        </p:txBody>
+      </p:sp>
+      <p:sp>
+        <p:nvSpPr>
+          <p:cNvPr id="7" name="Text 5"/>
+          <p:cNvSpPr/>
+          <p:nvPr/>
+        </p:nvSpPr>
+        <p:spPr>
+          <a:xfrm>
+            <a:off x="575523" y="5826125"/>
+            <a:ext cx="11037905" cy="12700"/>
+          </a:xfrm>
+          <a:prstGeom prst="rect">
+            <a:avLst/>
+          </a:prstGeom>
+          <a:solidFill>
+            <a:srgbClr val="2A2D35"/>
+          </a:solidFill>
+          <a:ln/>
+        </p:spPr>
+        <p:txBody>
+          <a:bodyPr wrap="square" rtlCol="0" anchor="ctr"/>
+          <a:lstStyle/>
+          <a:p>
+            <a:pPr indent="0" marL="0">
+              <a:buNone/>
+            </a:pPr>
+            <a:endParaRPr lang="en-US" dirty="0"/>
+          </a:p>
+        </p:txBody>
+      </p:sp>
+      <p:sp>
+        <p:nvSpPr>
+          <p:cNvPr id="8" name="Text 6"/>
+          <p:cNvSpPr/>
+          <p:nvPr/>
+        </p:nvSpPr>
+        <p:spPr>
+          <a:xfrm>
+            <a:off x="575523" y="6042025"/>
+            <a:ext cx="2251814" cy="307975"/>
+          </a:xfrm>
+          <a:prstGeom prst="rect">
+            <a:avLst/>
+          </a:prstGeom>
+          <a:noFill/>
+          <a:ln/>
+        </p:spPr>
+        <p:txBody>
+          <a:bodyPr wrap="square" lIns="0" tIns="0" rIns="0" bIns="0" rtlCol="0" anchor="t"/>
+          <a:lstStyle/>
+          <a:p>
+            <a:pPr algn="l" indent="0" marL="0">
+              <a:lnSpc>
+                <a:spcPts val="2426"/>
+              </a:lnSpc>
+              <a:buNone/>
+            </a:pPr>
+            <a:r>
+              <a:rPr lang="en-US" sz="1733" dirty="0">
+                <a:solidFill>
+                  <a:srgbClr val="E4E6EB"/>
+                </a:solidFill>
+                <a:latin typeface="JetBrainsMono" pitchFamily="34" charset="0"/>
+                <a:ea typeface="JetBrainsMono" pitchFamily="34" charset="-122"/>
+                <a:cs typeface="JetBrainsMono" pitchFamily="34" charset="-120"/>
+              </a:rPr>
+              <a:t>PRESENTER · TEAM</a:t>
+            </a:r>
+            <a:endParaRPr lang="en-US" sz="1733" dirty="0"/>
+          </a:p>
+        </p:txBody>
+      </p:sp>
+      <p:sp>
+        <p:nvSpPr>
+          <p:cNvPr id="9" name="Text 7"/>
+          <p:cNvSpPr/>
+          <p:nvPr/>
+        </p:nvSpPr>
+        <p:spPr>
+          <a:xfrm>
+            <a:off x="8164058" y="6042025"/>
+            <a:ext cx="3518358" cy="307975"/>
+          </a:xfrm>
+          <a:prstGeom prst="rect">
+            <a:avLst/>
+          </a:prstGeom>
+          <a:noFill/>
+          <a:ln/>
+        </p:spPr>
+        <p:txBody>
+          <a:bodyPr wrap="square" lIns="0" tIns="0" rIns="0" bIns="0" rtlCol="0" anchor="t"/>
+          <a:lstStyle/>
+          <a:p>
+            <a:pPr algn="l" indent="0" marL="0">
+              <a:lnSpc>
+                <a:spcPts val="2426"/>
+              </a:lnSpc>
+              <a:buNone/>
+            </a:pPr>
+            <a:r>
+              <a:rPr lang="en-US" sz="1733" dirty="0">
+                <a:solidFill>
+                  <a:srgbClr val="8A8F9A"/>
+                </a:solidFill>
+                <a:latin typeface="JetBrainsMono" pitchFamily="34" charset="0"/>
+                <a:ea typeface="JetBrainsMono" pitchFamily="34" charset="-122"/>
+                <a:cs typeface="JetBrainsMono" pitchFamily="34" charset="-120"/>
+              </a:rPr>
+              <a:t>INCIDENT RESPONSE RUNBOOK</a:t>
+            </a:r>
+            <a:endParaRPr lang="en-US" sz="1733" dirty="0"/>
+          </a:p>
+        </p:txBody>
+      </p:sp>
     </p:spTree>
   </p:cSld>
   <p:clrMapOvr>
@@ -1348,6 +1696,13 @@
 <file path=ppt/slides/slide2.xml><?xml version="1.0" encoding="utf-8"?>
 <p:sld xmlns:a="http://schemas.openxmlformats.org/drawingml/2006/main" xmlns:r="http://schemas.openxmlformats.org/officeDocument/2006/relationships" xmlns:p="http://schemas.openxmlformats.org/presentationml/2006/main">
   <p:cSld name="Slide 2">
+    <p:bg>
+      <p:bgPr>
+        <a:solidFill>
+          <a:srgbClr val="0C0D10"/>
+        </a:solidFill>
+      </p:bgPr>
+    </p:bg>
     <p:spTree>
       <p:nvGrpSpPr>
         <p:cNvPr id="1" name=""/>
@@ -1362,30 +1717,876 @@
           <a:chExt cx="0" cy="0"/>
         </a:xfrm>
       </p:grpSpPr>
-      <p:pic>
-        <p:nvPicPr>
-          <p:cNvPr id="2" name="Image 0" descr="/tmp/slide-1787840578147-s6p085stoe.png">    </p:cNvPr>
-          <p:cNvPicPr>
-            <a:picLocks noChangeAspect="1"/>
-          </p:cNvPicPr>
-          <p:nvPr/>
-        </p:nvPicPr>
-        <p:blipFill>
-          <a:blip r:embed="rId1"/>
-          <a:stretch>
-            <a:fillRect/>
-          </a:stretch>
-        </p:blipFill>
-        <p:spPr>
-          <a:xfrm>
-            <a:off x="0" y="0"/>
-            <a:ext cx="12188952" cy="6858000"/>
-          </a:xfrm>
-          <a:prstGeom prst="rect">
-            <a:avLst/>
-          </a:prstGeom>
-        </p:spPr>
-      </p:pic>
+      <p:sp>
+        <p:nvSpPr>
+          <p:cNvPr id="2" name="Text 0"/>
+          <p:cNvSpPr/>
+          <p:nvPr/>
+        </p:nvSpPr>
+        <p:spPr>
+          <a:xfrm>
+            <a:off x="575523" y="440134"/>
+            <a:ext cx="3236881" cy="307975"/>
+          </a:xfrm>
+          <a:prstGeom prst="rect">
+            <a:avLst/>
+          </a:prstGeom>
+          <a:noFill/>
+          <a:ln/>
+        </p:spPr>
+        <p:txBody>
+          <a:bodyPr wrap="square" lIns="0" tIns="0" rIns="0" bIns="0" rtlCol="0" anchor="t"/>
+          <a:lstStyle/>
+          <a:p>
+            <a:pPr algn="l" indent="0" marL="0">
+              <a:lnSpc>
+                <a:spcPts val="2426"/>
+              </a:lnSpc>
+              <a:buNone/>
+            </a:pPr>
+            <a:r>
+              <a:rPr lang="en-US" sz="1733" dirty="0">
+                <a:solidFill>
+                  <a:srgbClr val="3DF5E0"/>
+                </a:solidFill>
+                <a:latin typeface="JetBrainsMono" pitchFamily="34" charset="0"/>
+                <a:ea typeface="JetBrainsMono" pitchFamily="34" charset="-122"/>
+                <a:cs typeface="JetBrainsMono" pitchFamily="34" charset="-120"/>
+              </a:rPr>
+              <a:t>// 02 — WHAT GOES WRONG</a:t>
+            </a:r>
+            <a:endParaRPr lang="en-US" sz="1733" dirty="0"/>
+          </a:p>
+        </p:txBody>
+      </p:sp>
+      <p:sp>
+        <p:nvSpPr>
+          <p:cNvPr id="3" name="Text 1"/>
+          <p:cNvSpPr/>
+          <p:nvPr/>
+        </p:nvSpPr>
+        <p:spPr>
+          <a:xfrm>
+            <a:off x="10095563" y="440134"/>
+            <a:ext cx="1548223" cy="307975"/>
+          </a:xfrm>
+          <a:prstGeom prst="rect">
+            <a:avLst/>
+          </a:prstGeom>
+          <a:noFill/>
+          <a:ln/>
+        </p:spPr>
+        <p:txBody>
+          <a:bodyPr wrap="square" lIns="0" tIns="0" rIns="0" bIns="0" rtlCol="0" anchor="t"/>
+          <a:lstStyle/>
+          <a:p>
+            <a:pPr algn="l" indent="0" marL="0">
+              <a:lnSpc>
+                <a:spcPts val="2426"/>
+              </a:lnSpc>
+              <a:buNone/>
+            </a:pPr>
+            <a:r>
+              <a:rPr lang="en-US" sz="1733" dirty="0">
+                <a:solidFill>
+                  <a:srgbClr val="8A8F9A"/>
+                </a:solidFill>
+                <a:latin typeface="JetBrainsMono" pitchFamily="34" charset="0"/>
+                <a:ea typeface="JetBrainsMono" pitchFamily="34" charset="-122"/>
+                <a:cs typeface="JetBrainsMono" pitchFamily="34" charset="-120"/>
+              </a:rPr>
+              <a:t>[ 02 / 06 ]</a:t>
+            </a:r>
+            <a:endParaRPr lang="en-US" sz="1733" dirty="0"/>
+          </a:p>
+        </p:txBody>
+      </p:sp>
+      <p:sp>
+        <p:nvSpPr>
+          <p:cNvPr id="4" name="Text 2"/>
+          <p:cNvSpPr/>
+          <p:nvPr/>
+        </p:nvSpPr>
+        <p:spPr>
+          <a:xfrm>
+            <a:off x="575523" y="866577"/>
+            <a:ext cx="11258664" cy="528241"/>
+          </a:xfrm>
+          <a:prstGeom prst="rect">
+            <a:avLst/>
+          </a:prstGeom>
+          <a:noFill/>
+          <a:ln/>
+        </p:spPr>
+        <p:txBody>
+          <a:bodyPr wrap="square" lIns="0" tIns="0" rIns="0" bIns="0" rtlCol="0" anchor="t"/>
+          <a:lstStyle/>
+          <a:p>
+            <a:pPr algn="l" indent="0" marL="0">
+              <a:lnSpc>
+                <a:spcPts val="4159"/>
+              </a:lnSpc>
+              <a:spcAft>
+                <a:spcPts val="1200"/>
+              </a:spcAft>
+              <a:buNone/>
+            </a:pPr>
+            <a:r>
+              <a:rPr lang="en-US" sz="3466" b="1" dirty="0">
+                <a:solidFill>
+                  <a:srgbClr val="E4E6EB"/>
+                </a:solidFill>
+                <a:latin typeface="SpaceGrotesk" pitchFamily="34" charset="0"/>
+                <a:ea typeface="SpaceGrotesk" pitchFamily="34" charset="-122"/>
+                <a:cs typeface="SpaceGrotesk" pitchFamily="34" charset="-120"/>
+              </a:rPr>
+              <a:t>Three failures, none of them technical</a:t>
+            </a:r>
+            <a:endParaRPr lang="en-US" sz="3466" dirty="0"/>
+          </a:p>
+        </p:txBody>
+      </p:sp>
+      <p:sp>
+        <p:nvSpPr>
+          <p:cNvPr id="5" name="Text 3"/>
+          <p:cNvSpPr/>
+          <p:nvPr/>
+        </p:nvSpPr>
+        <p:spPr>
+          <a:xfrm>
+            <a:off x="575523" y="1547217"/>
+            <a:ext cx="11037905" cy="12700"/>
+          </a:xfrm>
+          <a:prstGeom prst="rect">
+            <a:avLst/>
+          </a:prstGeom>
+          <a:solidFill>
+            <a:srgbClr val="2A2D35"/>
+          </a:solidFill>
+          <a:ln/>
+        </p:spPr>
+        <p:txBody>
+          <a:bodyPr wrap="square" rtlCol="0" anchor="ctr"/>
+          <a:lstStyle/>
+          <a:p>
+            <a:pPr indent="0" marL="0">
+              <a:buNone/>
+            </a:pPr>
+            <a:endParaRPr lang="en-US" dirty="0"/>
+          </a:p>
+        </p:txBody>
+      </p:sp>
+      <p:sp>
+        <p:nvSpPr>
+          <p:cNvPr id="6" name="Text 4"/>
+          <p:cNvSpPr/>
+          <p:nvPr/>
+        </p:nvSpPr>
+        <p:spPr>
+          <a:xfrm>
+            <a:off x="575523" y="1779984"/>
+            <a:ext cx="3498769" cy="3542506"/>
+          </a:xfrm>
+          <a:prstGeom prst="roundRect">
+            <a:avLst>
+              <a:gd name="adj" fmla="val 1452"/>
+            </a:avLst>
+          </a:prstGeom>
+          <a:solidFill>
+            <a:srgbClr val="16181D"/>
+          </a:solidFill>
+          <a:ln w="12698">
+            <a:solidFill>
+              <a:srgbClr val="2A2D35"/>
+            </a:solidFill>
+          </a:ln>
+        </p:spPr>
+        <p:txBody>
+          <a:bodyPr wrap="square" rtlCol="0" anchor="ctr"/>
+          <a:lstStyle/>
+          <a:p>
+            <a:pPr indent="0" marL="0">
+              <a:buNone/>
+            </a:pPr>
+            <a:endParaRPr lang="en-US" dirty="0"/>
+          </a:p>
+        </p:txBody>
+      </p:sp>
+      <p:sp>
+        <p:nvSpPr>
+          <p:cNvPr id="7" name="Text 5"/>
+          <p:cNvSpPr/>
+          <p:nvPr/>
+        </p:nvSpPr>
+        <p:spPr>
+          <a:xfrm>
+            <a:off x="825095" y="2029619"/>
+            <a:ext cx="3059617" cy="307975"/>
+          </a:xfrm>
+          <a:prstGeom prst="rect">
+            <a:avLst/>
+          </a:prstGeom>
+          <a:noFill/>
+          <a:ln/>
+        </p:spPr>
+        <p:txBody>
+          <a:bodyPr wrap="square" lIns="0" tIns="0" rIns="0" bIns="0" rtlCol="0" anchor="t"/>
+          <a:lstStyle/>
+          <a:p>
+            <a:pPr algn="l" indent="0" marL="0">
+              <a:lnSpc>
+                <a:spcPts val="2426"/>
+              </a:lnSpc>
+              <a:buNone/>
+            </a:pPr>
+            <a:r>
+              <a:rPr lang="en-US" sz="1733" dirty="0">
+                <a:solidFill>
+                  <a:srgbClr val="3DF5E0"/>
+                </a:solidFill>
+                <a:latin typeface="JetBrainsMono" pitchFamily="34" charset="0"/>
+                <a:ea typeface="JetBrainsMono" pitchFamily="34" charset="-122"/>
+                <a:cs typeface="JetBrainsMono" pitchFamily="34" charset="-120"/>
+              </a:rPr>
+              <a:t>[ FAILURE 01 ]</a:t>
+            </a:r>
+            <a:endParaRPr lang="en-US" sz="1733" dirty="0"/>
+          </a:p>
+        </p:txBody>
+      </p:sp>
+      <p:sp>
+        <p:nvSpPr>
+          <p:cNvPr id="8" name="Text 6"/>
+          <p:cNvSpPr/>
+          <p:nvPr/>
+        </p:nvSpPr>
+        <p:spPr>
+          <a:xfrm>
+            <a:off x="825095" y="2489994"/>
+            <a:ext cx="3059617" cy="748506"/>
+          </a:xfrm>
+          <a:prstGeom prst="rect">
+            <a:avLst/>
+          </a:prstGeom>
+          <a:noFill/>
+          <a:ln/>
+        </p:spPr>
+        <p:txBody>
+          <a:bodyPr wrap="square" lIns="0" tIns="0" rIns="0" bIns="0" rtlCol="0" anchor="t"/>
+          <a:lstStyle/>
+          <a:p>
+            <a:pPr algn="l" indent="0" marL="0">
+              <a:lnSpc>
+                <a:spcPts val="2946"/>
+              </a:lnSpc>
+              <a:spcBef>
+                <a:spcPts val="1200"/>
+              </a:spcBef>
+              <a:spcAft>
+                <a:spcPts val="1067"/>
+              </a:spcAft>
+              <a:buNone/>
+            </a:pPr>
+            <a:r>
+              <a:rPr lang="en-US" sz="2266" dirty="0">
+                <a:solidFill>
+                  <a:srgbClr val="E4E6EB"/>
+                </a:solidFill>
+                <a:latin typeface="SpaceGrotesk" pitchFamily="34" charset="0"/>
+                <a:ea typeface="SpaceGrotesk" pitchFamily="34" charset="-122"/>
+                <a:cs typeface="SpaceGrotesk" pitchFamily="34" charset="-120"/>
+              </a:rPr>
+              <a:t>Everyone debugs.</a:t>
+            </a:r>
+            <a:endParaRPr lang="en-US" sz="2266" dirty="0"/>
+          </a:p>
+          <a:p>
+            <a:pPr algn="l" indent="0" marL="0">
+              <a:lnSpc>
+                <a:spcPts val="2946"/>
+              </a:lnSpc>
+              <a:spcBef>
+                <a:spcPts val="1200"/>
+              </a:spcBef>
+              <a:spcAft>
+                <a:spcPts val="1067"/>
+              </a:spcAft>
+              <a:buNone/>
+            </a:pPr>
+            <a:r>
+              <a:rPr lang="en-US" sz="2266" dirty="0">
+                <a:solidFill>
+                  <a:srgbClr val="E4E6EB"/>
+                </a:solidFill>
+                <a:latin typeface="SpaceGrotesk" pitchFamily="34" charset="0"/>
+                <a:ea typeface="SpaceGrotesk" pitchFamily="34" charset="-122"/>
+                <a:cs typeface="SpaceGrotesk" pitchFamily="34" charset="-120"/>
+              </a:rPr>
+              <a:t>Nobody speaks.</a:t>
+            </a:r>
+            <a:endParaRPr lang="en-US" sz="2266" dirty="0"/>
+          </a:p>
+        </p:txBody>
+      </p:sp>
+      <p:sp>
+        <p:nvSpPr>
+          <p:cNvPr id="9" name="Text 7"/>
+          <p:cNvSpPr/>
+          <p:nvPr/>
+        </p:nvSpPr>
+        <p:spPr>
+          <a:xfrm>
+            <a:off x="825095" y="3373834"/>
+            <a:ext cx="3059617" cy="2062162"/>
+          </a:xfrm>
+          <a:prstGeom prst="rect">
+            <a:avLst/>
+          </a:prstGeom>
+          <a:noFill/>
+          <a:ln/>
+        </p:spPr>
+        <p:txBody>
+          <a:bodyPr wrap="square" lIns="0" tIns="0" rIns="0" bIns="0" rtlCol="0" anchor="t"/>
+          <a:lstStyle/>
+          <a:p>
+            <a:pPr algn="l" indent="0" marL="0">
+              <a:lnSpc>
+                <a:spcPts val="2706"/>
+              </a:lnSpc>
+              <a:buNone/>
+            </a:pPr>
+            <a:r>
+              <a:rPr lang="en-US" sz="1866" dirty="0">
+                <a:solidFill>
+                  <a:srgbClr val="8A8F9A"/>
+                </a:solidFill>
+                <a:latin typeface="SpaceGrotesk" pitchFamily="34" charset="0"/>
+                <a:ea typeface="SpaceGrotesk" pitchFamily="34" charset="-122"/>
+                <a:cs typeface="SpaceGrotesk" pitchFamily="34" charset="-120"/>
+              </a:rPr>
+              <a:t>The interesting problem pulls in every pair of hands. Stakeholders go quiet, then arrive asking — and the asking slows the fix.</a:t>
+            </a:r>
+            <a:endParaRPr lang="en-US" sz="1866" dirty="0"/>
+          </a:p>
+        </p:txBody>
+      </p:sp>
+      <p:sp>
+        <p:nvSpPr>
+          <p:cNvPr id="10" name="Text 8"/>
+          <p:cNvSpPr/>
+          <p:nvPr/>
+        </p:nvSpPr>
+        <p:spPr>
+          <a:xfrm>
+            <a:off x="4345092" y="1779984"/>
+            <a:ext cx="3498769" cy="3542506"/>
+          </a:xfrm>
+          <a:prstGeom prst="roundRect">
+            <a:avLst>
+              <a:gd name="adj" fmla="val 1452"/>
+            </a:avLst>
+          </a:prstGeom>
+          <a:solidFill>
+            <a:srgbClr val="16181D"/>
+          </a:solidFill>
+          <a:ln w="12698">
+            <a:solidFill>
+              <a:srgbClr val="2A2D35"/>
+            </a:solidFill>
+          </a:ln>
+        </p:spPr>
+        <p:txBody>
+          <a:bodyPr wrap="square" rtlCol="0" anchor="ctr"/>
+          <a:lstStyle/>
+          <a:p>
+            <a:pPr indent="0" marL="0">
+              <a:buNone/>
+            </a:pPr>
+            <a:endParaRPr lang="en-US" dirty="0"/>
+          </a:p>
+        </p:txBody>
+      </p:sp>
+      <p:sp>
+        <p:nvSpPr>
+          <p:cNvPr id="11" name="Text 9"/>
+          <p:cNvSpPr/>
+          <p:nvPr/>
+        </p:nvSpPr>
+        <p:spPr>
+          <a:xfrm>
+            <a:off x="4594664" y="2029619"/>
+            <a:ext cx="3059617" cy="307975"/>
+          </a:xfrm>
+          <a:prstGeom prst="rect">
+            <a:avLst/>
+          </a:prstGeom>
+          <a:noFill/>
+          <a:ln/>
+        </p:spPr>
+        <p:txBody>
+          <a:bodyPr wrap="square" lIns="0" tIns="0" rIns="0" bIns="0" rtlCol="0" anchor="t"/>
+          <a:lstStyle/>
+          <a:p>
+            <a:pPr algn="l" indent="0" marL="0">
+              <a:lnSpc>
+                <a:spcPts val="2426"/>
+              </a:lnSpc>
+              <a:buNone/>
+            </a:pPr>
+            <a:r>
+              <a:rPr lang="en-US" sz="1733" dirty="0">
+                <a:solidFill>
+                  <a:srgbClr val="3DF5E0"/>
+                </a:solidFill>
+                <a:latin typeface="JetBrainsMono" pitchFamily="34" charset="0"/>
+                <a:ea typeface="JetBrainsMono" pitchFamily="34" charset="-122"/>
+                <a:cs typeface="JetBrainsMono" pitchFamily="34" charset="-120"/>
+              </a:rPr>
+              <a:t>[ FAILURE 02 ]</a:t>
+            </a:r>
+            <a:endParaRPr lang="en-US" sz="1733" dirty="0"/>
+          </a:p>
+        </p:txBody>
+      </p:sp>
+      <p:sp>
+        <p:nvSpPr>
+          <p:cNvPr id="12" name="Text 10"/>
+          <p:cNvSpPr/>
+          <p:nvPr/>
+        </p:nvSpPr>
+        <p:spPr>
+          <a:xfrm>
+            <a:off x="4594664" y="2489994"/>
+            <a:ext cx="3059617" cy="748506"/>
+          </a:xfrm>
+          <a:prstGeom prst="rect">
+            <a:avLst/>
+          </a:prstGeom>
+          <a:noFill/>
+          <a:ln/>
+        </p:spPr>
+        <p:txBody>
+          <a:bodyPr wrap="square" lIns="0" tIns="0" rIns="0" bIns="0" rtlCol="0" anchor="t"/>
+          <a:lstStyle/>
+          <a:p>
+            <a:pPr algn="l" indent="0" marL="0">
+              <a:lnSpc>
+                <a:spcPts val="2946"/>
+              </a:lnSpc>
+              <a:spcBef>
+                <a:spcPts val="1200"/>
+              </a:spcBef>
+              <a:spcAft>
+                <a:spcPts val="1067"/>
+              </a:spcAft>
+              <a:buNone/>
+            </a:pPr>
+            <a:r>
+              <a:rPr lang="en-US" sz="2266" dirty="0">
+                <a:solidFill>
+                  <a:srgbClr val="E4E6EB"/>
+                </a:solidFill>
+                <a:latin typeface="SpaceGrotesk" pitchFamily="34" charset="0"/>
+                <a:ea typeface="SpaceGrotesk" pitchFamily="34" charset="-122"/>
+                <a:cs typeface="SpaceGrotesk" pitchFamily="34" charset="-120"/>
+              </a:rPr>
+              <a:t>Nobody says who</a:t>
+            </a:r>
+            <a:endParaRPr lang="en-US" sz="2266" dirty="0"/>
+          </a:p>
+          <a:p>
+            <a:pPr algn="l" indent="0" marL="0">
+              <a:lnSpc>
+                <a:spcPts val="2946"/>
+              </a:lnSpc>
+              <a:spcBef>
+                <a:spcPts val="1200"/>
+              </a:spcBef>
+              <a:spcAft>
+                <a:spcPts val="1067"/>
+              </a:spcAft>
+              <a:buNone/>
+            </a:pPr>
+            <a:r>
+              <a:rPr lang="en-US" sz="2266" dirty="0">
+                <a:solidFill>
+                  <a:srgbClr val="E4E6EB"/>
+                </a:solidFill>
+                <a:latin typeface="SpaceGrotesk" pitchFamily="34" charset="0"/>
+                <a:ea typeface="SpaceGrotesk" pitchFamily="34" charset="-122"/>
+                <a:cs typeface="SpaceGrotesk" pitchFamily="34" charset="-120"/>
+              </a:rPr>
+              <a:t>is in charge.</a:t>
+            </a:r>
+            <a:endParaRPr lang="en-US" sz="2266" dirty="0"/>
+          </a:p>
+        </p:txBody>
+      </p:sp>
+      <p:sp>
+        <p:nvSpPr>
+          <p:cNvPr id="13" name="Text 11"/>
+          <p:cNvSpPr/>
+          <p:nvPr/>
+        </p:nvSpPr>
+        <p:spPr>
+          <a:xfrm>
+            <a:off x="4594664" y="3373834"/>
+            <a:ext cx="3059617" cy="2062162"/>
+          </a:xfrm>
+          <a:prstGeom prst="rect">
+            <a:avLst/>
+          </a:prstGeom>
+          <a:noFill/>
+          <a:ln/>
+        </p:spPr>
+        <p:txBody>
+          <a:bodyPr wrap="square" lIns="0" tIns="0" rIns="0" bIns="0" rtlCol="0" anchor="t"/>
+          <a:lstStyle/>
+          <a:p>
+            <a:pPr algn="l" indent="0" marL="0">
+              <a:lnSpc>
+                <a:spcPts val="2706"/>
+              </a:lnSpc>
+              <a:buNone/>
+            </a:pPr>
+            <a:r>
+              <a:rPr lang="en-US" sz="1866" dirty="0">
+                <a:solidFill>
+                  <a:srgbClr val="8A8F9A"/>
+                </a:solidFill>
+                <a:latin typeface="SpaceGrotesk" pitchFamily="34" charset="0"/>
+                <a:ea typeface="SpaceGrotesk" pitchFamily="34" charset="-122"/>
+                <a:cs typeface="SpaceGrotesk" pitchFamily="34" charset="-120"/>
+              </a:rPr>
+              <a:t>With no declared owner, every call needs consensus. Two people restart the same service; nobody owns the rollback.</a:t>
+            </a:r>
+            <a:endParaRPr lang="en-US" sz="1866" dirty="0"/>
+          </a:p>
+        </p:txBody>
+      </p:sp>
+      <p:sp>
+        <p:nvSpPr>
+          <p:cNvPr id="14" name="Text 12"/>
+          <p:cNvSpPr/>
+          <p:nvPr/>
+        </p:nvSpPr>
+        <p:spPr>
+          <a:xfrm>
+            <a:off x="8114660" y="1779984"/>
+            <a:ext cx="3498769" cy="3542506"/>
+          </a:xfrm>
+          <a:prstGeom prst="roundRect">
+            <a:avLst>
+              <a:gd name="adj" fmla="val 1452"/>
+            </a:avLst>
+          </a:prstGeom>
+          <a:solidFill>
+            <a:srgbClr val="16181D"/>
+          </a:solidFill>
+          <a:ln w="12698">
+            <a:solidFill>
+              <a:srgbClr val="2A2D35"/>
+            </a:solidFill>
+          </a:ln>
+        </p:spPr>
+        <p:txBody>
+          <a:bodyPr wrap="square" rtlCol="0" anchor="ctr"/>
+          <a:lstStyle/>
+          <a:p>
+            <a:pPr indent="0" marL="0">
+              <a:buNone/>
+            </a:pPr>
+            <a:endParaRPr lang="en-US" dirty="0"/>
+          </a:p>
+        </p:txBody>
+      </p:sp>
+      <p:sp>
+        <p:nvSpPr>
+          <p:cNvPr id="15" name="Text 13"/>
+          <p:cNvSpPr/>
+          <p:nvPr/>
+        </p:nvSpPr>
+        <p:spPr>
+          <a:xfrm>
+            <a:off x="8364232" y="2029619"/>
+            <a:ext cx="3059617" cy="307975"/>
+          </a:xfrm>
+          <a:prstGeom prst="rect">
+            <a:avLst/>
+          </a:prstGeom>
+          <a:noFill/>
+          <a:ln/>
+        </p:spPr>
+        <p:txBody>
+          <a:bodyPr wrap="square" lIns="0" tIns="0" rIns="0" bIns="0" rtlCol="0" anchor="t"/>
+          <a:lstStyle/>
+          <a:p>
+            <a:pPr algn="l" indent="0" marL="0">
+              <a:lnSpc>
+                <a:spcPts val="2426"/>
+              </a:lnSpc>
+              <a:buNone/>
+            </a:pPr>
+            <a:r>
+              <a:rPr lang="en-US" sz="1733" dirty="0">
+                <a:solidFill>
+                  <a:srgbClr val="3DF5E0"/>
+                </a:solidFill>
+                <a:latin typeface="JetBrainsMono" pitchFamily="34" charset="0"/>
+                <a:ea typeface="JetBrainsMono" pitchFamily="34" charset="-122"/>
+                <a:cs typeface="JetBrainsMono" pitchFamily="34" charset="-120"/>
+              </a:rPr>
+              <a:t>[ FAILURE 03 ]</a:t>
+            </a:r>
+            <a:endParaRPr lang="en-US" sz="1733" dirty="0"/>
+          </a:p>
+        </p:txBody>
+      </p:sp>
+      <p:sp>
+        <p:nvSpPr>
+          <p:cNvPr id="16" name="Text 14"/>
+          <p:cNvSpPr/>
+          <p:nvPr/>
+        </p:nvSpPr>
+        <p:spPr>
+          <a:xfrm>
+            <a:off x="8364232" y="2489994"/>
+            <a:ext cx="3059617" cy="748506"/>
+          </a:xfrm>
+          <a:prstGeom prst="rect">
+            <a:avLst/>
+          </a:prstGeom>
+          <a:noFill/>
+          <a:ln/>
+        </p:spPr>
+        <p:txBody>
+          <a:bodyPr wrap="square" lIns="0" tIns="0" rIns="0" bIns="0" rtlCol="0" anchor="t"/>
+          <a:lstStyle/>
+          <a:p>
+            <a:pPr algn="l" indent="0" marL="0">
+              <a:lnSpc>
+                <a:spcPts val="2946"/>
+              </a:lnSpc>
+              <a:spcBef>
+                <a:spcPts val="1200"/>
+              </a:spcBef>
+              <a:spcAft>
+                <a:spcPts val="1067"/>
+              </a:spcAft>
+              <a:buNone/>
+            </a:pPr>
+            <a:r>
+              <a:rPr lang="en-US" sz="2266" dirty="0">
+                <a:solidFill>
+                  <a:srgbClr val="E4E6EB"/>
+                </a:solidFill>
+                <a:latin typeface="SpaceGrotesk" pitchFamily="34" charset="0"/>
+                <a:ea typeface="SpaceGrotesk" pitchFamily="34" charset="-122"/>
+                <a:cs typeface="SpaceGrotesk" pitchFamily="34" charset="-120"/>
+              </a:rPr>
+              <a:t>The timeline is</a:t>
+            </a:r>
+            <a:endParaRPr lang="en-US" sz="2266" dirty="0"/>
+          </a:p>
+          <a:p>
+            <a:pPr algn="l" indent="0" marL="0">
+              <a:lnSpc>
+                <a:spcPts val="2946"/>
+              </a:lnSpc>
+              <a:spcBef>
+                <a:spcPts val="1200"/>
+              </a:spcBef>
+              <a:spcAft>
+                <a:spcPts val="1067"/>
+              </a:spcAft>
+              <a:buNone/>
+            </a:pPr>
+            <a:r>
+              <a:rPr lang="en-US" sz="2266" dirty="0">
+                <a:solidFill>
+                  <a:srgbClr val="E4E6EB"/>
+                </a:solidFill>
+                <a:latin typeface="SpaceGrotesk" pitchFamily="34" charset="0"/>
+                <a:ea typeface="SpaceGrotesk" pitchFamily="34" charset="-122"/>
+                <a:cs typeface="SpaceGrotesk" pitchFamily="34" charset="-120"/>
+              </a:rPr>
+              <a:t>reconstructed.</a:t>
+            </a:r>
+            <a:endParaRPr lang="en-US" sz="2266" dirty="0"/>
+          </a:p>
+        </p:txBody>
+      </p:sp>
+      <p:sp>
+        <p:nvSpPr>
+          <p:cNvPr id="17" name="Text 15"/>
+          <p:cNvSpPr/>
+          <p:nvPr/>
+        </p:nvSpPr>
+        <p:spPr>
+          <a:xfrm>
+            <a:off x="8364232" y="3373834"/>
+            <a:ext cx="3059617" cy="1718469"/>
+          </a:xfrm>
+          <a:prstGeom prst="rect">
+            <a:avLst/>
+          </a:prstGeom>
+          <a:noFill/>
+          <a:ln/>
+        </p:spPr>
+        <p:txBody>
+          <a:bodyPr wrap="square" lIns="0" tIns="0" rIns="0" bIns="0" rtlCol="0" anchor="t"/>
+          <a:lstStyle/>
+          <a:p>
+            <a:pPr algn="l" indent="0" marL="0">
+              <a:lnSpc>
+                <a:spcPts val="2706"/>
+              </a:lnSpc>
+              <a:buNone/>
+            </a:pPr>
+            <a:r>
+              <a:rPr lang="en-US" sz="1866" dirty="0">
+                <a:solidFill>
+                  <a:srgbClr val="8A8F9A"/>
+                </a:solidFill>
+                <a:latin typeface="SpaceGrotesk" pitchFamily="34" charset="0"/>
+                <a:ea typeface="SpaceGrotesk" pitchFamily="34" charset="-122"/>
+                <a:cs typeface="SpaceGrotesk" pitchFamily="34" charset="-120"/>
+              </a:rPr>
+              <a:t>Nobody writes while it happens. The review then argues about the order of events, from memory, instead of the cause.</a:t>
+            </a:r>
+            <a:endParaRPr lang="en-US" sz="1866" dirty="0"/>
+          </a:p>
+        </p:txBody>
+      </p:sp>
+      <p:sp>
+        <p:nvSpPr>
+          <p:cNvPr id="18" name="Text 16"/>
+          <p:cNvSpPr/>
+          <p:nvPr/>
+        </p:nvSpPr>
+        <p:spPr>
+          <a:xfrm>
+            <a:off x="575523" y="5559425"/>
+            <a:ext cx="11258664" cy="343694"/>
+          </a:xfrm>
+          <a:prstGeom prst="rect">
+            <a:avLst/>
+          </a:prstGeom>
+          <a:noFill/>
+          <a:ln/>
+        </p:spPr>
+        <p:txBody>
+          <a:bodyPr wrap="square" lIns="0" tIns="0" rIns="0" bIns="0" rtlCol="0" anchor="t"/>
+          <a:lstStyle/>
+          <a:p>
+            <a:pPr algn="l" indent="0" marL="0">
+              <a:lnSpc>
+                <a:spcPts val="2706"/>
+              </a:lnSpc>
+              <a:spcBef>
+                <a:spcPts val="1866"/>
+              </a:spcBef>
+              <a:buNone/>
+            </a:pPr>
+            <a:r>
+              <a:rPr lang="en-US" sz="1866" dirty="0">
+                <a:solidFill>
+                  <a:srgbClr val="E4E6EB"/>
+                </a:solidFill>
+                <a:latin typeface="SpaceGrotesk" pitchFamily="34" charset="0"/>
+                <a:ea typeface="SpaceGrotesk" pitchFamily="34" charset="-122"/>
+                <a:cs typeface="SpaceGrotesk" pitchFamily="34" charset="-120"/>
+              </a:rPr>
+              <a:t>Not one of these is a diagnosis problem. Each is a decision nobody made.</a:t>
+            </a:r>
+            <a:endParaRPr lang="en-US" sz="1866" dirty="0"/>
+          </a:p>
+        </p:txBody>
+      </p:sp>
+      <p:sp>
+        <p:nvSpPr>
+          <p:cNvPr id="19" name="Text 17"/>
+          <p:cNvSpPr/>
+          <p:nvPr/>
+        </p:nvSpPr>
+        <p:spPr>
+          <a:xfrm>
+            <a:off x="575523" y="6089253"/>
+            <a:ext cx="5042298" cy="260747"/>
+          </a:xfrm>
+          <a:prstGeom prst="rect">
+            <a:avLst/>
+          </a:prstGeom>
+          <a:noFill/>
+          <a:ln/>
+        </p:spPr>
+        <p:txBody>
+          <a:bodyPr wrap="square" lIns="0" tIns="0" rIns="0" bIns="0" rtlCol="0" anchor="t"/>
+          <a:lstStyle/>
+          <a:p>
+            <a:pPr algn="l" indent="0" marL="0">
+              <a:lnSpc>
+                <a:spcPts val="2053"/>
+              </a:lnSpc>
+              <a:buNone/>
+            </a:pPr>
+            <a:r>
+              <a:rPr lang="en-US" sz="1466" dirty="0">
+                <a:solidFill>
+                  <a:srgbClr val="8A8F9A"/>
+                </a:solidFill>
+                <a:latin typeface="JetBrainsMono" pitchFamily="34" charset="0"/>
+                <a:ea typeface="JetBrainsMono" pitchFamily="34" charset="-122"/>
+                <a:cs typeface="JetBrainsMono" pitchFamily="34" charset="-120"/>
+              </a:rPr>
+              <a:t>INCIDENT RESPONSE · THE FIRST 30 MINUTES</a:t>
+            </a:r>
+            <a:endParaRPr lang="en-US" sz="1466" dirty="0"/>
+          </a:p>
+        </p:txBody>
+      </p:sp>
+      <p:sp>
+        <p:nvSpPr>
+          <p:cNvPr id="20" name="Text 18"/>
+          <p:cNvSpPr/>
+          <p:nvPr/>
+        </p:nvSpPr>
+        <p:spPr>
+          <a:xfrm>
+            <a:off x="8523736" y="6089253"/>
+            <a:ext cx="3151487" cy="260747"/>
+          </a:xfrm>
+          <a:prstGeom prst="rect">
+            <a:avLst/>
+          </a:prstGeom>
+          <a:noFill/>
+          <a:ln/>
+        </p:spPr>
+        <p:txBody>
+          <a:bodyPr wrap="square" lIns="0" tIns="0" rIns="0" bIns="0" rtlCol="0" anchor="t"/>
+          <a:lstStyle/>
+          <a:p>
+            <a:pPr algn="l" indent="0" marL="0">
+              <a:lnSpc>
+                <a:spcPts val="2053"/>
+              </a:lnSpc>
+              <a:buNone/>
+            </a:pPr>
+            <a:r>
+              <a:rPr lang="en-US" sz="1466" dirty="0">
+                <a:solidFill>
+                  <a:srgbClr val="8A8F9A"/>
+                </a:solidFill>
+                <a:latin typeface="JetBrainsMono" pitchFamily="34" charset="0"/>
+                <a:ea typeface="JetBrainsMono" pitchFamily="34" charset="-122"/>
+                <a:cs typeface="JetBrainsMono" pitchFamily="34" charset="-120"/>
+              </a:rPr>
+              <a:t>NO CHART · MECHANISM ONLY</a:t>
+            </a:r>
+            <a:endParaRPr lang="en-US" sz="1466" dirty="0"/>
+          </a:p>
+        </p:txBody>
+      </p:sp>
     </p:spTree>
   </p:cSld>
   <p:clrMapOvr>
@@ -1397,6 +2598,13 @@
 <file path=ppt/slides/slide3.xml><?xml version="1.0" encoding="utf-8"?>
 <p:sld xmlns:a="http://schemas.openxmlformats.org/drawingml/2006/main" xmlns:r="http://schemas.openxmlformats.org/officeDocument/2006/relationships" xmlns:p="http://schemas.openxmlformats.org/presentationml/2006/main">
   <p:cSld name="Slide 3">
+    <p:bg>
+      <p:bgPr>
+        <a:solidFill>
+          <a:srgbClr val="0C0D10"/>
+        </a:solidFill>
+      </p:bgPr>
+    </p:bg>
     <p:spTree>
       <p:nvGrpSpPr>
         <p:cNvPr id="1" name=""/>
@@ -1411,30 +2619,1104 @@
           <a:chExt cx="0" cy="0"/>
         </a:xfrm>
       </p:grpSpPr>
-      <p:pic>
-        <p:nvPicPr>
-          <p:cNvPr id="2" name="Image 0" descr="/tmp/slide-1787840578523-ih6neixuei.png">    </p:cNvPr>
-          <p:cNvPicPr>
-            <a:picLocks noChangeAspect="1"/>
-          </p:cNvPicPr>
-          <p:nvPr/>
-        </p:nvPicPr>
-        <p:blipFill>
-          <a:blip r:embed="rId1"/>
-          <a:stretch>
-            <a:fillRect/>
-          </a:stretch>
-        </p:blipFill>
-        <p:spPr>
-          <a:xfrm>
-            <a:off x="0" y="0"/>
-            <a:ext cx="12188952" cy="6858000"/>
-          </a:xfrm>
-          <a:prstGeom prst="rect">
-            <a:avLst/>
-          </a:prstGeom>
-        </p:spPr>
-      </p:pic>
+      <p:sp>
+        <p:nvSpPr>
+          <p:cNvPr id="2" name="Text 0"/>
+          <p:cNvSpPr/>
+          <p:nvPr/>
+        </p:nvSpPr>
+        <p:spPr>
+          <a:xfrm>
+            <a:off x="575523" y="440134"/>
+            <a:ext cx="1829700" cy="307975"/>
+          </a:xfrm>
+          <a:prstGeom prst="rect">
+            <a:avLst/>
+          </a:prstGeom>
+          <a:noFill/>
+          <a:ln/>
+        </p:spPr>
+        <p:txBody>
+          <a:bodyPr wrap="square" lIns="0" tIns="0" rIns="0" bIns="0" rtlCol="0" anchor="t"/>
+          <a:lstStyle/>
+          <a:p>
+            <a:pPr algn="l" indent="0" marL="0">
+              <a:lnSpc>
+                <a:spcPts val="2426"/>
+              </a:lnSpc>
+              <a:buNone/>
+            </a:pPr>
+            <a:r>
+              <a:rPr lang="en-US" sz="1733" dirty="0">
+                <a:solidFill>
+                  <a:srgbClr val="3DF5E0"/>
+                </a:solidFill>
+                <a:latin typeface="JetBrainsMono" pitchFamily="34" charset="0"/>
+                <a:ea typeface="JetBrainsMono" pitchFamily="34" charset="-122"/>
+                <a:cs typeface="JetBrainsMono" pitchFamily="34" charset="-120"/>
+              </a:rPr>
+              <a:t>// 03 — ROLES</a:t>
+            </a:r>
+            <a:endParaRPr lang="en-US" sz="1733" dirty="0"/>
+          </a:p>
+        </p:txBody>
+      </p:sp>
+      <p:sp>
+        <p:nvSpPr>
+          <p:cNvPr id="3" name="Text 1"/>
+          <p:cNvSpPr/>
+          <p:nvPr/>
+        </p:nvSpPr>
+        <p:spPr>
+          <a:xfrm>
+            <a:off x="10095563" y="440134"/>
+            <a:ext cx="1548223" cy="307975"/>
+          </a:xfrm>
+          <a:prstGeom prst="rect">
+            <a:avLst/>
+          </a:prstGeom>
+          <a:noFill/>
+          <a:ln/>
+        </p:spPr>
+        <p:txBody>
+          <a:bodyPr wrap="square" lIns="0" tIns="0" rIns="0" bIns="0" rtlCol="0" anchor="t"/>
+          <a:lstStyle/>
+          <a:p>
+            <a:pPr algn="l" indent="0" marL="0">
+              <a:lnSpc>
+                <a:spcPts val="2426"/>
+              </a:lnSpc>
+              <a:buNone/>
+            </a:pPr>
+            <a:r>
+              <a:rPr lang="en-US" sz="1733" dirty="0">
+                <a:solidFill>
+                  <a:srgbClr val="8A8F9A"/>
+                </a:solidFill>
+                <a:latin typeface="JetBrainsMono" pitchFamily="34" charset="0"/>
+                <a:ea typeface="JetBrainsMono" pitchFamily="34" charset="-122"/>
+                <a:cs typeface="JetBrainsMono" pitchFamily="34" charset="-120"/>
+              </a:rPr>
+              <a:t>[ 03 / 06 ]</a:t>
+            </a:r>
+            <a:endParaRPr lang="en-US" sz="1733" dirty="0"/>
+          </a:p>
+        </p:txBody>
+      </p:sp>
+      <p:sp>
+        <p:nvSpPr>
+          <p:cNvPr id="4" name="Text 2"/>
+          <p:cNvSpPr/>
+          <p:nvPr/>
+        </p:nvSpPr>
+        <p:spPr>
+          <a:xfrm>
+            <a:off x="575523" y="866577"/>
+            <a:ext cx="11258664" cy="528241"/>
+          </a:xfrm>
+          <a:prstGeom prst="rect">
+            <a:avLst/>
+          </a:prstGeom>
+          <a:noFill/>
+          <a:ln/>
+        </p:spPr>
+        <p:txBody>
+          <a:bodyPr wrap="square" lIns="0" tIns="0" rIns="0" bIns="0" rtlCol="0" anchor="t"/>
+          <a:lstStyle/>
+          <a:p>
+            <a:pPr algn="l" indent="0" marL="0">
+              <a:lnSpc>
+                <a:spcPts val="4159"/>
+              </a:lnSpc>
+              <a:spcAft>
+                <a:spcPts val="1200"/>
+              </a:spcAft>
+              <a:buNone/>
+            </a:pPr>
+            <a:r>
+              <a:rPr lang="en-US" sz="3466" b="1" dirty="0">
+                <a:solidFill>
+                  <a:srgbClr val="E4E6EB"/>
+                </a:solidFill>
+                <a:latin typeface="SpaceGrotesk" pitchFamily="34" charset="0"/>
+                <a:ea typeface="SpaceGrotesk" pitchFamily="34" charset="-122"/>
+                <a:cs typeface="SpaceGrotesk" pitchFamily="34" charset="-120"/>
+              </a:rPr>
+              <a:t>Three roles, defined by what they don't do</a:t>
+            </a:r>
+            <a:endParaRPr lang="en-US" sz="3466" dirty="0"/>
+          </a:p>
+        </p:txBody>
+      </p:sp>
+      <p:sp>
+        <p:nvSpPr>
+          <p:cNvPr id="5" name="Text 3"/>
+          <p:cNvSpPr/>
+          <p:nvPr/>
+        </p:nvSpPr>
+        <p:spPr>
+          <a:xfrm>
+            <a:off x="575523" y="1547217"/>
+            <a:ext cx="11037905" cy="12700"/>
+          </a:xfrm>
+          <a:prstGeom prst="rect">
+            <a:avLst/>
+          </a:prstGeom>
+          <a:solidFill>
+            <a:srgbClr val="2A2D35"/>
+          </a:solidFill>
+          <a:ln/>
+        </p:spPr>
+        <p:txBody>
+          <a:bodyPr wrap="square" rtlCol="0" anchor="ctr"/>
+          <a:lstStyle/>
+          <a:p>
+            <a:pPr indent="0" marL="0">
+              <a:buNone/>
+            </a:pPr>
+            <a:endParaRPr lang="en-US" dirty="0"/>
+          </a:p>
+        </p:txBody>
+      </p:sp>
+      <p:sp>
+        <p:nvSpPr>
+          <p:cNvPr id="6" name="Text 4"/>
+          <p:cNvSpPr/>
+          <p:nvPr/>
+        </p:nvSpPr>
+        <p:spPr>
+          <a:xfrm>
+            <a:off x="575523" y="1779984"/>
+            <a:ext cx="3498769" cy="4123134"/>
+          </a:xfrm>
+          <a:prstGeom prst="roundRect">
+            <a:avLst>
+              <a:gd name="adj" fmla="val 1452"/>
+            </a:avLst>
+          </a:prstGeom>
+          <a:solidFill>
+            <a:srgbClr val="16181D"/>
+          </a:solidFill>
+          <a:ln w="12698">
+            <a:solidFill>
+              <a:srgbClr val="2A2D35"/>
+            </a:solidFill>
+          </a:ln>
+        </p:spPr>
+        <p:txBody>
+          <a:bodyPr wrap="square" rtlCol="0" anchor="ctr"/>
+          <a:lstStyle/>
+          <a:p>
+            <a:pPr indent="0" marL="0">
+              <a:buNone/>
+            </a:pPr>
+            <a:endParaRPr lang="en-US" dirty="0"/>
+          </a:p>
+        </p:txBody>
+      </p:sp>
+      <p:sp>
+        <p:nvSpPr>
+          <p:cNvPr id="7" name="Text 5"/>
+          <p:cNvSpPr/>
+          <p:nvPr/>
+        </p:nvSpPr>
+        <p:spPr>
+          <a:xfrm>
+            <a:off x="825095" y="2029619"/>
+            <a:ext cx="3059617" cy="307975"/>
+          </a:xfrm>
+          <a:prstGeom prst="rect">
+            <a:avLst/>
+          </a:prstGeom>
+          <a:noFill/>
+          <a:ln/>
+        </p:spPr>
+        <p:txBody>
+          <a:bodyPr wrap="square" lIns="0" tIns="0" rIns="0" bIns="0" rtlCol="0" anchor="t"/>
+          <a:lstStyle/>
+          <a:p>
+            <a:pPr algn="l" indent="0" marL="0">
+              <a:lnSpc>
+                <a:spcPts val="2426"/>
+              </a:lnSpc>
+              <a:spcAft>
+                <a:spcPts val="1200"/>
+              </a:spcAft>
+              <a:buNone/>
+            </a:pPr>
+            <a:r>
+              <a:rPr lang="en-US" sz="1733" dirty="0">
+                <a:solidFill>
+                  <a:srgbClr val="3DF5E0"/>
+                </a:solidFill>
+                <a:latin typeface="JetBrainsMono" pitchFamily="34" charset="0"/>
+                <a:ea typeface="JetBrainsMono" pitchFamily="34" charset="-122"/>
+                <a:cs typeface="JetBrainsMono" pitchFamily="34" charset="-120"/>
+              </a:rPr>
+              <a:t>[ COMMANDER ]</a:t>
+            </a:r>
+            <a:endParaRPr lang="en-US" sz="1733" dirty="0"/>
+          </a:p>
+        </p:txBody>
+      </p:sp>
+      <p:sp>
+        <p:nvSpPr>
+          <p:cNvPr id="8" name="Text 6"/>
+          <p:cNvSpPr/>
+          <p:nvPr/>
+        </p:nvSpPr>
+        <p:spPr>
+          <a:xfrm>
+            <a:off x="825095" y="2489994"/>
+            <a:ext cx="3059617" cy="307975"/>
+          </a:xfrm>
+          <a:prstGeom prst="rect">
+            <a:avLst/>
+          </a:prstGeom>
+          <a:noFill/>
+          <a:ln/>
+        </p:spPr>
+        <p:txBody>
+          <a:bodyPr wrap="square" lIns="0" tIns="0" rIns="0" bIns="0" rtlCol="0" anchor="t"/>
+          <a:lstStyle/>
+          <a:p>
+            <a:pPr algn="l" indent="0" marL="0">
+              <a:lnSpc>
+                <a:spcPts val="2426"/>
+              </a:lnSpc>
+              <a:spcAft>
+                <a:spcPts val="667"/>
+              </a:spcAft>
+              <a:buNone/>
+            </a:pPr>
+            <a:r>
+              <a:rPr lang="en-US" sz="1733" dirty="0">
+                <a:solidFill>
+                  <a:srgbClr val="3DF5E0"/>
+                </a:solidFill>
+                <a:latin typeface="JetBrainsMono" pitchFamily="34" charset="0"/>
+                <a:ea typeface="JetBrainsMono" pitchFamily="34" charset="-122"/>
+                <a:cs typeface="JetBrainsMono" pitchFamily="34" charset="-120"/>
+              </a:rPr>
+              <a:t>// DOES</a:t>
+            </a:r>
+            <a:endParaRPr lang="en-US" sz="1733" dirty="0"/>
+          </a:p>
+        </p:txBody>
+      </p:sp>
+      <p:sp>
+        <p:nvSpPr>
+          <p:cNvPr id="9" name="Text 7"/>
+          <p:cNvSpPr/>
+          <p:nvPr/>
+        </p:nvSpPr>
+        <p:spPr>
+          <a:xfrm>
+            <a:off x="825095" y="2882503"/>
+            <a:ext cx="3059617" cy="1031081"/>
+          </a:xfrm>
+          <a:prstGeom prst="rect">
+            <a:avLst/>
+          </a:prstGeom>
+          <a:noFill/>
+          <a:ln/>
+        </p:spPr>
+        <p:txBody>
+          <a:bodyPr wrap="square" lIns="0" tIns="0" rIns="0" bIns="0" rtlCol="0" anchor="t"/>
+          <a:lstStyle/>
+          <a:p>
+            <a:pPr algn="l" indent="0" marL="0">
+              <a:lnSpc>
+                <a:spcPts val="2706"/>
+              </a:lnSpc>
+              <a:buNone/>
+            </a:pPr>
+            <a:r>
+              <a:rPr lang="en-US" sz="1866" dirty="0">
+                <a:solidFill>
+                  <a:srgbClr val="8A8F9A"/>
+                </a:solidFill>
+                <a:latin typeface="SpaceGrotesk" pitchFamily="34" charset="0"/>
+                <a:ea typeface="SpaceGrotesk" pitchFamily="34" charset="-122"/>
+                <a:cs typeface="SpaceGrotesk" pitchFamily="34" charset="-120"/>
+              </a:rPr>
+              <a:t>Declares, assigns each role by name, decides, and keeps the log.</a:t>
+            </a:r>
+            <a:endParaRPr lang="en-US" sz="1866" dirty="0"/>
+          </a:p>
+        </p:txBody>
+      </p:sp>
+      <p:sp>
+        <p:nvSpPr>
+          <p:cNvPr id="10" name="Text 8"/>
+          <p:cNvSpPr/>
+          <p:nvPr/>
+        </p:nvSpPr>
+        <p:spPr>
+          <a:xfrm>
+            <a:off x="825095" y="4082852"/>
+            <a:ext cx="2999625" cy="12700"/>
+          </a:xfrm>
+          <a:prstGeom prst="rect">
+            <a:avLst/>
+          </a:prstGeom>
+          <a:solidFill>
+            <a:srgbClr val="2A2D35"/>
+          </a:solidFill>
+          <a:ln/>
+        </p:spPr>
+        <p:txBody>
+          <a:bodyPr wrap="square" rtlCol="0" anchor="ctr"/>
+          <a:lstStyle/>
+          <a:p>
+            <a:pPr indent="0" marL="0">
+              <a:buNone/>
+            </a:pPr>
+            <a:endParaRPr lang="en-US" dirty="0"/>
+          </a:p>
+        </p:txBody>
+      </p:sp>
+      <p:sp>
+        <p:nvSpPr>
+          <p:cNvPr id="11" name="Text 9"/>
+          <p:cNvSpPr/>
+          <p:nvPr/>
+        </p:nvSpPr>
+        <p:spPr>
+          <a:xfrm>
+            <a:off x="825095" y="4264819"/>
+            <a:ext cx="3059617" cy="307975"/>
+          </a:xfrm>
+          <a:prstGeom prst="rect">
+            <a:avLst/>
+          </a:prstGeom>
+          <a:noFill/>
+          <a:ln/>
+        </p:spPr>
+        <p:txBody>
+          <a:bodyPr wrap="square" lIns="0" tIns="0" rIns="0" bIns="0" rtlCol="0" anchor="t"/>
+          <a:lstStyle/>
+          <a:p>
+            <a:pPr algn="l" indent="0" marL="0">
+              <a:lnSpc>
+                <a:spcPts val="2426"/>
+              </a:lnSpc>
+              <a:spcAft>
+                <a:spcPts val="667"/>
+              </a:spcAft>
+              <a:buNone/>
+            </a:pPr>
+            <a:r>
+              <a:rPr lang="en-US" sz="1733" dirty="0">
+                <a:solidFill>
+                  <a:srgbClr val="9D7BFF"/>
+                </a:solidFill>
+                <a:latin typeface="JetBrainsMono" pitchFamily="34" charset="0"/>
+                <a:ea typeface="JetBrainsMono" pitchFamily="34" charset="-122"/>
+                <a:cs typeface="JetBrainsMono" pitchFamily="34" charset="-120"/>
+              </a:rPr>
+              <a:t>// DOES NOT</a:t>
+            </a:r>
+            <a:endParaRPr lang="en-US" sz="1733" dirty="0"/>
+          </a:p>
+        </p:txBody>
+      </p:sp>
+      <p:sp>
+        <p:nvSpPr>
+          <p:cNvPr id="12" name="Text 10"/>
+          <p:cNvSpPr/>
+          <p:nvPr/>
+        </p:nvSpPr>
+        <p:spPr>
+          <a:xfrm>
+            <a:off x="825095" y="4657328"/>
+            <a:ext cx="3059617" cy="1031081"/>
+          </a:xfrm>
+          <a:prstGeom prst="rect">
+            <a:avLst/>
+          </a:prstGeom>
+          <a:noFill/>
+          <a:ln/>
+        </p:spPr>
+        <p:txBody>
+          <a:bodyPr wrap="square" lIns="0" tIns="0" rIns="0" bIns="0" rtlCol="0" anchor="t"/>
+          <a:lstStyle/>
+          <a:p>
+            <a:pPr algn="l" indent="0" marL="0">
+              <a:lnSpc>
+                <a:spcPts val="2706"/>
+              </a:lnSpc>
+              <a:buNone/>
+            </a:pPr>
+            <a:r>
+              <a:rPr lang="en-US" sz="1866" dirty="0">
+                <a:solidFill>
+                  <a:srgbClr val="E4E6EB"/>
+                </a:solidFill>
+                <a:latin typeface="SpaceGrotesk" pitchFamily="34" charset="0"/>
+                <a:ea typeface="SpaceGrotesk" pitchFamily="34" charset="-122"/>
+                <a:cs typeface="SpaceGrotesk" pitchFamily="34" charset="-120"/>
+              </a:rPr>
+              <a:t>Touch a terminal. A commander who debugs is no longer commanding.</a:t>
+            </a:r>
+            <a:endParaRPr lang="en-US" sz="1866" dirty="0"/>
+          </a:p>
+        </p:txBody>
+      </p:sp>
+      <p:sp>
+        <p:nvSpPr>
+          <p:cNvPr id="13" name="Text 11"/>
+          <p:cNvSpPr/>
+          <p:nvPr/>
+        </p:nvSpPr>
+        <p:spPr>
+          <a:xfrm>
+            <a:off x="4345092" y="1779984"/>
+            <a:ext cx="3498769" cy="4123134"/>
+          </a:xfrm>
+          <a:prstGeom prst="roundRect">
+            <a:avLst>
+              <a:gd name="adj" fmla="val 1452"/>
+            </a:avLst>
+          </a:prstGeom>
+          <a:solidFill>
+            <a:srgbClr val="16181D"/>
+          </a:solidFill>
+          <a:ln w="12698">
+            <a:solidFill>
+              <a:srgbClr val="2A2D35"/>
+            </a:solidFill>
+          </a:ln>
+        </p:spPr>
+        <p:txBody>
+          <a:bodyPr wrap="square" rtlCol="0" anchor="ctr"/>
+          <a:lstStyle/>
+          <a:p>
+            <a:pPr indent="0" marL="0">
+              <a:buNone/>
+            </a:pPr>
+            <a:endParaRPr lang="en-US" dirty="0"/>
+          </a:p>
+        </p:txBody>
+      </p:sp>
+      <p:sp>
+        <p:nvSpPr>
+          <p:cNvPr id="14" name="Text 12"/>
+          <p:cNvSpPr/>
+          <p:nvPr/>
+        </p:nvSpPr>
+        <p:spPr>
+          <a:xfrm>
+            <a:off x="4594664" y="2029619"/>
+            <a:ext cx="3059617" cy="307975"/>
+          </a:xfrm>
+          <a:prstGeom prst="rect">
+            <a:avLst/>
+          </a:prstGeom>
+          <a:noFill/>
+          <a:ln/>
+        </p:spPr>
+        <p:txBody>
+          <a:bodyPr wrap="square" lIns="0" tIns="0" rIns="0" bIns="0" rtlCol="0" anchor="t"/>
+          <a:lstStyle/>
+          <a:p>
+            <a:pPr algn="l" indent="0" marL="0">
+              <a:lnSpc>
+                <a:spcPts val="2426"/>
+              </a:lnSpc>
+              <a:spcAft>
+                <a:spcPts val="1200"/>
+              </a:spcAft>
+              <a:buNone/>
+            </a:pPr>
+            <a:r>
+              <a:rPr lang="en-US" sz="1733" dirty="0">
+                <a:solidFill>
+                  <a:srgbClr val="3DF5E0"/>
+                </a:solidFill>
+                <a:latin typeface="JetBrainsMono" pitchFamily="34" charset="0"/>
+                <a:ea typeface="JetBrainsMono" pitchFamily="34" charset="-122"/>
+                <a:cs typeface="JetBrainsMono" pitchFamily="34" charset="-120"/>
+              </a:rPr>
+              <a:t>[ COMMS ]</a:t>
+            </a:r>
+            <a:endParaRPr lang="en-US" sz="1733" dirty="0"/>
+          </a:p>
+        </p:txBody>
+      </p:sp>
+      <p:sp>
+        <p:nvSpPr>
+          <p:cNvPr id="15" name="Text 13"/>
+          <p:cNvSpPr/>
+          <p:nvPr/>
+        </p:nvSpPr>
+        <p:spPr>
+          <a:xfrm>
+            <a:off x="4594664" y="2489994"/>
+            <a:ext cx="3059617" cy="307975"/>
+          </a:xfrm>
+          <a:prstGeom prst="rect">
+            <a:avLst/>
+          </a:prstGeom>
+          <a:noFill/>
+          <a:ln/>
+        </p:spPr>
+        <p:txBody>
+          <a:bodyPr wrap="square" lIns="0" tIns="0" rIns="0" bIns="0" rtlCol="0" anchor="t"/>
+          <a:lstStyle/>
+          <a:p>
+            <a:pPr algn="l" indent="0" marL="0">
+              <a:lnSpc>
+                <a:spcPts val="2426"/>
+              </a:lnSpc>
+              <a:spcAft>
+                <a:spcPts val="667"/>
+              </a:spcAft>
+              <a:buNone/>
+            </a:pPr>
+            <a:r>
+              <a:rPr lang="en-US" sz="1733" dirty="0">
+                <a:solidFill>
+                  <a:srgbClr val="3DF5E0"/>
+                </a:solidFill>
+                <a:latin typeface="JetBrainsMono" pitchFamily="34" charset="0"/>
+                <a:ea typeface="JetBrainsMono" pitchFamily="34" charset="-122"/>
+                <a:cs typeface="JetBrainsMono" pitchFamily="34" charset="-120"/>
+              </a:rPr>
+              <a:t>// DOES</a:t>
+            </a:r>
+            <a:endParaRPr lang="en-US" sz="1733" dirty="0"/>
+          </a:p>
+        </p:txBody>
+      </p:sp>
+      <p:sp>
+        <p:nvSpPr>
+          <p:cNvPr id="16" name="Text 14"/>
+          <p:cNvSpPr/>
+          <p:nvPr/>
+        </p:nvSpPr>
+        <p:spPr>
+          <a:xfrm>
+            <a:off x="4594664" y="2882503"/>
+            <a:ext cx="3059617" cy="1031081"/>
+          </a:xfrm>
+          <a:prstGeom prst="rect">
+            <a:avLst/>
+          </a:prstGeom>
+          <a:noFill/>
+          <a:ln/>
+        </p:spPr>
+        <p:txBody>
+          <a:bodyPr wrap="square" lIns="0" tIns="0" rIns="0" bIns="0" rtlCol="0" anchor="t"/>
+          <a:lstStyle/>
+          <a:p>
+            <a:pPr algn="l" indent="0" marL="0">
+              <a:lnSpc>
+                <a:spcPts val="2706"/>
+              </a:lnSpc>
+              <a:buNone/>
+            </a:pPr>
+            <a:r>
+              <a:rPr lang="en-US" sz="1866" dirty="0">
+                <a:solidFill>
+                  <a:srgbClr val="8A8F9A"/>
+                </a:solidFill>
+                <a:latin typeface="SpaceGrotesk" pitchFamily="34" charset="0"/>
+                <a:ea typeface="SpaceGrotesk" pitchFamily="34" charset="-122"/>
+                <a:cs typeface="SpaceGrotesk" pitchFamily="34" charset="-120"/>
+              </a:rPr>
+              <a:t>Writes to stakeholders on cadence, including when nothing changed.</a:t>
+            </a:r>
+            <a:endParaRPr lang="en-US" sz="1866" dirty="0"/>
+          </a:p>
+        </p:txBody>
+      </p:sp>
+      <p:sp>
+        <p:nvSpPr>
+          <p:cNvPr id="17" name="Text 15"/>
+          <p:cNvSpPr/>
+          <p:nvPr/>
+        </p:nvSpPr>
+        <p:spPr>
+          <a:xfrm>
+            <a:off x="4594664" y="4082852"/>
+            <a:ext cx="2999625" cy="12700"/>
+          </a:xfrm>
+          <a:prstGeom prst="rect">
+            <a:avLst/>
+          </a:prstGeom>
+          <a:solidFill>
+            <a:srgbClr val="2A2D35"/>
+          </a:solidFill>
+          <a:ln/>
+        </p:spPr>
+        <p:txBody>
+          <a:bodyPr wrap="square" rtlCol="0" anchor="ctr"/>
+          <a:lstStyle/>
+          <a:p>
+            <a:pPr indent="0" marL="0">
+              <a:buNone/>
+            </a:pPr>
+            <a:endParaRPr lang="en-US" dirty="0"/>
+          </a:p>
+        </p:txBody>
+      </p:sp>
+      <p:sp>
+        <p:nvSpPr>
+          <p:cNvPr id="18" name="Text 16"/>
+          <p:cNvSpPr/>
+          <p:nvPr/>
+        </p:nvSpPr>
+        <p:spPr>
+          <a:xfrm>
+            <a:off x="4594664" y="4264819"/>
+            <a:ext cx="3059617" cy="307975"/>
+          </a:xfrm>
+          <a:prstGeom prst="rect">
+            <a:avLst/>
+          </a:prstGeom>
+          <a:noFill/>
+          <a:ln/>
+        </p:spPr>
+        <p:txBody>
+          <a:bodyPr wrap="square" lIns="0" tIns="0" rIns="0" bIns="0" rtlCol="0" anchor="t"/>
+          <a:lstStyle/>
+          <a:p>
+            <a:pPr algn="l" indent="0" marL="0">
+              <a:lnSpc>
+                <a:spcPts val="2426"/>
+              </a:lnSpc>
+              <a:spcAft>
+                <a:spcPts val="667"/>
+              </a:spcAft>
+              <a:buNone/>
+            </a:pPr>
+            <a:r>
+              <a:rPr lang="en-US" sz="1733" dirty="0">
+                <a:solidFill>
+                  <a:srgbClr val="9D7BFF"/>
+                </a:solidFill>
+                <a:latin typeface="JetBrainsMono" pitchFamily="34" charset="0"/>
+                <a:ea typeface="JetBrainsMono" pitchFamily="34" charset="-122"/>
+                <a:cs typeface="JetBrainsMono" pitchFamily="34" charset="-120"/>
+              </a:rPr>
+              <a:t>// DOES NOT</a:t>
+            </a:r>
+            <a:endParaRPr lang="en-US" sz="1733" dirty="0"/>
+          </a:p>
+        </p:txBody>
+      </p:sp>
+      <p:sp>
+        <p:nvSpPr>
+          <p:cNvPr id="19" name="Text 17"/>
+          <p:cNvSpPr/>
+          <p:nvPr/>
+        </p:nvSpPr>
+        <p:spPr>
+          <a:xfrm>
+            <a:off x="4594664" y="4657328"/>
+            <a:ext cx="3059617" cy="1031081"/>
+          </a:xfrm>
+          <a:prstGeom prst="rect">
+            <a:avLst/>
+          </a:prstGeom>
+          <a:noFill/>
+          <a:ln/>
+        </p:spPr>
+        <p:txBody>
+          <a:bodyPr wrap="square" lIns="0" tIns="0" rIns="0" bIns="0" rtlCol="0" anchor="t"/>
+          <a:lstStyle/>
+          <a:p>
+            <a:pPr algn="l" indent="0" marL="0">
+              <a:lnSpc>
+                <a:spcPts val="2706"/>
+              </a:lnSpc>
+              <a:buNone/>
+            </a:pPr>
+            <a:r>
+              <a:rPr lang="en-US" sz="1866" dirty="0">
+                <a:solidFill>
+                  <a:srgbClr val="E4E6EB"/>
+                </a:solidFill>
+                <a:latin typeface="SpaceGrotesk" pitchFamily="34" charset="0"/>
+                <a:ea typeface="SpaceGrotesk" pitchFamily="34" charset="-122"/>
+                <a:cs typeface="SpaceGrotesk" pitchFamily="34" charset="-120"/>
+              </a:rPr>
+              <a:t>Diagnose, or promise a fix time. “We don't know yet” is a full update.</a:t>
+            </a:r>
+            <a:endParaRPr lang="en-US" sz="1866" dirty="0"/>
+          </a:p>
+        </p:txBody>
+      </p:sp>
+      <p:sp>
+        <p:nvSpPr>
+          <p:cNvPr id="20" name="Text 18"/>
+          <p:cNvSpPr/>
+          <p:nvPr/>
+        </p:nvSpPr>
+        <p:spPr>
+          <a:xfrm>
+            <a:off x="8114660" y="1779984"/>
+            <a:ext cx="3498769" cy="4123134"/>
+          </a:xfrm>
+          <a:prstGeom prst="roundRect">
+            <a:avLst>
+              <a:gd name="adj" fmla="val 1452"/>
+            </a:avLst>
+          </a:prstGeom>
+          <a:solidFill>
+            <a:srgbClr val="16181D"/>
+          </a:solidFill>
+          <a:ln w="12698">
+            <a:solidFill>
+              <a:srgbClr val="2A2D35"/>
+            </a:solidFill>
+          </a:ln>
+        </p:spPr>
+        <p:txBody>
+          <a:bodyPr wrap="square" rtlCol="0" anchor="ctr"/>
+          <a:lstStyle/>
+          <a:p>
+            <a:pPr indent="0" marL="0">
+              <a:buNone/>
+            </a:pPr>
+            <a:endParaRPr lang="en-US" dirty="0"/>
+          </a:p>
+        </p:txBody>
+      </p:sp>
+      <p:sp>
+        <p:nvSpPr>
+          <p:cNvPr id="21" name="Text 19"/>
+          <p:cNvSpPr/>
+          <p:nvPr/>
+        </p:nvSpPr>
+        <p:spPr>
+          <a:xfrm>
+            <a:off x="8364232" y="2029619"/>
+            <a:ext cx="3059617" cy="307975"/>
+          </a:xfrm>
+          <a:prstGeom prst="rect">
+            <a:avLst/>
+          </a:prstGeom>
+          <a:noFill/>
+          <a:ln/>
+        </p:spPr>
+        <p:txBody>
+          <a:bodyPr wrap="square" lIns="0" tIns="0" rIns="0" bIns="0" rtlCol="0" anchor="t"/>
+          <a:lstStyle/>
+          <a:p>
+            <a:pPr algn="l" indent="0" marL="0">
+              <a:lnSpc>
+                <a:spcPts val="2426"/>
+              </a:lnSpc>
+              <a:spcAft>
+                <a:spcPts val="1200"/>
+              </a:spcAft>
+              <a:buNone/>
+            </a:pPr>
+            <a:r>
+              <a:rPr lang="en-US" sz="1733" dirty="0">
+                <a:solidFill>
+                  <a:srgbClr val="3DF5E0"/>
+                </a:solidFill>
+                <a:latin typeface="JetBrainsMono" pitchFamily="34" charset="0"/>
+                <a:ea typeface="JetBrainsMono" pitchFamily="34" charset="-122"/>
+                <a:cs typeface="JetBrainsMono" pitchFamily="34" charset="-120"/>
+              </a:rPr>
+              <a:t>[ INVESTIGATOR ]</a:t>
+            </a:r>
+            <a:endParaRPr lang="en-US" sz="1733" dirty="0"/>
+          </a:p>
+        </p:txBody>
+      </p:sp>
+      <p:sp>
+        <p:nvSpPr>
+          <p:cNvPr id="22" name="Text 20"/>
+          <p:cNvSpPr/>
+          <p:nvPr/>
+        </p:nvSpPr>
+        <p:spPr>
+          <a:xfrm>
+            <a:off x="8364232" y="2489994"/>
+            <a:ext cx="3059617" cy="307975"/>
+          </a:xfrm>
+          <a:prstGeom prst="rect">
+            <a:avLst/>
+          </a:prstGeom>
+          <a:noFill/>
+          <a:ln/>
+        </p:spPr>
+        <p:txBody>
+          <a:bodyPr wrap="square" lIns="0" tIns="0" rIns="0" bIns="0" rtlCol="0" anchor="t"/>
+          <a:lstStyle/>
+          <a:p>
+            <a:pPr algn="l" indent="0" marL="0">
+              <a:lnSpc>
+                <a:spcPts val="2426"/>
+              </a:lnSpc>
+              <a:spcAft>
+                <a:spcPts val="667"/>
+              </a:spcAft>
+              <a:buNone/>
+            </a:pPr>
+            <a:r>
+              <a:rPr lang="en-US" sz="1733" dirty="0">
+                <a:solidFill>
+                  <a:srgbClr val="3DF5E0"/>
+                </a:solidFill>
+                <a:latin typeface="JetBrainsMono" pitchFamily="34" charset="0"/>
+                <a:ea typeface="JetBrainsMono" pitchFamily="34" charset="-122"/>
+                <a:cs typeface="JetBrainsMono" pitchFamily="34" charset="-120"/>
+              </a:rPr>
+              <a:t>// DOES</a:t>
+            </a:r>
+            <a:endParaRPr lang="en-US" sz="1733" dirty="0"/>
+          </a:p>
+        </p:txBody>
+      </p:sp>
+      <p:sp>
+        <p:nvSpPr>
+          <p:cNvPr id="23" name="Text 21"/>
+          <p:cNvSpPr/>
+          <p:nvPr/>
+        </p:nvSpPr>
+        <p:spPr>
+          <a:xfrm>
+            <a:off x="8364232" y="2882503"/>
+            <a:ext cx="3059617" cy="1031081"/>
+          </a:xfrm>
+          <a:prstGeom prst="rect">
+            <a:avLst/>
+          </a:prstGeom>
+          <a:noFill/>
+          <a:ln/>
+        </p:spPr>
+        <p:txBody>
+          <a:bodyPr wrap="square" lIns="0" tIns="0" rIns="0" bIns="0" rtlCol="0" anchor="t"/>
+          <a:lstStyle/>
+          <a:p>
+            <a:pPr algn="l" indent="0" marL="0">
+              <a:lnSpc>
+                <a:spcPts val="2706"/>
+              </a:lnSpc>
+              <a:buNone/>
+            </a:pPr>
+            <a:r>
+              <a:rPr lang="en-US" sz="1866" dirty="0">
+                <a:solidFill>
+                  <a:srgbClr val="8A8F9A"/>
+                </a:solidFill>
+                <a:latin typeface="SpaceGrotesk" pitchFamily="34" charset="0"/>
+                <a:ea typeface="SpaceGrotesk" pitchFamily="34" charset="-122"/>
+                <a:cs typeface="SpaceGrotesk" pitchFamily="34" charset="-120"/>
+              </a:rPr>
+              <a:t>One hypothesis at a time — tested, and the result said out loud.</a:t>
+            </a:r>
+            <a:endParaRPr lang="en-US" sz="1866" dirty="0"/>
+          </a:p>
+        </p:txBody>
+      </p:sp>
+      <p:sp>
+        <p:nvSpPr>
+          <p:cNvPr id="24" name="Text 22"/>
+          <p:cNvSpPr/>
+          <p:nvPr/>
+        </p:nvSpPr>
+        <p:spPr>
+          <a:xfrm>
+            <a:off x="8364232" y="4082852"/>
+            <a:ext cx="2999625" cy="12700"/>
+          </a:xfrm>
+          <a:prstGeom prst="rect">
+            <a:avLst/>
+          </a:prstGeom>
+          <a:solidFill>
+            <a:srgbClr val="2A2D35"/>
+          </a:solidFill>
+          <a:ln/>
+        </p:spPr>
+        <p:txBody>
+          <a:bodyPr wrap="square" rtlCol="0" anchor="ctr"/>
+          <a:lstStyle/>
+          <a:p>
+            <a:pPr indent="0" marL="0">
+              <a:buNone/>
+            </a:pPr>
+            <a:endParaRPr lang="en-US" dirty="0"/>
+          </a:p>
+        </p:txBody>
+      </p:sp>
+      <p:sp>
+        <p:nvSpPr>
+          <p:cNvPr id="25" name="Text 23"/>
+          <p:cNvSpPr/>
+          <p:nvPr/>
+        </p:nvSpPr>
+        <p:spPr>
+          <a:xfrm>
+            <a:off x="8364232" y="4264819"/>
+            <a:ext cx="3059617" cy="307975"/>
+          </a:xfrm>
+          <a:prstGeom prst="rect">
+            <a:avLst/>
+          </a:prstGeom>
+          <a:noFill/>
+          <a:ln/>
+        </p:spPr>
+        <p:txBody>
+          <a:bodyPr wrap="square" lIns="0" tIns="0" rIns="0" bIns="0" rtlCol="0" anchor="t"/>
+          <a:lstStyle/>
+          <a:p>
+            <a:pPr algn="l" indent="0" marL="0">
+              <a:lnSpc>
+                <a:spcPts val="2426"/>
+              </a:lnSpc>
+              <a:spcAft>
+                <a:spcPts val="667"/>
+              </a:spcAft>
+              <a:buNone/>
+            </a:pPr>
+            <a:r>
+              <a:rPr lang="en-US" sz="1733" dirty="0">
+                <a:solidFill>
+                  <a:srgbClr val="9D7BFF"/>
+                </a:solidFill>
+                <a:latin typeface="JetBrainsMono" pitchFamily="34" charset="0"/>
+                <a:ea typeface="JetBrainsMono" pitchFamily="34" charset="-122"/>
+                <a:cs typeface="JetBrainsMono" pitchFamily="34" charset="-120"/>
+              </a:rPr>
+              <a:t>// DOES NOT</a:t>
+            </a:r>
+            <a:endParaRPr lang="en-US" sz="1733" dirty="0"/>
+          </a:p>
+        </p:txBody>
+      </p:sp>
+      <p:sp>
+        <p:nvSpPr>
+          <p:cNvPr id="26" name="Text 24"/>
+          <p:cNvSpPr/>
+          <p:nvPr/>
+        </p:nvSpPr>
+        <p:spPr>
+          <a:xfrm>
+            <a:off x="8364232" y="4657328"/>
+            <a:ext cx="3059617" cy="1031081"/>
+          </a:xfrm>
+          <a:prstGeom prst="rect">
+            <a:avLst/>
+          </a:prstGeom>
+          <a:noFill/>
+          <a:ln/>
+        </p:spPr>
+        <p:txBody>
+          <a:bodyPr wrap="square" lIns="0" tIns="0" rIns="0" bIns="0" rtlCol="0" anchor="t"/>
+          <a:lstStyle/>
+          <a:p>
+            <a:pPr algn="l" indent="0" marL="0">
+              <a:lnSpc>
+                <a:spcPts val="2706"/>
+              </a:lnSpc>
+              <a:buNone/>
+            </a:pPr>
+            <a:r>
+              <a:rPr lang="en-US" sz="1866" dirty="0">
+                <a:solidFill>
+                  <a:srgbClr val="E4E6EB"/>
+                </a:solidFill>
+                <a:latin typeface="SpaceGrotesk" pitchFamily="34" charset="0"/>
+                <a:ea typeface="SpaceGrotesk" pitchFamily="34" charset="-122"/>
+                <a:cs typeface="SpaceGrotesk" pitchFamily="34" charset="-120"/>
+              </a:rPr>
+              <a:t>Answer stakeholders, or change production without announcing it.</a:t>
+            </a:r>
+            <a:endParaRPr lang="en-US" sz="1866" dirty="0"/>
+          </a:p>
+        </p:txBody>
+      </p:sp>
+      <p:sp>
+        <p:nvSpPr>
+          <p:cNvPr id="27" name="Text 25"/>
+          <p:cNvSpPr/>
+          <p:nvPr/>
+        </p:nvSpPr>
+        <p:spPr>
+          <a:xfrm>
+            <a:off x="575523" y="6089253"/>
+            <a:ext cx="5042298" cy="260747"/>
+          </a:xfrm>
+          <a:prstGeom prst="rect">
+            <a:avLst/>
+          </a:prstGeom>
+          <a:noFill/>
+          <a:ln/>
+        </p:spPr>
+        <p:txBody>
+          <a:bodyPr wrap="square" lIns="0" tIns="0" rIns="0" bIns="0" rtlCol="0" anchor="t"/>
+          <a:lstStyle/>
+          <a:p>
+            <a:pPr algn="l" indent="0" marL="0">
+              <a:lnSpc>
+                <a:spcPts val="2053"/>
+              </a:lnSpc>
+              <a:buNone/>
+            </a:pPr>
+            <a:r>
+              <a:rPr lang="en-US" sz="1466" dirty="0">
+                <a:solidFill>
+                  <a:srgbClr val="8A8F9A"/>
+                </a:solidFill>
+                <a:latin typeface="JetBrainsMono" pitchFamily="34" charset="0"/>
+                <a:ea typeface="JetBrainsMono" pitchFamily="34" charset="-122"/>
+                <a:cs typeface="JetBrainsMono" pitchFamily="34" charset="-120"/>
+              </a:rPr>
+              <a:t>INCIDENT RESPONSE · THE FIRST 30 MINUTES</a:t>
+            </a:r>
+            <a:endParaRPr lang="en-US" sz="1466" dirty="0"/>
+          </a:p>
+        </p:txBody>
+      </p:sp>
+      <p:sp>
+        <p:nvSpPr>
+          <p:cNvPr id="28" name="Text 26"/>
+          <p:cNvSpPr/>
+          <p:nvPr/>
+        </p:nvSpPr>
+        <p:spPr>
+          <a:xfrm>
+            <a:off x="6793595" y="6089253"/>
+            <a:ext cx="4916230" cy="260747"/>
+          </a:xfrm>
+          <a:prstGeom prst="rect">
+            <a:avLst/>
+          </a:prstGeom>
+          <a:noFill/>
+          <a:ln/>
+        </p:spPr>
+        <p:txBody>
+          <a:bodyPr wrap="square" lIns="0" tIns="0" rIns="0" bIns="0" rtlCol="0" anchor="t"/>
+          <a:lstStyle/>
+          <a:p>
+            <a:pPr algn="l" indent="0" marL="0">
+              <a:lnSpc>
+                <a:spcPts val="2053"/>
+              </a:lnSpc>
+              <a:buNone/>
+            </a:pPr>
+            <a:r>
+              <a:rPr lang="en-US" sz="1466" dirty="0">
+                <a:solidFill>
+                  <a:srgbClr val="8A8F9A"/>
+                </a:solidFill>
+                <a:latin typeface="JetBrainsMono" pitchFamily="34" charset="0"/>
+                <a:ea typeface="JetBrainsMono" pitchFamily="34" charset="-122"/>
+                <a:cs typeface="JetBrainsMono" pitchFamily="34" charset="-120"/>
+              </a:rPr>
+              <a:t>EACH ROLE IS ONE PERSON, NAMED OUT LOUD</a:t>
+            </a:r>
+            <a:endParaRPr lang="en-US" sz="1466" dirty="0"/>
+          </a:p>
+        </p:txBody>
+      </p:sp>
     </p:spTree>
   </p:cSld>
   <p:clrMapOvr>
@@ -1446,6 +3728,13 @@
 <file path=ppt/slides/slide4.xml><?xml version="1.0" encoding="utf-8"?>
 <p:sld xmlns:a="http://schemas.openxmlformats.org/drawingml/2006/main" xmlns:r="http://schemas.openxmlformats.org/officeDocument/2006/relationships" xmlns:p="http://schemas.openxmlformats.org/presentationml/2006/main">
   <p:cSld name="Slide 4">
+    <p:bg>
+      <p:bgPr>
+        <a:solidFill>
+          <a:srgbClr val="0C0D10"/>
+        </a:solidFill>
+      </p:bgPr>
+    </p:bg>
     <p:spTree>
       <p:nvGrpSpPr>
         <p:cNvPr id="1" name=""/>
@@ -1460,30 +3749,1270 @@
           <a:chExt cx="0" cy="0"/>
         </a:xfrm>
       </p:grpSpPr>
-      <p:pic>
-        <p:nvPicPr>
-          <p:cNvPr id="2" name="Image 0" descr="/tmp/slide-1787840578866-d7sjp4nb3g9.png">    </p:cNvPr>
-          <p:cNvPicPr>
-            <a:picLocks noChangeAspect="1"/>
-          </p:cNvPicPr>
-          <p:nvPr/>
-        </p:nvPicPr>
-        <p:blipFill>
-          <a:blip r:embed="rId1"/>
-          <a:stretch>
-            <a:fillRect/>
-          </a:stretch>
-        </p:blipFill>
-        <p:spPr>
-          <a:xfrm>
-            <a:off x="0" y="0"/>
-            <a:ext cx="12188952" cy="6858000"/>
-          </a:xfrm>
-          <a:prstGeom prst="rect">
-            <a:avLst/>
-          </a:prstGeom>
-        </p:spPr>
-      </p:pic>
+      <p:sp>
+        <p:nvSpPr>
+          <p:cNvPr id="2" name="Text 0"/>
+          <p:cNvSpPr/>
+          <p:nvPr/>
+        </p:nvSpPr>
+        <p:spPr>
+          <a:xfrm>
+            <a:off x="575523" y="440134"/>
+            <a:ext cx="2251814" cy="307975"/>
+          </a:xfrm>
+          <a:prstGeom prst="rect">
+            <a:avLst/>
+          </a:prstGeom>
+          <a:noFill/>
+          <a:ln/>
+        </p:spPr>
+        <p:txBody>
+          <a:bodyPr wrap="square" lIns="0" tIns="0" rIns="0" bIns="0" rtlCol="0" anchor="t"/>
+          <a:lstStyle/>
+          <a:p>
+            <a:pPr algn="l" indent="0" marL="0">
+              <a:lnSpc>
+                <a:spcPts val="2426"/>
+              </a:lnSpc>
+              <a:buNone/>
+            </a:pPr>
+            <a:r>
+              <a:rPr lang="en-US" sz="1733" dirty="0">
+                <a:solidFill>
+                  <a:srgbClr val="3DF5E0"/>
+                </a:solidFill>
+                <a:latin typeface="JetBrainsMono" pitchFamily="34" charset="0"/>
+                <a:ea typeface="JetBrainsMono" pitchFamily="34" charset="-122"/>
+                <a:cs typeface="JetBrainsMono" pitchFamily="34" charset="-120"/>
+              </a:rPr>
+              <a:t>// 04 — SEQUENCE</a:t>
+            </a:r>
+            <a:endParaRPr lang="en-US" sz="1733" dirty="0"/>
+          </a:p>
+        </p:txBody>
+      </p:sp>
+      <p:sp>
+        <p:nvSpPr>
+          <p:cNvPr id="3" name="Text 1"/>
+          <p:cNvSpPr/>
+          <p:nvPr/>
+        </p:nvSpPr>
+        <p:spPr>
+          <a:xfrm>
+            <a:off x="10095563" y="440134"/>
+            <a:ext cx="1548223" cy="307975"/>
+          </a:xfrm>
+          <a:prstGeom prst="rect">
+            <a:avLst/>
+          </a:prstGeom>
+          <a:noFill/>
+          <a:ln/>
+        </p:spPr>
+        <p:txBody>
+          <a:bodyPr wrap="square" lIns="0" tIns="0" rIns="0" bIns="0" rtlCol="0" anchor="t"/>
+          <a:lstStyle/>
+          <a:p>
+            <a:pPr algn="l" indent="0" marL="0">
+              <a:lnSpc>
+                <a:spcPts val="2426"/>
+              </a:lnSpc>
+              <a:buNone/>
+            </a:pPr>
+            <a:r>
+              <a:rPr lang="en-US" sz="1733" dirty="0">
+                <a:solidFill>
+                  <a:srgbClr val="8A8F9A"/>
+                </a:solidFill>
+                <a:latin typeface="JetBrainsMono" pitchFamily="34" charset="0"/>
+                <a:ea typeface="JetBrainsMono" pitchFamily="34" charset="-122"/>
+                <a:cs typeface="JetBrainsMono" pitchFamily="34" charset="-120"/>
+              </a:rPr>
+              <a:t>[ 04 / 06 ]</a:t>
+            </a:r>
+            <a:endParaRPr lang="en-US" sz="1733" dirty="0"/>
+          </a:p>
+        </p:txBody>
+      </p:sp>
+      <p:sp>
+        <p:nvSpPr>
+          <p:cNvPr id="4" name="Text 2"/>
+          <p:cNvSpPr/>
+          <p:nvPr/>
+        </p:nvSpPr>
+        <p:spPr>
+          <a:xfrm>
+            <a:off x="575523" y="866577"/>
+            <a:ext cx="11258664" cy="528241"/>
+          </a:xfrm>
+          <a:prstGeom prst="rect">
+            <a:avLst/>
+          </a:prstGeom>
+          <a:noFill/>
+          <a:ln/>
+        </p:spPr>
+        <p:txBody>
+          <a:bodyPr wrap="square" lIns="0" tIns="0" rIns="0" bIns="0" rtlCol="0" anchor="t"/>
+          <a:lstStyle/>
+          <a:p>
+            <a:pPr algn="l" indent="0" marL="0">
+              <a:lnSpc>
+                <a:spcPts val="4159"/>
+              </a:lnSpc>
+              <a:spcAft>
+                <a:spcPts val="1200"/>
+              </a:spcAft>
+              <a:buNone/>
+            </a:pPr>
+            <a:r>
+              <a:rPr lang="en-US" sz="3466" b="1" dirty="0">
+                <a:solidFill>
+                  <a:srgbClr val="E4E6EB"/>
+                </a:solidFill>
+                <a:latin typeface="SpaceGrotesk" pitchFamily="34" charset="0"/>
+                <a:ea typeface="SpaceGrotesk" pitchFamily="34" charset="-122"/>
+                <a:cs typeface="SpaceGrotesk" pitchFamily="34" charset="-120"/>
+              </a:rPr>
+              <a:t>Five checkpoints, not a clock</a:t>
+            </a:r>
+            <a:endParaRPr lang="en-US" sz="3466" dirty="0"/>
+          </a:p>
+        </p:txBody>
+      </p:sp>
+      <p:sp>
+        <p:nvSpPr>
+          <p:cNvPr id="5" name="Text 3"/>
+          <p:cNvSpPr/>
+          <p:nvPr/>
+        </p:nvSpPr>
+        <p:spPr>
+          <a:xfrm>
+            <a:off x="575523" y="1547217"/>
+            <a:ext cx="11037905" cy="12700"/>
+          </a:xfrm>
+          <a:prstGeom prst="rect">
+            <a:avLst/>
+          </a:prstGeom>
+          <a:solidFill>
+            <a:srgbClr val="2A2D35"/>
+          </a:solidFill>
+          <a:ln/>
+        </p:spPr>
+        <p:txBody>
+          <a:bodyPr wrap="square" rtlCol="0" anchor="ctr"/>
+          <a:lstStyle/>
+          <a:p>
+            <a:pPr indent="0" marL="0">
+              <a:buNone/>
+            </a:pPr>
+            <a:endParaRPr lang="en-US" dirty="0"/>
+          </a:p>
+        </p:txBody>
+      </p:sp>
+      <p:sp>
+        <p:nvSpPr>
+          <p:cNvPr id="6" name="Text 4"/>
+          <p:cNvSpPr/>
+          <p:nvPr/>
+        </p:nvSpPr>
+        <p:spPr>
+          <a:xfrm>
+            <a:off x="575523" y="1779984"/>
+            <a:ext cx="6050636" cy="260747"/>
+          </a:xfrm>
+          <a:prstGeom prst="rect">
+            <a:avLst/>
+          </a:prstGeom>
+          <a:noFill/>
+          <a:ln/>
+        </p:spPr>
+        <p:txBody>
+          <a:bodyPr wrap="square" lIns="0" tIns="0" rIns="0" bIns="0" rtlCol="0" anchor="t"/>
+          <a:lstStyle/>
+          <a:p>
+            <a:pPr algn="l" indent="0" marL="0">
+              <a:lnSpc>
+                <a:spcPts val="2053"/>
+              </a:lnSpc>
+              <a:buNone/>
+            </a:pPr>
+            <a:r>
+              <a:rPr lang="en-US" sz="1466" dirty="0">
+                <a:solidFill>
+                  <a:srgbClr val="8A8F9A"/>
+                </a:solidFill>
+                <a:latin typeface="JetBrainsMono" pitchFamily="34" charset="0"/>
+                <a:ea typeface="JetBrainsMono" pitchFamily="34" charset="-122"/>
+                <a:cs typeface="JetBrainsMono" pitchFamily="34" charset="-120"/>
+              </a:rPr>
+              <a:t>[ CHECKPOINT ] EACH ONE IS PASSED, NOT SCHEDULED</a:t>
+            </a:r>
+            <a:endParaRPr lang="en-US" sz="1466" dirty="0"/>
+          </a:p>
+        </p:txBody>
+      </p:sp>
+      <p:sp>
+        <p:nvSpPr>
+          <p:cNvPr id="7" name="Text 5"/>
+          <p:cNvSpPr/>
+          <p:nvPr/>
+        </p:nvSpPr>
+        <p:spPr>
+          <a:xfrm>
+            <a:off x="7905956" y="1779984"/>
+            <a:ext cx="3781622" cy="260747"/>
+          </a:xfrm>
+          <a:prstGeom prst="rect">
+            <a:avLst/>
+          </a:prstGeom>
+          <a:noFill/>
+          <a:ln/>
+        </p:spPr>
+        <p:txBody>
+          <a:bodyPr wrap="square" lIns="0" tIns="0" rIns="0" bIns="0" rtlCol="0" anchor="t"/>
+          <a:lstStyle/>
+          <a:p>
+            <a:pPr algn="l" indent="0" marL="0">
+              <a:lnSpc>
+                <a:spcPts val="2053"/>
+              </a:lnSpc>
+              <a:buNone/>
+            </a:pPr>
+            <a:r>
+              <a:rPr lang="en-US" sz="1466" dirty="0">
+                <a:solidFill>
+                  <a:srgbClr val="8A8F9A"/>
+                </a:solidFill>
+                <a:latin typeface="JetBrainsMono" pitchFamily="34" charset="0"/>
+                <a:ea typeface="JetBrainsMono" pitchFamily="34" charset="-122"/>
+                <a:cs typeface="JetBrainsMono" pitchFamily="34" charset="-120"/>
+              </a:rPr>
+              <a:t>// NO CLOCK, NO MINUTE MARKERS</a:t>
+            </a:r>
+            <a:endParaRPr lang="en-US" sz="1466" dirty="0"/>
+          </a:p>
+        </p:txBody>
+      </p:sp>
+      <p:sp>
+        <p:nvSpPr>
+          <p:cNvPr id="8" name="Text 6"/>
+          <p:cNvSpPr/>
+          <p:nvPr/>
+        </p:nvSpPr>
+        <p:spPr>
+          <a:xfrm>
+            <a:off x="575523" y="2209998"/>
+            <a:ext cx="11037905" cy="643930"/>
+          </a:xfrm>
+          <a:prstGeom prst="roundRect">
+            <a:avLst>
+              <a:gd name="adj" fmla="val 7888"/>
+            </a:avLst>
+          </a:prstGeom>
+          <a:solidFill>
+            <a:srgbClr val="16181D"/>
+          </a:solidFill>
+          <a:ln w="12698">
+            <a:solidFill>
+              <a:srgbClr val="3DF5E0"/>
+            </a:solidFill>
+          </a:ln>
+          <a:effectLst>
+            <a:outerShdw sx="100000" sy="100000" kx="0" ky="0" algn="bl" rotWithShape="0" blurRad="101587" dist="50800" dir="16200000">
+              <a:srgbClr val="3df5e0">
+                <a:alpha val="45000"/>
+              </a:srgbClr>
+            </a:outerShdw>
+          </a:effectLst>
+        </p:spPr>
+        <p:txBody>
+          <a:bodyPr wrap="square" rtlCol="0" anchor="ctr"/>
+          <a:lstStyle/>
+          <a:p>
+            <a:pPr indent="0" marL="0">
+              <a:buNone/>
+            </a:pPr>
+            <a:endParaRPr lang="en-US" dirty="0"/>
+          </a:p>
+        </p:txBody>
+      </p:sp>
+      <p:sp>
+        <p:nvSpPr>
+          <p:cNvPr id="9" name="Text 7"/>
+          <p:cNvSpPr/>
+          <p:nvPr/>
+        </p:nvSpPr>
+        <p:spPr>
+          <a:xfrm>
+            <a:off x="825095" y="2378670"/>
+            <a:ext cx="703793" cy="307975"/>
+          </a:xfrm>
+          <a:prstGeom prst="rect">
+            <a:avLst/>
+          </a:prstGeom>
+          <a:noFill/>
+          <a:ln/>
+        </p:spPr>
+        <p:txBody>
+          <a:bodyPr wrap="square" lIns="0" tIns="0" rIns="0" bIns="0" rtlCol="0" anchor="t"/>
+          <a:lstStyle/>
+          <a:p>
+            <a:pPr algn="l" indent="0" marL="0">
+              <a:lnSpc>
+                <a:spcPts val="2426"/>
+              </a:lnSpc>
+              <a:buNone/>
+            </a:pPr>
+            <a:r>
+              <a:rPr lang="en-US" sz="1733" dirty="0">
+                <a:solidFill>
+                  <a:srgbClr val="3DF5E0"/>
+                </a:solidFill>
+                <a:latin typeface="JetBrainsMono" pitchFamily="34" charset="0"/>
+                <a:ea typeface="JetBrainsMono" pitchFamily="34" charset="-122"/>
+                <a:cs typeface="JetBrainsMono" pitchFamily="34" charset="-120"/>
+              </a:rPr>
+              <a:t>// 01</a:t>
+            </a:r>
+            <a:endParaRPr lang="en-US" sz="1733" dirty="0"/>
+          </a:p>
+        </p:txBody>
+      </p:sp>
+      <p:sp>
+        <p:nvSpPr>
+          <p:cNvPr id="10" name="Text 8"/>
+          <p:cNvSpPr/>
+          <p:nvPr/>
+        </p:nvSpPr>
+        <p:spPr>
+          <a:xfrm>
+            <a:off x="1718238" y="2365970"/>
+            <a:ext cx="1098791" cy="331986"/>
+          </a:xfrm>
+          <a:prstGeom prst="rect">
+            <a:avLst/>
+          </a:prstGeom>
+          <a:noFill/>
+          <a:ln/>
+        </p:spPr>
+        <p:txBody>
+          <a:bodyPr wrap="square" lIns="0" tIns="0" rIns="0" bIns="0" rtlCol="0" anchor="t"/>
+          <a:lstStyle/>
+          <a:p>
+            <a:pPr algn="l" indent="0" marL="0">
+              <a:lnSpc>
+                <a:spcPts val="2613"/>
+              </a:lnSpc>
+              <a:buNone/>
+            </a:pPr>
+            <a:r>
+              <a:rPr lang="en-US" sz="1866" dirty="0">
+                <a:solidFill>
+                  <a:srgbClr val="E4E6EB"/>
+                </a:solidFill>
+                <a:latin typeface="JetBrainsMono" pitchFamily="34" charset="0"/>
+                <a:ea typeface="JetBrainsMono" pitchFamily="34" charset="-122"/>
+                <a:cs typeface="JetBrainsMono" pitchFamily="34" charset="-120"/>
+              </a:rPr>
+              <a:t>DECLARE</a:t>
+            </a:r>
+            <a:endParaRPr lang="en-US" sz="1866" dirty="0"/>
+          </a:p>
+        </p:txBody>
+      </p:sp>
+      <p:sp>
+        <p:nvSpPr>
+          <p:cNvPr id="11" name="Text 9"/>
+          <p:cNvSpPr/>
+          <p:nvPr/>
+        </p:nvSpPr>
+        <p:spPr>
+          <a:xfrm>
+            <a:off x="3804485" y="2360017"/>
+            <a:ext cx="6604888" cy="343694"/>
+          </a:xfrm>
+          <a:prstGeom prst="rect">
+            <a:avLst/>
+          </a:prstGeom>
+          <a:noFill/>
+          <a:ln/>
+        </p:spPr>
+        <p:txBody>
+          <a:bodyPr wrap="square" lIns="0" tIns="0" rIns="0" bIns="0" rtlCol="0" anchor="t"/>
+          <a:lstStyle/>
+          <a:p>
+            <a:pPr algn="l" indent="0" marL="0">
+              <a:lnSpc>
+                <a:spcPts val="2706"/>
+              </a:lnSpc>
+              <a:buNone/>
+            </a:pPr>
+            <a:r>
+              <a:rPr lang="en-US" sz="1866" dirty="0">
+                <a:solidFill>
+                  <a:srgbClr val="E4E6EB"/>
+                </a:solidFill>
+                <a:latin typeface="SpaceGrotesk" pitchFamily="34" charset="0"/>
+                <a:ea typeface="SpaceGrotesk" pitchFamily="34" charset="-122"/>
+                <a:cs typeface="SpaceGrotesk" pitchFamily="34" charset="-120"/>
+              </a:rPr>
+              <a:t>Someone says the word out loud. Ambiguity ends there.</a:t>
+            </a:r>
+            <a:endParaRPr lang="en-US" sz="1866" dirty="0"/>
+          </a:p>
+        </p:txBody>
+      </p:sp>
+      <p:sp>
+        <p:nvSpPr>
+          <p:cNvPr id="12" name="Text 10"/>
+          <p:cNvSpPr/>
+          <p:nvPr/>
+        </p:nvSpPr>
+        <p:spPr>
+          <a:xfrm>
+            <a:off x="981822" y="2853928"/>
+            <a:ext cx="25394" cy="118467"/>
+          </a:xfrm>
+          <a:prstGeom prst="rect">
+            <a:avLst/>
+          </a:prstGeom>
+          <a:solidFill>
+            <a:srgbClr val="3DF5E0"/>
+          </a:solidFill>
+          <a:ln/>
+        </p:spPr>
+        <p:txBody>
+          <a:bodyPr wrap="square" rtlCol="0" anchor="ctr"/>
+          <a:lstStyle/>
+          <a:p>
+            <a:pPr indent="0" marL="0">
+              <a:buNone/>
+            </a:pPr>
+            <a:endParaRPr lang="en-US" dirty="0"/>
+          </a:p>
+        </p:txBody>
+      </p:sp>
+      <p:sp>
+        <p:nvSpPr>
+          <p:cNvPr id="13" name="Text 11"/>
+          <p:cNvSpPr/>
+          <p:nvPr/>
+        </p:nvSpPr>
+        <p:spPr>
+          <a:xfrm>
+            <a:off x="575523" y="2972395"/>
+            <a:ext cx="11037905" cy="643930"/>
+          </a:xfrm>
+          <a:prstGeom prst="roundRect">
+            <a:avLst>
+              <a:gd name="adj" fmla="val 7888"/>
+            </a:avLst>
+          </a:prstGeom>
+          <a:solidFill>
+            <a:srgbClr val="16181D"/>
+          </a:solidFill>
+          <a:ln w="12698">
+            <a:solidFill>
+              <a:srgbClr val="2A2D35"/>
+            </a:solidFill>
+          </a:ln>
+        </p:spPr>
+        <p:txBody>
+          <a:bodyPr wrap="square" rtlCol="0" anchor="ctr"/>
+          <a:lstStyle/>
+          <a:p>
+            <a:pPr indent="0" marL="0">
+              <a:buNone/>
+            </a:pPr>
+            <a:endParaRPr lang="en-US" dirty="0"/>
+          </a:p>
+        </p:txBody>
+      </p:sp>
+      <p:sp>
+        <p:nvSpPr>
+          <p:cNvPr id="14" name="Text 12"/>
+          <p:cNvSpPr/>
+          <p:nvPr/>
+        </p:nvSpPr>
+        <p:spPr>
+          <a:xfrm>
+            <a:off x="825095" y="3141067"/>
+            <a:ext cx="703793" cy="307975"/>
+          </a:xfrm>
+          <a:prstGeom prst="rect">
+            <a:avLst/>
+          </a:prstGeom>
+          <a:noFill/>
+          <a:ln/>
+        </p:spPr>
+        <p:txBody>
+          <a:bodyPr wrap="square" lIns="0" tIns="0" rIns="0" bIns="0" rtlCol="0" anchor="t"/>
+          <a:lstStyle/>
+          <a:p>
+            <a:pPr algn="l" indent="0" marL="0">
+              <a:lnSpc>
+                <a:spcPts val="2426"/>
+              </a:lnSpc>
+              <a:buNone/>
+            </a:pPr>
+            <a:r>
+              <a:rPr lang="en-US" sz="1733" dirty="0">
+                <a:solidFill>
+                  <a:srgbClr val="3DF5E0"/>
+                </a:solidFill>
+                <a:latin typeface="JetBrainsMono" pitchFamily="34" charset="0"/>
+                <a:ea typeface="JetBrainsMono" pitchFamily="34" charset="-122"/>
+                <a:cs typeface="JetBrainsMono" pitchFamily="34" charset="-120"/>
+              </a:rPr>
+              <a:t>// 02</a:t>
+            </a:r>
+            <a:endParaRPr lang="en-US" sz="1733" dirty="0"/>
+          </a:p>
+        </p:txBody>
+      </p:sp>
+      <p:sp>
+        <p:nvSpPr>
+          <p:cNvPr id="15" name="Text 13"/>
+          <p:cNvSpPr/>
+          <p:nvPr/>
+        </p:nvSpPr>
+        <p:spPr>
+          <a:xfrm>
+            <a:off x="1718238" y="3128367"/>
+            <a:ext cx="941966" cy="331986"/>
+          </a:xfrm>
+          <a:prstGeom prst="rect">
+            <a:avLst/>
+          </a:prstGeom>
+          <a:noFill/>
+          <a:ln/>
+        </p:spPr>
+        <p:txBody>
+          <a:bodyPr wrap="square" lIns="0" tIns="0" rIns="0" bIns="0" rtlCol="0" anchor="t"/>
+          <a:lstStyle/>
+          <a:p>
+            <a:pPr algn="l" indent="0" marL="0">
+              <a:lnSpc>
+                <a:spcPts val="2613"/>
+              </a:lnSpc>
+              <a:buNone/>
+            </a:pPr>
+            <a:r>
+              <a:rPr lang="en-US" sz="1866" dirty="0">
+                <a:solidFill>
+                  <a:srgbClr val="E4E6EB"/>
+                </a:solidFill>
+                <a:latin typeface="JetBrainsMono" pitchFamily="34" charset="0"/>
+                <a:ea typeface="JetBrainsMono" pitchFamily="34" charset="-122"/>
+                <a:cs typeface="JetBrainsMono" pitchFamily="34" charset="-120"/>
+              </a:rPr>
+              <a:t>ASSIGN</a:t>
+            </a:r>
+            <a:endParaRPr lang="en-US" sz="1866" dirty="0"/>
+          </a:p>
+        </p:txBody>
+      </p:sp>
+      <p:sp>
+        <p:nvSpPr>
+          <p:cNvPr id="16" name="Text 14"/>
+          <p:cNvSpPr/>
+          <p:nvPr/>
+        </p:nvSpPr>
+        <p:spPr>
+          <a:xfrm>
+            <a:off x="3804485" y="3122414"/>
+            <a:ext cx="6850953" cy="343694"/>
+          </a:xfrm>
+          <a:prstGeom prst="rect">
+            <a:avLst/>
+          </a:prstGeom>
+          <a:noFill/>
+          <a:ln/>
+        </p:spPr>
+        <p:txBody>
+          <a:bodyPr wrap="square" lIns="0" tIns="0" rIns="0" bIns="0" rtlCol="0" anchor="t"/>
+          <a:lstStyle/>
+          <a:p>
+            <a:pPr algn="l" indent="0" marL="0">
+              <a:lnSpc>
+                <a:spcPts val="2706"/>
+              </a:lnSpc>
+              <a:buNone/>
+            </a:pPr>
+            <a:r>
+              <a:rPr lang="en-US" sz="1866" dirty="0">
+                <a:solidFill>
+                  <a:srgbClr val="E4E6EB"/>
+                </a:solidFill>
+                <a:latin typeface="SpaceGrotesk" pitchFamily="34" charset="0"/>
+                <a:ea typeface="SpaceGrotesk" pitchFamily="34" charset="-122"/>
+                <a:cs typeface="SpaceGrotesk" pitchFamily="34" charset="-120"/>
+              </a:rPr>
+              <a:t>Commander, comms, investigator — named, in the channel.</a:t>
+            </a:r>
+            <a:endParaRPr lang="en-US" sz="1866" dirty="0"/>
+          </a:p>
+        </p:txBody>
+      </p:sp>
+      <p:sp>
+        <p:nvSpPr>
+          <p:cNvPr id="17" name="Text 15"/>
+          <p:cNvSpPr/>
+          <p:nvPr/>
+        </p:nvSpPr>
+        <p:spPr>
+          <a:xfrm>
+            <a:off x="981822" y="3616325"/>
+            <a:ext cx="25394" cy="118467"/>
+          </a:xfrm>
+          <a:prstGeom prst="rect">
+            <a:avLst/>
+          </a:prstGeom>
+          <a:solidFill>
+            <a:srgbClr val="3DF5E0"/>
+          </a:solidFill>
+          <a:ln/>
+        </p:spPr>
+        <p:txBody>
+          <a:bodyPr wrap="square" rtlCol="0" anchor="ctr"/>
+          <a:lstStyle/>
+          <a:p>
+            <a:pPr indent="0" marL="0">
+              <a:buNone/>
+            </a:pPr>
+            <a:endParaRPr lang="en-US" dirty="0"/>
+          </a:p>
+        </p:txBody>
+      </p:sp>
+      <p:sp>
+        <p:nvSpPr>
+          <p:cNvPr id="18" name="Text 16"/>
+          <p:cNvSpPr/>
+          <p:nvPr/>
+        </p:nvSpPr>
+        <p:spPr>
+          <a:xfrm>
+            <a:off x="575523" y="3734792"/>
+            <a:ext cx="11037905" cy="643930"/>
+          </a:xfrm>
+          <a:prstGeom prst="roundRect">
+            <a:avLst>
+              <a:gd name="adj" fmla="val 7888"/>
+            </a:avLst>
+          </a:prstGeom>
+          <a:solidFill>
+            <a:srgbClr val="16181D"/>
+          </a:solidFill>
+          <a:ln w="12698">
+            <a:solidFill>
+              <a:srgbClr val="2A2D35"/>
+            </a:solidFill>
+          </a:ln>
+        </p:spPr>
+        <p:txBody>
+          <a:bodyPr wrap="square" rtlCol="0" anchor="ctr"/>
+          <a:lstStyle/>
+          <a:p>
+            <a:pPr indent="0" marL="0">
+              <a:buNone/>
+            </a:pPr>
+            <a:endParaRPr lang="en-US" dirty="0"/>
+          </a:p>
+        </p:txBody>
+      </p:sp>
+      <p:sp>
+        <p:nvSpPr>
+          <p:cNvPr id="19" name="Text 17"/>
+          <p:cNvSpPr/>
+          <p:nvPr/>
+        </p:nvSpPr>
+        <p:spPr>
+          <a:xfrm>
+            <a:off x="825095" y="3903464"/>
+            <a:ext cx="703793" cy="307975"/>
+          </a:xfrm>
+          <a:prstGeom prst="rect">
+            <a:avLst/>
+          </a:prstGeom>
+          <a:noFill/>
+          <a:ln/>
+        </p:spPr>
+        <p:txBody>
+          <a:bodyPr wrap="square" lIns="0" tIns="0" rIns="0" bIns="0" rtlCol="0" anchor="t"/>
+          <a:lstStyle/>
+          <a:p>
+            <a:pPr algn="l" indent="0" marL="0">
+              <a:lnSpc>
+                <a:spcPts val="2426"/>
+              </a:lnSpc>
+              <a:buNone/>
+            </a:pPr>
+            <a:r>
+              <a:rPr lang="en-US" sz="1733" dirty="0">
+                <a:solidFill>
+                  <a:srgbClr val="3DF5E0"/>
+                </a:solidFill>
+                <a:latin typeface="JetBrainsMono" pitchFamily="34" charset="0"/>
+                <a:ea typeface="JetBrainsMono" pitchFamily="34" charset="-122"/>
+                <a:cs typeface="JetBrainsMono" pitchFamily="34" charset="-120"/>
+              </a:rPr>
+              <a:t>// 03</a:t>
+            </a:r>
+            <a:endParaRPr lang="en-US" sz="1733" dirty="0"/>
+          </a:p>
+        </p:txBody>
+      </p:sp>
+      <p:sp>
+        <p:nvSpPr>
+          <p:cNvPr id="20" name="Text 18"/>
+          <p:cNvSpPr/>
+          <p:nvPr/>
+        </p:nvSpPr>
+        <p:spPr>
+          <a:xfrm>
+            <a:off x="1718238" y="3890764"/>
+            <a:ext cx="1412847" cy="331986"/>
+          </a:xfrm>
+          <a:prstGeom prst="rect">
+            <a:avLst/>
+          </a:prstGeom>
+          <a:noFill/>
+          <a:ln/>
+        </p:spPr>
+        <p:txBody>
+          <a:bodyPr wrap="square" lIns="0" tIns="0" rIns="0" bIns="0" rtlCol="0" anchor="t"/>
+          <a:lstStyle/>
+          <a:p>
+            <a:pPr algn="l" indent="0" marL="0">
+              <a:lnSpc>
+                <a:spcPts val="2613"/>
+              </a:lnSpc>
+              <a:buNone/>
+            </a:pPr>
+            <a:r>
+              <a:rPr lang="en-US" sz="1866" dirty="0">
+                <a:solidFill>
+                  <a:srgbClr val="E4E6EB"/>
+                </a:solidFill>
+                <a:latin typeface="JetBrainsMono" pitchFamily="34" charset="0"/>
+                <a:ea typeface="JetBrainsMono" pitchFamily="34" charset="-122"/>
+                <a:cs typeface="JetBrainsMono" pitchFamily="34" charset="-120"/>
+              </a:rPr>
+              <a:t>STABILISE</a:t>
+            </a:r>
+            <a:endParaRPr lang="en-US" sz="1866" dirty="0"/>
+          </a:p>
+        </p:txBody>
+      </p:sp>
+      <p:sp>
+        <p:nvSpPr>
+          <p:cNvPr id="21" name="Text 19"/>
+          <p:cNvSpPr/>
+          <p:nvPr/>
+        </p:nvSpPr>
+        <p:spPr>
+          <a:xfrm>
+            <a:off x="3804485" y="3884811"/>
+            <a:ext cx="6527184" cy="343694"/>
+          </a:xfrm>
+          <a:prstGeom prst="rect">
+            <a:avLst/>
+          </a:prstGeom>
+          <a:noFill/>
+          <a:ln/>
+        </p:spPr>
+        <p:txBody>
+          <a:bodyPr wrap="square" lIns="0" tIns="0" rIns="0" bIns="0" rtlCol="0" anchor="t"/>
+          <a:lstStyle/>
+          <a:p>
+            <a:pPr algn="l" indent="0" marL="0">
+              <a:lnSpc>
+                <a:spcPts val="2706"/>
+              </a:lnSpc>
+              <a:buNone/>
+            </a:pPr>
+            <a:r>
+              <a:rPr lang="en-US" sz="1866" dirty="0">
+                <a:solidFill>
+                  <a:srgbClr val="E4E6EB"/>
+                </a:solidFill>
+                <a:latin typeface="SpaceGrotesk" pitchFamily="34" charset="0"/>
+                <a:ea typeface="SpaceGrotesk" pitchFamily="34" charset="-122"/>
+                <a:cs typeface="SpaceGrotesk" pitchFamily="34" charset="-120"/>
+              </a:rPr>
+              <a:t>Restore service first; the cause can wait for the review.</a:t>
+            </a:r>
+            <a:endParaRPr lang="en-US" sz="1866" dirty="0"/>
+          </a:p>
+        </p:txBody>
+      </p:sp>
+      <p:sp>
+        <p:nvSpPr>
+          <p:cNvPr id="22" name="Text 20"/>
+          <p:cNvSpPr/>
+          <p:nvPr/>
+        </p:nvSpPr>
+        <p:spPr>
+          <a:xfrm>
+            <a:off x="981822" y="4378722"/>
+            <a:ext cx="25394" cy="118467"/>
+          </a:xfrm>
+          <a:prstGeom prst="rect">
+            <a:avLst/>
+          </a:prstGeom>
+          <a:solidFill>
+            <a:srgbClr val="3DF5E0"/>
+          </a:solidFill>
+          <a:ln/>
+        </p:spPr>
+        <p:txBody>
+          <a:bodyPr wrap="square" rtlCol="0" anchor="ctr"/>
+          <a:lstStyle/>
+          <a:p>
+            <a:pPr indent="0" marL="0">
+              <a:buNone/>
+            </a:pPr>
+            <a:endParaRPr lang="en-US" dirty="0"/>
+          </a:p>
+        </p:txBody>
+      </p:sp>
+      <p:sp>
+        <p:nvSpPr>
+          <p:cNvPr id="23" name="Text 21"/>
+          <p:cNvSpPr/>
+          <p:nvPr/>
+        </p:nvSpPr>
+        <p:spPr>
+          <a:xfrm>
+            <a:off x="575523" y="4497189"/>
+            <a:ext cx="11037905" cy="643930"/>
+          </a:xfrm>
+          <a:prstGeom prst="roundRect">
+            <a:avLst>
+              <a:gd name="adj" fmla="val 7888"/>
+            </a:avLst>
+          </a:prstGeom>
+          <a:solidFill>
+            <a:srgbClr val="16181D"/>
+          </a:solidFill>
+          <a:ln w="12698">
+            <a:solidFill>
+              <a:srgbClr val="2A2D35"/>
+            </a:solidFill>
+          </a:ln>
+        </p:spPr>
+        <p:txBody>
+          <a:bodyPr wrap="square" rtlCol="0" anchor="ctr"/>
+          <a:lstStyle/>
+          <a:p>
+            <a:pPr indent="0" marL="0">
+              <a:buNone/>
+            </a:pPr>
+            <a:endParaRPr lang="en-US" dirty="0"/>
+          </a:p>
+        </p:txBody>
+      </p:sp>
+      <p:sp>
+        <p:nvSpPr>
+          <p:cNvPr id="24" name="Text 22"/>
+          <p:cNvSpPr/>
+          <p:nvPr/>
+        </p:nvSpPr>
+        <p:spPr>
+          <a:xfrm>
+            <a:off x="825095" y="4665861"/>
+            <a:ext cx="703793" cy="307975"/>
+          </a:xfrm>
+          <a:prstGeom prst="rect">
+            <a:avLst/>
+          </a:prstGeom>
+          <a:noFill/>
+          <a:ln/>
+        </p:spPr>
+        <p:txBody>
+          <a:bodyPr wrap="square" lIns="0" tIns="0" rIns="0" bIns="0" rtlCol="0" anchor="t"/>
+          <a:lstStyle/>
+          <a:p>
+            <a:pPr algn="l" indent="0" marL="0">
+              <a:lnSpc>
+                <a:spcPts val="2426"/>
+              </a:lnSpc>
+              <a:buNone/>
+            </a:pPr>
+            <a:r>
+              <a:rPr lang="en-US" sz="1733" dirty="0">
+                <a:solidFill>
+                  <a:srgbClr val="3DF5E0"/>
+                </a:solidFill>
+                <a:latin typeface="JetBrainsMono" pitchFamily="34" charset="0"/>
+                <a:ea typeface="JetBrainsMono" pitchFamily="34" charset="-122"/>
+                <a:cs typeface="JetBrainsMono" pitchFamily="34" charset="-120"/>
+              </a:rPr>
+              <a:t>// 04</a:t>
+            </a:r>
+            <a:endParaRPr lang="en-US" sz="1733" dirty="0"/>
+          </a:p>
+        </p:txBody>
+      </p:sp>
+      <p:sp>
+        <p:nvSpPr>
+          <p:cNvPr id="25" name="Text 23"/>
+          <p:cNvSpPr/>
+          <p:nvPr/>
+        </p:nvSpPr>
+        <p:spPr>
+          <a:xfrm>
+            <a:off x="1718238" y="4653161"/>
+            <a:ext cx="1726701" cy="331986"/>
+          </a:xfrm>
+          <a:prstGeom prst="rect">
+            <a:avLst/>
+          </a:prstGeom>
+          <a:noFill/>
+          <a:ln/>
+        </p:spPr>
+        <p:txBody>
+          <a:bodyPr wrap="square" lIns="0" tIns="0" rIns="0" bIns="0" rtlCol="0" anchor="t"/>
+          <a:lstStyle/>
+          <a:p>
+            <a:pPr algn="l" indent="0" marL="0">
+              <a:lnSpc>
+                <a:spcPts val="2613"/>
+              </a:lnSpc>
+              <a:buNone/>
+            </a:pPr>
+            <a:r>
+              <a:rPr lang="en-US" sz="1866" dirty="0">
+                <a:solidFill>
+                  <a:srgbClr val="E4E6EB"/>
+                </a:solidFill>
+                <a:latin typeface="JetBrainsMono" pitchFamily="34" charset="0"/>
+                <a:ea typeface="JetBrainsMono" pitchFamily="34" charset="-122"/>
+                <a:cs typeface="JetBrainsMono" pitchFamily="34" charset="-120"/>
+              </a:rPr>
+              <a:t>COMMUNICATE</a:t>
+            </a:r>
+            <a:endParaRPr lang="en-US" sz="1866" dirty="0"/>
+          </a:p>
+        </p:txBody>
+      </p:sp>
+      <p:sp>
+        <p:nvSpPr>
+          <p:cNvPr id="26" name="Text 24"/>
+          <p:cNvSpPr/>
+          <p:nvPr/>
+        </p:nvSpPr>
+        <p:spPr>
+          <a:xfrm>
+            <a:off x="3804485" y="4647208"/>
+            <a:ext cx="6915707" cy="343694"/>
+          </a:xfrm>
+          <a:prstGeom prst="rect">
+            <a:avLst/>
+          </a:prstGeom>
+          <a:noFill/>
+          <a:ln/>
+        </p:spPr>
+        <p:txBody>
+          <a:bodyPr wrap="square" lIns="0" tIns="0" rIns="0" bIns="0" rtlCol="0" anchor="t"/>
+          <a:lstStyle/>
+          <a:p>
+            <a:pPr algn="l" indent="0" marL="0">
+              <a:lnSpc>
+                <a:spcPts val="2706"/>
+              </a:lnSpc>
+              <a:buNone/>
+            </a:pPr>
+            <a:r>
+              <a:rPr lang="en-US" sz="1866" dirty="0">
+                <a:solidFill>
+                  <a:srgbClr val="E4E6EB"/>
+                </a:solidFill>
+                <a:latin typeface="SpaceGrotesk" pitchFamily="34" charset="0"/>
+                <a:ea typeface="SpaceGrotesk" pitchFamily="34" charset="-122"/>
+                <a:cs typeface="SpaceGrotesk" pitchFamily="34" charset="-120"/>
+              </a:rPr>
+              <a:t>The first update goes out before anyone knows the cause.</a:t>
+            </a:r>
+            <a:endParaRPr lang="en-US" sz="1866" dirty="0"/>
+          </a:p>
+        </p:txBody>
+      </p:sp>
+      <p:sp>
+        <p:nvSpPr>
+          <p:cNvPr id="27" name="Text 25"/>
+          <p:cNvSpPr/>
+          <p:nvPr/>
+        </p:nvSpPr>
+        <p:spPr>
+          <a:xfrm>
+            <a:off x="981822" y="5141119"/>
+            <a:ext cx="25394" cy="118467"/>
+          </a:xfrm>
+          <a:prstGeom prst="rect">
+            <a:avLst/>
+          </a:prstGeom>
+          <a:solidFill>
+            <a:srgbClr val="3DF5E0"/>
+          </a:solidFill>
+          <a:ln/>
+        </p:spPr>
+        <p:txBody>
+          <a:bodyPr wrap="square" rtlCol="0" anchor="ctr"/>
+          <a:lstStyle/>
+          <a:p>
+            <a:pPr indent="0" marL="0">
+              <a:buNone/>
+            </a:pPr>
+            <a:endParaRPr lang="en-US" dirty="0"/>
+          </a:p>
+        </p:txBody>
+      </p:sp>
+      <p:sp>
+        <p:nvSpPr>
+          <p:cNvPr id="28" name="Text 26"/>
+          <p:cNvSpPr/>
+          <p:nvPr/>
+        </p:nvSpPr>
+        <p:spPr>
+          <a:xfrm>
+            <a:off x="575523" y="5259586"/>
+            <a:ext cx="11037905" cy="643930"/>
+          </a:xfrm>
+          <a:prstGeom prst="roundRect">
+            <a:avLst>
+              <a:gd name="adj" fmla="val 7888"/>
+            </a:avLst>
+          </a:prstGeom>
+          <a:solidFill>
+            <a:srgbClr val="16181D"/>
+          </a:solidFill>
+          <a:ln w="12698">
+            <a:solidFill>
+              <a:srgbClr val="2A2D35"/>
+            </a:solidFill>
+          </a:ln>
+        </p:spPr>
+        <p:txBody>
+          <a:bodyPr wrap="square" rtlCol="0" anchor="ctr"/>
+          <a:lstStyle/>
+          <a:p>
+            <a:pPr indent="0" marL="0">
+              <a:buNone/>
+            </a:pPr>
+            <a:endParaRPr lang="en-US" dirty="0"/>
+          </a:p>
+        </p:txBody>
+      </p:sp>
+      <p:sp>
+        <p:nvSpPr>
+          <p:cNvPr id="29" name="Text 27"/>
+          <p:cNvSpPr/>
+          <p:nvPr/>
+        </p:nvSpPr>
+        <p:spPr>
+          <a:xfrm>
+            <a:off x="825095" y="5428258"/>
+            <a:ext cx="703793" cy="307975"/>
+          </a:xfrm>
+          <a:prstGeom prst="rect">
+            <a:avLst/>
+          </a:prstGeom>
+          <a:noFill/>
+          <a:ln/>
+        </p:spPr>
+        <p:txBody>
+          <a:bodyPr wrap="square" lIns="0" tIns="0" rIns="0" bIns="0" rtlCol="0" anchor="t"/>
+          <a:lstStyle/>
+          <a:p>
+            <a:pPr algn="l" indent="0" marL="0">
+              <a:lnSpc>
+                <a:spcPts val="2426"/>
+              </a:lnSpc>
+              <a:buNone/>
+            </a:pPr>
+            <a:r>
+              <a:rPr lang="en-US" sz="1733" dirty="0">
+                <a:solidFill>
+                  <a:srgbClr val="3DF5E0"/>
+                </a:solidFill>
+                <a:latin typeface="JetBrainsMono" pitchFamily="34" charset="0"/>
+                <a:ea typeface="JetBrainsMono" pitchFamily="34" charset="-122"/>
+                <a:cs typeface="JetBrainsMono" pitchFamily="34" charset="-120"/>
+              </a:rPr>
+              <a:t>// 05</a:t>
+            </a:r>
+            <a:endParaRPr lang="en-US" sz="1733" dirty="0"/>
+          </a:p>
+        </p:txBody>
+      </p:sp>
+      <p:sp>
+        <p:nvSpPr>
+          <p:cNvPr id="30" name="Text 28"/>
+          <p:cNvSpPr/>
+          <p:nvPr/>
+        </p:nvSpPr>
+        <p:spPr>
+          <a:xfrm>
+            <a:off x="1718238" y="5415558"/>
+            <a:ext cx="941966" cy="331986"/>
+          </a:xfrm>
+          <a:prstGeom prst="rect">
+            <a:avLst/>
+          </a:prstGeom>
+          <a:noFill/>
+          <a:ln/>
+        </p:spPr>
+        <p:txBody>
+          <a:bodyPr wrap="square" lIns="0" tIns="0" rIns="0" bIns="0" rtlCol="0" anchor="t"/>
+          <a:lstStyle/>
+          <a:p>
+            <a:pPr algn="l" indent="0" marL="0">
+              <a:lnSpc>
+                <a:spcPts val="2613"/>
+              </a:lnSpc>
+              <a:buNone/>
+            </a:pPr>
+            <a:r>
+              <a:rPr lang="en-US" sz="1866" dirty="0">
+                <a:solidFill>
+                  <a:srgbClr val="E4E6EB"/>
+                </a:solidFill>
+                <a:latin typeface="JetBrainsMono" pitchFamily="34" charset="0"/>
+                <a:ea typeface="JetBrainsMono" pitchFamily="34" charset="-122"/>
+                <a:cs typeface="JetBrainsMono" pitchFamily="34" charset="-120"/>
+              </a:rPr>
+              <a:t>RECORD</a:t>
+            </a:r>
+            <a:endParaRPr lang="en-US" sz="1866" dirty="0"/>
+          </a:p>
+        </p:txBody>
+      </p:sp>
+      <p:sp>
+        <p:nvSpPr>
+          <p:cNvPr id="31" name="Text 29"/>
+          <p:cNvSpPr/>
+          <p:nvPr/>
+        </p:nvSpPr>
+        <p:spPr>
+          <a:xfrm>
+            <a:off x="3804485" y="5409605"/>
+            <a:ext cx="5788990" cy="343694"/>
+          </a:xfrm>
+          <a:prstGeom prst="rect">
+            <a:avLst/>
+          </a:prstGeom>
+          <a:noFill/>
+          <a:ln/>
+        </p:spPr>
+        <p:txBody>
+          <a:bodyPr wrap="square" lIns="0" tIns="0" rIns="0" bIns="0" rtlCol="0" anchor="t"/>
+          <a:lstStyle/>
+          <a:p>
+            <a:pPr algn="l" indent="0" marL="0">
+              <a:lnSpc>
+                <a:spcPts val="2706"/>
+              </a:lnSpc>
+              <a:buNone/>
+            </a:pPr>
+            <a:r>
+              <a:rPr lang="en-US" sz="1866" dirty="0">
+                <a:solidFill>
+                  <a:srgbClr val="E4E6EB"/>
+                </a:solidFill>
+                <a:latin typeface="SpaceGrotesk" pitchFamily="34" charset="0"/>
+                <a:ea typeface="SpaceGrotesk" pitchFamily="34" charset="-122"/>
+                <a:cs typeface="SpaceGrotesk" pitchFamily="34" charset="-120"/>
+              </a:rPr>
+              <a:t>The log is written while it happens, or it is fiction.</a:t>
+            </a:r>
+            <a:endParaRPr lang="en-US" sz="1866" dirty="0"/>
+          </a:p>
+        </p:txBody>
+      </p:sp>
+      <p:sp>
+        <p:nvSpPr>
+          <p:cNvPr id="32" name="Text 30"/>
+          <p:cNvSpPr/>
+          <p:nvPr/>
+        </p:nvSpPr>
+        <p:spPr>
+          <a:xfrm>
+            <a:off x="575523" y="6089253"/>
+            <a:ext cx="5042298" cy="260747"/>
+          </a:xfrm>
+          <a:prstGeom prst="rect">
+            <a:avLst/>
+          </a:prstGeom>
+          <a:noFill/>
+          <a:ln/>
+        </p:spPr>
+        <p:txBody>
+          <a:bodyPr wrap="square" lIns="0" tIns="0" rIns="0" bIns="0" rtlCol="0" anchor="t"/>
+          <a:lstStyle/>
+          <a:p>
+            <a:pPr algn="l" indent="0" marL="0">
+              <a:lnSpc>
+                <a:spcPts val="2053"/>
+              </a:lnSpc>
+              <a:buNone/>
+            </a:pPr>
+            <a:r>
+              <a:rPr lang="en-US" sz="1466" dirty="0">
+                <a:solidFill>
+                  <a:srgbClr val="8A8F9A"/>
+                </a:solidFill>
+                <a:latin typeface="JetBrainsMono" pitchFamily="34" charset="0"/>
+                <a:ea typeface="JetBrainsMono" pitchFamily="34" charset="-122"/>
+                <a:cs typeface="JetBrainsMono" pitchFamily="34" charset="-120"/>
+              </a:rPr>
+              <a:t>INCIDENT RESPONSE · THE FIRST 30 MINUTES</a:t>
+            </a:r>
+            <a:endParaRPr lang="en-US" sz="1466" dirty="0"/>
+          </a:p>
+        </p:txBody>
+      </p:sp>
+      <p:sp>
+        <p:nvSpPr>
+          <p:cNvPr id="33" name="Text 31"/>
+          <p:cNvSpPr/>
+          <p:nvPr/>
+        </p:nvSpPr>
+        <p:spPr>
+          <a:xfrm>
+            <a:off x="7905956" y="6089253"/>
+            <a:ext cx="3781622" cy="260747"/>
+          </a:xfrm>
+          <a:prstGeom prst="rect">
+            <a:avLst/>
+          </a:prstGeom>
+          <a:noFill/>
+          <a:ln/>
+        </p:spPr>
+        <p:txBody>
+          <a:bodyPr wrap="square" lIns="0" tIns="0" rIns="0" bIns="0" rtlCol="0" anchor="t"/>
+          <a:lstStyle/>
+          <a:p>
+            <a:pPr algn="l" indent="0" marL="0">
+              <a:lnSpc>
+                <a:spcPts val="2053"/>
+              </a:lnSpc>
+              <a:buNone/>
+            </a:pPr>
+            <a:r>
+              <a:rPr lang="en-US" sz="1466" dirty="0">
+                <a:solidFill>
+                  <a:srgbClr val="8A8F9A"/>
+                </a:solidFill>
+                <a:latin typeface="JetBrainsMono" pitchFamily="34" charset="0"/>
+                <a:ea typeface="JetBrainsMono" pitchFamily="34" charset="-122"/>
+                <a:cs typeface="JetBrainsMono" pitchFamily="34" charset="-120"/>
+              </a:rPr>
+              <a:t>DECLARE UNLOCKS THE OTHER FOUR</a:t>
+            </a:r>
+            <a:endParaRPr lang="en-US" sz="1466" dirty="0"/>
+          </a:p>
+        </p:txBody>
+      </p:sp>
     </p:spTree>
   </p:cSld>
   <p:clrMapOvr>
@@ -1495,6 +5024,13 @@
 <file path=ppt/slides/slide5.xml><?xml version="1.0" encoding="utf-8"?>
 <p:sld xmlns:a="http://schemas.openxmlformats.org/drawingml/2006/main" xmlns:r="http://schemas.openxmlformats.org/officeDocument/2006/relationships" xmlns:p="http://schemas.openxmlformats.org/presentationml/2006/main">
   <p:cSld name="Slide 5">
+    <p:bg>
+      <p:bgPr>
+        <a:solidFill>
+          <a:srgbClr val="0C0D10"/>
+        </a:solidFill>
+      </p:bgPr>
+    </p:bg>
     <p:spTree>
       <p:nvGrpSpPr>
         <p:cNvPr id="1" name=""/>
@@ -1509,30 +5045,1201 @@
           <a:chExt cx="0" cy="0"/>
         </a:xfrm>
       </p:grpSpPr>
-      <p:pic>
-        <p:nvPicPr>
-          <p:cNvPr id="2" name="Image 0" descr="/tmp/slide-1787840579222-cfi112yygrm.png">    </p:cNvPr>
-          <p:cNvPicPr>
-            <a:picLocks noChangeAspect="1"/>
-          </p:cNvPicPr>
-          <p:nvPr/>
-        </p:nvPicPr>
-        <p:blipFill>
-          <a:blip r:embed="rId1"/>
-          <a:stretch>
-            <a:fillRect/>
-          </a:stretch>
-        </p:blipFill>
-        <p:spPr>
-          <a:xfrm>
-            <a:off x="0" y="0"/>
-            <a:ext cx="12188952" cy="6858000"/>
-          </a:xfrm>
-          <a:prstGeom prst="rect">
-            <a:avLst/>
-          </a:prstGeom>
-        </p:spPr>
-      </p:pic>
+      <p:sp>
+        <p:nvSpPr>
+          <p:cNvPr id="2" name="Text 0"/>
+          <p:cNvSpPr/>
+          <p:nvPr/>
+        </p:nvSpPr>
+        <p:spPr>
+          <a:xfrm>
+            <a:off x="575523" y="440134"/>
+            <a:ext cx="2251814" cy="307975"/>
+          </a:xfrm>
+          <a:prstGeom prst="rect">
+            <a:avLst/>
+          </a:prstGeom>
+          <a:noFill/>
+          <a:ln/>
+        </p:spPr>
+        <p:txBody>
+          <a:bodyPr wrap="square" lIns="0" tIns="0" rIns="0" bIns="0" rtlCol="0" anchor="t"/>
+          <a:lstStyle/>
+          <a:p>
+            <a:pPr algn="l" indent="0" marL="0">
+              <a:lnSpc>
+                <a:spcPts val="2426"/>
+              </a:lnSpc>
+              <a:buNone/>
+            </a:pPr>
+            <a:r>
+              <a:rPr lang="en-US" sz="1733" dirty="0">
+                <a:solidFill>
+                  <a:srgbClr val="3DF5E0"/>
+                </a:solidFill>
+                <a:latin typeface="JetBrainsMono" pitchFamily="34" charset="0"/>
+                <a:ea typeface="JetBrainsMono" pitchFamily="34" charset="-122"/>
+                <a:cs typeface="JetBrainsMono" pitchFamily="34" charset="-120"/>
+              </a:rPr>
+              <a:t>// 05 — SEVERITY</a:t>
+            </a:r>
+            <a:endParaRPr lang="en-US" sz="1733" dirty="0"/>
+          </a:p>
+        </p:txBody>
+      </p:sp>
+      <p:sp>
+        <p:nvSpPr>
+          <p:cNvPr id="3" name="Text 1"/>
+          <p:cNvSpPr/>
+          <p:nvPr/>
+        </p:nvSpPr>
+        <p:spPr>
+          <a:xfrm>
+            <a:off x="10095563" y="440134"/>
+            <a:ext cx="1548223" cy="307975"/>
+          </a:xfrm>
+          <a:prstGeom prst="rect">
+            <a:avLst/>
+          </a:prstGeom>
+          <a:noFill/>
+          <a:ln/>
+        </p:spPr>
+        <p:txBody>
+          <a:bodyPr wrap="square" lIns="0" tIns="0" rIns="0" bIns="0" rtlCol="0" anchor="t"/>
+          <a:lstStyle/>
+          <a:p>
+            <a:pPr algn="l" indent="0" marL="0">
+              <a:lnSpc>
+                <a:spcPts val="2426"/>
+              </a:lnSpc>
+              <a:buNone/>
+            </a:pPr>
+            <a:r>
+              <a:rPr lang="en-US" sz="1733" dirty="0">
+                <a:solidFill>
+                  <a:srgbClr val="8A8F9A"/>
+                </a:solidFill>
+                <a:latin typeface="JetBrainsMono" pitchFamily="34" charset="0"/>
+                <a:ea typeface="JetBrainsMono" pitchFamily="34" charset="-122"/>
+                <a:cs typeface="JetBrainsMono" pitchFamily="34" charset="-120"/>
+              </a:rPr>
+              <a:t>[ 05 / 06 ]</a:t>
+            </a:r>
+            <a:endParaRPr lang="en-US" sz="1733" dirty="0"/>
+          </a:p>
+        </p:txBody>
+      </p:sp>
+      <p:sp>
+        <p:nvSpPr>
+          <p:cNvPr id="4" name="Text 2"/>
+          <p:cNvSpPr/>
+          <p:nvPr/>
+        </p:nvSpPr>
+        <p:spPr>
+          <a:xfrm>
+            <a:off x="575523" y="866577"/>
+            <a:ext cx="11258664" cy="528241"/>
+          </a:xfrm>
+          <a:prstGeom prst="rect">
+            <a:avLst/>
+          </a:prstGeom>
+          <a:noFill/>
+          <a:ln/>
+        </p:spPr>
+        <p:txBody>
+          <a:bodyPr wrap="square" lIns="0" tIns="0" rIns="0" bIns="0" rtlCol="0" anchor="t"/>
+          <a:lstStyle/>
+          <a:p>
+            <a:pPr algn="l" indent="0" marL="0">
+              <a:lnSpc>
+                <a:spcPts val="4159"/>
+              </a:lnSpc>
+              <a:spcAft>
+                <a:spcPts val="1200"/>
+              </a:spcAft>
+              <a:buNone/>
+            </a:pPr>
+            <a:r>
+              <a:rPr lang="en-US" sz="3466" b="1" dirty="0">
+                <a:solidFill>
+                  <a:srgbClr val="E4E6EB"/>
+                </a:solidFill>
+                <a:latin typeface="SpaceGrotesk" pitchFamily="34" charset="0"/>
+                <a:ea typeface="SpaceGrotesk" pitchFamily="34" charset="-122"/>
+                <a:cs typeface="SpaceGrotesk" pitchFamily="34" charset="-120"/>
+              </a:rPr>
+              <a:t>What each severity level obliges</a:t>
+            </a:r>
+            <a:endParaRPr lang="en-US" sz="3466" dirty="0"/>
+          </a:p>
+        </p:txBody>
+      </p:sp>
+      <p:sp>
+        <p:nvSpPr>
+          <p:cNvPr id="5" name="Text 3"/>
+          <p:cNvSpPr/>
+          <p:nvPr/>
+        </p:nvSpPr>
+        <p:spPr>
+          <a:xfrm>
+            <a:off x="575523" y="1547217"/>
+            <a:ext cx="11037905" cy="12700"/>
+          </a:xfrm>
+          <a:prstGeom prst="rect">
+            <a:avLst/>
+          </a:prstGeom>
+          <a:solidFill>
+            <a:srgbClr val="2A2D35"/>
+          </a:solidFill>
+          <a:ln/>
+        </p:spPr>
+        <p:txBody>
+          <a:bodyPr wrap="square" rtlCol="0" anchor="ctr"/>
+          <a:lstStyle/>
+          <a:p>
+            <a:pPr indent="0" marL="0">
+              <a:buNone/>
+            </a:pPr>
+            <a:endParaRPr lang="en-US" dirty="0"/>
+          </a:p>
+        </p:txBody>
+      </p:sp>
+      <p:sp>
+        <p:nvSpPr>
+          <p:cNvPr id="6" name="Text 4"/>
+          <p:cNvSpPr/>
+          <p:nvPr/>
+        </p:nvSpPr>
+        <p:spPr>
+          <a:xfrm>
+            <a:off x="575523" y="1779984"/>
+            <a:ext cx="1346879" cy="307975"/>
+          </a:xfrm>
+          <a:prstGeom prst="rect">
+            <a:avLst/>
+          </a:prstGeom>
+          <a:noFill/>
+          <a:ln/>
+        </p:spPr>
+        <p:txBody>
+          <a:bodyPr wrap="square" lIns="169312" tIns="0" rIns="169312" bIns="0" rtlCol="0" anchor="t"/>
+          <a:lstStyle/>
+          <a:p>
+            <a:pPr algn="l" indent="0" marL="0">
+              <a:lnSpc>
+                <a:spcPts val="2426"/>
+              </a:lnSpc>
+              <a:buNone/>
+            </a:pPr>
+            <a:r>
+              <a:rPr lang="en-US" sz="1733" dirty="0">
+                <a:solidFill>
+                  <a:srgbClr val="8A8F9A"/>
+                </a:solidFill>
+                <a:latin typeface="JetBrainsMono" pitchFamily="34" charset="0"/>
+                <a:ea typeface="JetBrainsMono" pitchFamily="34" charset="-122"/>
+                <a:cs typeface="JetBrainsMono" pitchFamily="34" charset="-120"/>
+              </a:rPr>
+              <a:t>LEVEL</a:t>
+            </a:r>
+            <a:endParaRPr lang="en-US" sz="1733" dirty="0"/>
+          </a:p>
+        </p:txBody>
+      </p:sp>
+      <p:sp>
+        <p:nvSpPr>
+          <p:cNvPr id="7" name="Text 5"/>
+          <p:cNvSpPr/>
+          <p:nvPr/>
+        </p:nvSpPr>
+        <p:spPr>
+          <a:xfrm>
+            <a:off x="1895993" y="1779984"/>
+            <a:ext cx="4075038" cy="307975"/>
+          </a:xfrm>
+          <a:prstGeom prst="rect">
+            <a:avLst/>
+          </a:prstGeom>
+          <a:noFill/>
+          <a:ln/>
+        </p:spPr>
+        <p:txBody>
+          <a:bodyPr wrap="square" lIns="169312" tIns="0" rIns="169312" bIns="0" rtlCol="0" anchor="t"/>
+          <a:lstStyle/>
+          <a:p>
+            <a:pPr algn="l" indent="0" marL="0">
+              <a:lnSpc>
+                <a:spcPts val="2426"/>
+              </a:lnSpc>
+              <a:buNone/>
+            </a:pPr>
+            <a:r>
+              <a:rPr lang="en-US" sz="1733" dirty="0">
+                <a:solidFill>
+                  <a:srgbClr val="8A8F9A"/>
+                </a:solidFill>
+                <a:latin typeface="JetBrainsMono" pitchFamily="34" charset="0"/>
+                <a:ea typeface="JetBrainsMono" pitchFamily="34" charset="-122"/>
+                <a:cs typeface="JetBrainsMono" pitchFamily="34" charset="-120"/>
+              </a:rPr>
+              <a:t>WHEN IT APPLIES</a:t>
+            </a:r>
+            <a:endParaRPr lang="en-US" sz="1733" dirty="0"/>
+          </a:p>
+        </p:txBody>
+      </p:sp>
+      <p:sp>
+        <p:nvSpPr>
+          <p:cNvPr id="8" name="Text 6"/>
+          <p:cNvSpPr/>
+          <p:nvPr/>
+        </p:nvSpPr>
+        <p:spPr>
+          <a:xfrm>
+            <a:off x="5891128" y="1779984"/>
+            <a:ext cx="3073580" cy="307975"/>
+          </a:xfrm>
+          <a:prstGeom prst="rect">
+            <a:avLst/>
+          </a:prstGeom>
+          <a:noFill/>
+          <a:ln/>
+        </p:spPr>
+        <p:txBody>
+          <a:bodyPr wrap="square" lIns="169312" tIns="0" rIns="169312" bIns="0" rtlCol="0" anchor="t"/>
+          <a:lstStyle/>
+          <a:p>
+            <a:pPr algn="l" indent="0" marL="0">
+              <a:lnSpc>
+                <a:spcPts val="2426"/>
+              </a:lnSpc>
+              <a:buNone/>
+            </a:pPr>
+            <a:r>
+              <a:rPr lang="en-US" sz="1733" dirty="0">
+                <a:solidFill>
+                  <a:srgbClr val="8A8F9A"/>
+                </a:solidFill>
+                <a:latin typeface="JetBrainsMono" pitchFamily="34" charset="0"/>
+                <a:ea typeface="JetBrainsMono" pitchFamily="34" charset="-122"/>
+                <a:cs typeface="JetBrainsMono" pitchFamily="34" charset="-120"/>
+              </a:rPr>
+              <a:t>WHAT IT OBLIGES</a:t>
+            </a:r>
+            <a:endParaRPr lang="en-US" sz="1733" dirty="0"/>
+          </a:p>
+        </p:txBody>
+      </p:sp>
+      <p:sp>
+        <p:nvSpPr>
+          <p:cNvPr id="9" name="Text 7"/>
+          <p:cNvSpPr/>
+          <p:nvPr/>
+        </p:nvSpPr>
+        <p:spPr>
+          <a:xfrm>
+            <a:off x="8904442" y="1779984"/>
+            <a:ext cx="2728159" cy="307975"/>
+          </a:xfrm>
+          <a:prstGeom prst="rect">
+            <a:avLst/>
+          </a:prstGeom>
+          <a:noFill/>
+          <a:ln/>
+        </p:spPr>
+        <p:txBody>
+          <a:bodyPr wrap="square" lIns="169312" tIns="0" rIns="169312" bIns="0" rtlCol="0" anchor="t"/>
+          <a:lstStyle/>
+          <a:p>
+            <a:pPr algn="l" indent="0" marL="0">
+              <a:lnSpc>
+                <a:spcPts val="2426"/>
+              </a:lnSpc>
+              <a:buNone/>
+            </a:pPr>
+            <a:r>
+              <a:rPr lang="en-US" sz="1733" dirty="0">
+                <a:solidFill>
+                  <a:srgbClr val="8A8F9A"/>
+                </a:solidFill>
+                <a:latin typeface="JetBrainsMono" pitchFamily="34" charset="0"/>
+                <a:ea typeface="JetBrainsMono" pitchFamily="34" charset="-122"/>
+                <a:cs typeface="JetBrainsMono" pitchFamily="34" charset="-120"/>
+              </a:rPr>
+              <a:t>WHO IT WAKES</a:t>
+            </a:r>
+            <a:endParaRPr lang="en-US" sz="1733" dirty="0"/>
+          </a:p>
+        </p:txBody>
+      </p:sp>
+      <p:sp>
+        <p:nvSpPr>
+          <p:cNvPr id="10" name="Text 8"/>
+          <p:cNvSpPr/>
+          <p:nvPr/>
+        </p:nvSpPr>
+        <p:spPr>
+          <a:xfrm>
+            <a:off x="575523" y="2223294"/>
+            <a:ext cx="11037905" cy="3679825"/>
+          </a:xfrm>
+          <a:prstGeom prst="roundRect">
+            <a:avLst>
+              <a:gd name="adj" fmla="val 1380"/>
+            </a:avLst>
+          </a:prstGeom>
+          <a:solidFill>
+            <a:srgbClr val="16181D"/>
+          </a:solidFill>
+          <a:ln w="12698">
+            <a:solidFill>
+              <a:srgbClr val="3DF5E0"/>
+            </a:solidFill>
+          </a:ln>
+          <a:effectLst>
+            <a:outerShdw sx="100000" sy="100000" kx="0" ky="0" algn="bl" rotWithShape="0" blurRad="101587" dist="50800" dir="16200000">
+              <a:srgbClr val="3df5e0">
+                <a:alpha val="30000"/>
+              </a:srgbClr>
+            </a:outerShdw>
+          </a:effectLst>
+        </p:spPr>
+        <p:txBody>
+          <a:bodyPr wrap="square" rtlCol="0" anchor="ctr"/>
+          <a:lstStyle/>
+          <a:p>
+            <a:pPr indent="0" marL="0">
+              <a:buNone/>
+            </a:pPr>
+            <a:endParaRPr lang="en-US" dirty="0"/>
+          </a:p>
+        </p:txBody>
+      </p:sp>
+      <p:sp>
+        <p:nvSpPr>
+          <p:cNvPr id="11" name="Text 9"/>
+          <p:cNvSpPr/>
+          <p:nvPr/>
+        </p:nvSpPr>
+        <p:spPr>
+          <a:xfrm>
+            <a:off x="757445" y="2521942"/>
+            <a:ext cx="1001660" cy="331986"/>
+          </a:xfrm>
+          <a:prstGeom prst="rect">
+            <a:avLst/>
+          </a:prstGeom>
+          <a:noFill/>
+          <a:ln/>
+        </p:spPr>
+        <p:txBody>
+          <a:bodyPr wrap="square" lIns="0" tIns="0" rIns="0" bIns="0" rtlCol="0" anchor="t"/>
+          <a:lstStyle/>
+          <a:p>
+            <a:pPr algn="l" indent="0" marL="0">
+              <a:lnSpc>
+                <a:spcPts val="2613"/>
+              </a:lnSpc>
+              <a:buNone/>
+            </a:pPr>
+            <a:r>
+              <a:rPr lang="en-US" sz="1866" dirty="0">
+                <a:solidFill>
+                  <a:srgbClr val="3DF5E0"/>
+                </a:solidFill>
+                <a:latin typeface="JetBrainsMono" pitchFamily="34" charset="0"/>
+                <a:ea typeface="JetBrainsMono" pitchFamily="34" charset="-122"/>
+                <a:cs typeface="JetBrainsMono" pitchFamily="34" charset="-120"/>
+              </a:rPr>
+              <a:t>SEV-1</a:t>
+            </a:r>
+            <a:endParaRPr lang="en-US" sz="1866" dirty="0"/>
+          </a:p>
+        </p:txBody>
+      </p:sp>
+      <p:sp>
+        <p:nvSpPr>
+          <p:cNvPr id="12" name="Text 10"/>
+          <p:cNvSpPr/>
+          <p:nvPr/>
+        </p:nvSpPr>
+        <p:spPr>
+          <a:xfrm>
+            <a:off x="2077915" y="2344341"/>
+            <a:ext cx="3729819" cy="687388"/>
+          </a:xfrm>
+          <a:prstGeom prst="rect">
+            <a:avLst/>
+          </a:prstGeom>
+          <a:noFill/>
+          <a:ln/>
+        </p:spPr>
+        <p:txBody>
+          <a:bodyPr wrap="square" lIns="0" tIns="0" rIns="0" bIns="0" rtlCol="0" anchor="t"/>
+          <a:lstStyle/>
+          <a:p>
+            <a:pPr algn="l" indent="0" marL="0">
+              <a:lnSpc>
+                <a:spcPts val="2706"/>
+              </a:lnSpc>
+              <a:buNone/>
+            </a:pPr>
+            <a:r>
+              <a:rPr lang="en-US" sz="1866" dirty="0">
+                <a:solidFill>
+                  <a:srgbClr val="E4E6EB"/>
+                </a:solidFill>
+                <a:latin typeface="SpaceGrotesk" pitchFamily="34" charset="0"/>
+                <a:ea typeface="SpaceGrotesk" pitchFamily="34" charset="-122"/>
+                <a:cs typeface="SpaceGrotesk" pitchFamily="34" charset="-120"/>
+              </a:rPr>
+              <a:t>Customers blocked. No workaround exists.</a:t>
+            </a:r>
+            <a:endParaRPr lang="en-US" sz="1866" dirty="0"/>
+          </a:p>
+        </p:txBody>
+      </p:sp>
+      <p:sp>
+        <p:nvSpPr>
+          <p:cNvPr id="13" name="Text 11"/>
+          <p:cNvSpPr/>
+          <p:nvPr/>
+        </p:nvSpPr>
+        <p:spPr>
+          <a:xfrm>
+            <a:off x="6073050" y="2344341"/>
+            <a:ext cx="2728361" cy="687388"/>
+          </a:xfrm>
+          <a:prstGeom prst="rect">
+            <a:avLst/>
+          </a:prstGeom>
+          <a:noFill/>
+          <a:ln/>
+        </p:spPr>
+        <p:txBody>
+          <a:bodyPr wrap="square" lIns="0" tIns="0" rIns="0" bIns="0" rtlCol="0" anchor="t"/>
+          <a:lstStyle/>
+          <a:p>
+            <a:pPr algn="l" indent="0" marL="0">
+              <a:lnSpc>
+                <a:spcPts val="2706"/>
+              </a:lnSpc>
+              <a:buNone/>
+            </a:pPr>
+            <a:r>
+              <a:rPr lang="en-US" sz="1866" dirty="0">
+                <a:solidFill>
+                  <a:srgbClr val="E4E6EB"/>
+                </a:solidFill>
+                <a:latin typeface="SpaceGrotesk" pitchFamily="34" charset="0"/>
+                <a:ea typeface="SpaceGrotesk" pitchFamily="34" charset="-122"/>
+                <a:cs typeface="SpaceGrotesk" pitchFamily="34" charset="-120"/>
+              </a:rPr>
+              <a:t>Declare first, diagnose second.</a:t>
+            </a:r>
+            <a:endParaRPr lang="en-US" sz="1866" dirty="0"/>
+          </a:p>
+        </p:txBody>
+      </p:sp>
+      <p:sp>
+        <p:nvSpPr>
+          <p:cNvPr id="14" name="Text 12"/>
+          <p:cNvSpPr/>
+          <p:nvPr/>
+        </p:nvSpPr>
+        <p:spPr>
+          <a:xfrm>
+            <a:off x="9086364" y="2344341"/>
+            <a:ext cx="2382940" cy="687388"/>
+          </a:xfrm>
+          <a:prstGeom prst="rect">
+            <a:avLst/>
+          </a:prstGeom>
+          <a:noFill/>
+          <a:ln/>
+        </p:spPr>
+        <p:txBody>
+          <a:bodyPr wrap="square" lIns="0" tIns="0" rIns="0" bIns="0" rtlCol="0" anchor="t"/>
+          <a:lstStyle/>
+          <a:p>
+            <a:pPr algn="l" indent="0" marL="0">
+              <a:lnSpc>
+                <a:spcPts val="2706"/>
+              </a:lnSpc>
+              <a:buNone/>
+            </a:pPr>
+            <a:r>
+              <a:rPr lang="en-US" sz="1866" dirty="0">
+                <a:solidFill>
+                  <a:srgbClr val="E4E6EB"/>
+                </a:solidFill>
+                <a:latin typeface="SpaceGrotesk" pitchFamily="34" charset="0"/>
+                <a:ea typeface="SpaceGrotesk" pitchFamily="34" charset="-122"/>
+                <a:cs typeface="SpaceGrotesk" pitchFamily="34" charset="-120"/>
+              </a:rPr>
+              <a:t>On-call, service owner, duty exec.</a:t>
+            </a:r>
+            <a:endParaRPr lang="en-US" sz="1866" dirty="0"/>
+          </a:p>
+        </p:txBody>
+      </p:sp>
+      <p:sp>
+        <p:nvSpPr>
+          <p:cNvPr id="15" name="Shape 13"/>
+          <p:cNvSpPr/>
+          <p:nvPr/>
+        </p:nvSpPr>
+        <p:spPr>
+          <a:xfrm>
+            <a:off x="588220" y="3146425"/>
+            <a:ext cx="11012512" cy="0"/>
+          </a:xfrm>
+          <a:prstGeom prst="line">
+            <a:avLst/>
+          </a:prstGeom>
+          <a:noFill/>
+          <a:ln w="12698">
+            <a:solidFill>
+              <a:srgbClr val="2A2D35"/>
+            </a:solidFill>
+            <a:prstDash val="solid"/>
+          </a:ln>
+        </p:spPr>
+      </p:sp>
+      <p:sp>
+        <p:nvSpPr>
+          <p:cNvPr id="16" name="Text 14"/>
+          <p:cNvSpPr/>
+          <p:nvPr/>
+        </p:nvSpPr>
+        <p:spPr>
+          <a:xfrm>
+            <a:off x="757445" y="3438723"/>
+            <a:ext cx="1001660" cy="331986"/>
+          </a:xfrm>
+          <a:prstGeom prst="rect">
+            <a:avLst/>
+          </a:prstGeom>
+          <a:noFill/>
+          <a:ln/>
+        </p:spPr>
+        <p:txBody>
+          <a:bodyPr wrap="square" lIns="0" tIns="0" rIns="0" bIns="0" rtlCol="0" anchor="t"/>
+          <a:lstStyle/>
+          <a:p>
+            <a:pPr algn="l" indent="0" marL="0">
+              <a:lnSpc>
+                <a:spcPts val="2613"/>
+              </a:lnSpc>
+              <a:buNone/>
+            </a:pPr>
+            <a:r>
+              <a:rPr lang="en-US" sz="1866" dirty="0">
+                <a:solidFill>
+                  <a:srgbClr val="9D7BFF"/>
+                </a:solidFill>
+                <a:latin typeface="JetBrainsMono" pitchFamily="34" charset="0"/>
+                <a:ea typeface="JetBrainsMono" pitchFamily="34" charset="-122"/>
+                <a:cs typeface="JetBrainsMono" pitchFamily="34" charset="-120"/>
+              </a:rPr>
+              <a:t>SEV-2</a:t>
+            </a:r>
+            <a:endParaRPr lang="en-US" sz="1866" dirty="0"/>
+          </a:p>
+        </p:txBody>
+      </p:sp>
+      <p:sp>
+        <p:nvSpPr>
+          <p:cNvPr id="17" name="Text 15"/>
+          <p:cNvSpPr/>
+          <p:nvPr/>
+        </p:nvSpPr>
+        <p:spPr>
+          <a:xfrm>
+            <a:off x="2077915" y="3261122"/>
+            <a:ext cx="3729819" cy="687388"/>
+          </a:xfrm>
+          <a:prstGeom prst="rect">
+            <a:avLst/>
+          </a:prstGeom>
+          <a:noFill/>
+          <a:ln/>
+        </p:spPr>
+        <p:txBody>
+          <a:bodyPr wrap="square" lIns="0" tIns="0" rIns="0" bIns="0" rtlCol="0" anchor="t"/>
+          <a:lstStyle/>
+          <a:p>
+            <a:pPr algn="l" indent="0" marL="0">
+              <a:lnSpc>
+                <a:spcPts val="2706"/>
+              </a:lnSpc>
+              <a:buNone/>
+            </a:pPr>
+            <a:r>
+              <a:rPr lang="en-US" sz="1866" dirty="0">
+                <a:solidFill>
+                  <a:srgbClr val="E4E6EB"/>
+                </a:solidFill>
+                <a:latin typeface="SpaceGrotesk" pitchFamily="34" charset="0"/>
+                <a:ea typeface="SpaceGrotesk" pitchFamily="34" charset="-122"/>
+                <a:cs typeface="SpaceGrotesk" pitchFamily="34" charset="-120"/>
+              </a:rPr>
+              <a:t>Degraded. A workaround exists and it costs someone.</a:t>
+            </a:r>
+            <a:endParaRPr lang="en-US" sz="1866" dirty="0"/>
+          </a:p>
+        </p:txBody>
+      </p:sp>
+      <p:sp>
+        <p:nvSpPr>
+          <p:cNvPr id="18" name="Text 16"/>
+          <p:cNvSpPr/>
+          <p:nvPr/>
+        </p:nvSpPr>
+        <p:spPr>
+          <a:xfrm>
+            <a:off x="6073050" y="3261122"/>
+            <a:ext cx="2728361" cy="687388"/>
+          </a:xfrm>
+          <a:prstGeom prst="rect">
+            <a:avLst/>
+          </a:prstGeom>
+          <a:noFill/>
+          <a:ln/>
+        </p:spPr>
+        <p:txBody>
+          <a:bodyPr wrap="square" lIns="0" tIns="0" rIns="0" bIns="0" rtlCol="0" anchor="t"/>
+          <a:lstStyle/>
+          <a:p>
+            <a:pPr algn="l" indent="0" marL="0">
+              <a:lnSpc>
+                <a:spcPts val="2706"/>
+              </a:lnSpc>
+              <a:buNone/>
+            </a:pPr>
+            <a:r>
+              <a:rPr lang="en-US" sz="1866" dirty="0">
+                <a:solidFill>
+                  <a:srgbClr val="E4E6EB"/>
+                </a:solidFill>
+                <a:latin typeface="SpaceGrotesk" pitchFamily="34" charset="0"/>
+                <a:ea typeface="SpaceGrotesk" pitchFamily="34" charset="-122"/>
+                <a:cs typeface="SpaceGrotesk" pitchFamily="34" charset="-120"/>
+              </a:rPr>
+              <a:t>Commander named. Updates on cadence.</a:t>
+            </a:r>
+            <a:endParaRPr lang="en-US" sz="1866" dirty="0"/>
+          </a:p>
+        </p:txBody>
+      </p:sp>
+      <p:sp>
+        <p:nvSpPr>
+          <p:cNvPr id="19" name="Text 17"/>
+          <p:cNvSpPr/>
+          <p:nvPr/>
+        </p:nvSpPr>
+        <p:spPr>
+          <a:xfrm>
+            <a:off x="9086364" y="3261122"/>
+            <a:ext cx="2382940" cy="687388"/>
+          </a:xfrm>
+          <a:prstGeom prst="rect">
+            <a:avLst/>
+          </a:prstGeom>
+          <a:noFill/>
+          <a:ln/>
+        </p:spPr>
+        <p:txBody>
+          <a:bodyPr wrap="square" lIns="0" tIns="0" rIns="0" bIns="0" rtlCol="0" anchor="t"/>
+          <a:lstStyle/>
+          <a:p>
+            <a:pPr algn="l" indent="0" marL="0">
+              <a:lnSpc>
+                <a:spcPts val="2706"/>
+              </a:lnSpc>
+              <a:buNone/>
+            </a:pPr>
+            <a:r>
+              <a:rPr lang="en-US" sz="1866" dirty="0">
+                <a:solidFill>
+                  <a:srgbClr val="E4E6EB"/>
+                </a:solidFill>
+                <a:latin typeface="SpaceGrotesk" pitchFamily="34" charset="0"/>
+                <a:ea typeface="SpaceGrotesk" pitchFamily="34" charset="-122"/>
+                <a:cs typeface="SpaceGrotesk" pitchFamily="34" charset="-120"/>
+              </a:rPr>
+              <a:t>On-call and service owner.</a:t>
+            </a:r>
+            <a:endParaRPr lang="en-US" sz="1866" dirty="0"/>
+          </a:p>
+        </p:txBody>
+      </p:sp>
+      <p:sp>
+        <p:nvSpPr>
+          <p:cNvPr id="20" name="Shape 18"/>
+          <p:cNvSpPr/>
+          <p:nvPr/>
+        </p:nvSpPr>
+        <p:spPr>
+          <a:xfrm>
+            <a:off x="588220" y="4063206"/>
+            <a:ext cx="11012512" cy="0"/>
+          </a:xfrm>
+          <a:prstGeom prst="line">
+            <a:avLst/>
+          </a:prstGeom>
+          <a:noFill/>
+          <a:ln w="12698">
+            <a:solidFill>
+              <a:srgbClr val="2A2D35"/>
+            </a:solidFill>
+            <a:prstDash val="solid"/>
+          </a:ln>
+        </p:spPr>
+      </p:sp>
+      <p:sp>
+        <p:nvSpPr>
+          <p:cNvPr id="21" name="Text 19"/>
+          <p:cNvSpPr/>
+          <p:nvPr/>
+        </p:nvSpPr>
+        <p:spPr>
+          <a:xfrm>
+            <a:off x="757445" y="4355505"/>
+            <a:ext cx="1001660" cy="331986"/>
+          </a:xfrm>
+          <a:prstGeom prst="rect">
+            <a:avLst/>
+          </a:prstGeom>
+          <a:noFill/>
+          <a:ln/>
+        </p:spPr>
+        <p:txBody>
+          <a:bodyPr wrap="square" lIns="0" tIns="0" rIns="0" bIns="0" rtlCol="0" anchor="t"/>
+          <a:lstStyle/>
+          <a:p>
+            <a:pPr algn="l" indent="0" marL="0">
+              <a:lnSpc>
+                <a:spcPts val="2613"/>
+              </a:lnSpc>
+              <a:buNone/>
+            </a:pPr>
+            <a:r>
+              <a:rPr lang="en-US" sz="1866" dirty="0">
+                <a:solidFill>
+                  <a:srgbClr val="8A8F9A"/>
+                </a:solidFill>
+                <a:latin typeface="JetBrainsMono" pitchFamily="34" charset="0"/>
+                <a:ea typeface="JetBrainsMono" pitchFamily="34" charset="-122"/>
+                <a:cs typeface="JetBrainsMono" pitchFamily="34" charset="-120"/>
+              </a:rPr>
+              <a:t>SEV-3</a:t>
+            </a:r>
+            <a:endParaRPr lang="en-US" sz="1866" dirty="0"/>
+          </a:p>
+        </p:txBody>
+      </p:sp>
+      <p:sp>
+        <p:nvSpPr>
+          <p:cNvPr id="22" name="Text 20"/>
+          <p:cNvSpPr/>
+          <p:nvPr/>
+        </p:nvSpPr>
+        <p:spPr>
+          <a:xfrm>
+            <a:off x="2077915" y="4177903"/>
+            <a:ext cx="3729819" cy="687388"/>
+          </a:xfrm>
+          <a:prstGeom prst="rect">
+            <a:avLst/>
+          </a:prstGeom>
+          <a:noFill/>
+          <a:ln/>
+        </p:spPr>
+        <p:txBody>
+          <a:bodyPr wrap="square" lIns="0" tIns="0" rIns="0" bIns="0" rtlCol="0" anchor="t"/>
+          <a:lstStyle/>
+          <a:p>
+            <a:pPr algn="l" indent="0" marL="0">
+              <a:lnSpc>
+                <a:spcPts val="2706"/>
+              </a:lnSpc>
+              <a:buNone/>
+            </a:pPr>
+            <a:r>
+              <a:rPr lang="en-US" sz="1866" dirty="0">
+                <a:solidFill>
+                  <a:srgbClr val="8A8F9A"/>
+                </a:solidFill>
+                <a:latin typeface="SpaceGrotesk" pitchFamily="34" charset="0"/>
+                <a:ea typeface="SpaceGrotesk" pitchFamily="34" charset="-122"/>
+                <a:cs typeface="SpaceGrotesk" pitchFamily="34" charset="-120"/>
+              </a:rPr>
+              <a:t>Contained fault. No customer impact yet.</a:t>
+            </a:r>
+            <a:endParaRPr lang="en-US" sz="1866" dirty="0"/>
+          </a:p>
+        </p:txBody>
+      </p:sp>
+      <p:sp>
+        <p:nvSpPr>
+          <p:cNvPr id="23" name="Text 21"/>
+          <p:cNvSpPr/>
+          <p:nvPr/>
+        </p:nvSpPr>
+        <p:spPr>
+          <a:xfrm>
+            <a:off x="6073050" y="4177903"/>
+            <a:ext cx="2728361" cy="687388"/>
+          </a:xfrm>
+          <a:prstGeom prst="rect">
+            <a:avLst/>
+          </a:prstGeom>
+          <a:noFill/>
+          <a:ln/>
+        </p:spPr>
+        <p:txBody>
+          <a:bodyPr wrap="square" lIns="0" tIns="0" rIns="0" bIns="0" rtlCol="0" anchor="t"/>
+          <a:lstStyle/>
+          <a:p>
+            <a:pPr algn="l" indent="0" marL="0">
+              <a:lnSpc>
+                <a:spcPts val="2706"/>
+              </a:lnSpc>
+              <a:buNone/>
+            </a:pPr>
+            <a:r>
+              <a:rPr lang="en-US" sz="1866" dirty="0">
+                <a:solidFill>
+                  <a:srgbClr val="8A8F9A"/>
+                </a:solidFill>
+                <a:latin typeface="SpaceGrotesk" pitchFamily="34" charset="0"/>
+                <a:ea typeface="SpaceGrotesk" pitchFamily="34" charset="-122"/>
+                <a:cs typeface="SpaceGrotesk" pitchFamily="34" charset="-120"/>
+              </a:rPr>
+              <a:t>One owner. No separate comms role.</a:t>
+            </a:r>
+            <a:endParaRPr lang="en-US" sz="1866" dirty="0"/>
+          </a:p>
+        </p:txBody>
+      </p:sp>
+      <p:sp>
+        <p:nvSpPr>
+          <p:cNvPr id="24" name="Text 22"/>
+          <p:cNvSpPr/>
+          <p:nvPr/>
+        </p:nvSpPr>
+        <p:spPr>
+          <a:xfrm>
+            <a:off x="9086364" y="4349750"/>
+            <a:ext cx="2382940" cy="343694"/>
+          </a:xfrm>
+          <a:prstGeom prst="rect">
+            <a:avLst/>
+          </a:prstGeom>
+          <a:noFill/>
+          <a:ln/>
+        </p:spPr>
+        <p:txBody>
+          <a:bodyPr wrap="square" lIns="0" tIns="0" rIns="0" bIns="0" rtlCol="0" anchor="t"/>
+          <a:lstStyle/>
+          <a:p>
+            <a:pPr algn="l" indent="0" marL="0">
+              <a:lnSpc>
+                <a:spcPts val="2706"/>
+              </a:lnSpc>
+              <a:buNone/>
+            </a:pPr>
+            <a:r>
+              <a:rPr lang="en-US" sz="1866" dirty="0">
+                <a:solidFill>
+                  <a:srgbClr val="8A8F9A"/>
+                </a:solidFill>
+                <a:latin typeface="SpaceGrotesk" pitchFamily="34" charset="0"/>
+                <a:ea typeface="SpaceGrotesk" pitchFamily="34" charset="-122"/>
+                <a:cs typeface="SpaceGrotesk" pitchFamily="34" charset="-120"/>
+              </a:rPr>
+              <a:t>On-call only.</a:t>
+            </a:r>
+            <a:endParaRPr lang="en-US" sz="1866" dirty="0"/>
+          </a:p>
+        </p:txBody>
+      </p:sp>
+      <p:sp>
+        <p:nvSpPr>
+          <p:cNvPr id="25" name="Shape 23"/>
+          <p:cNvSpPr/>
+          <p:nvPr/>
+        </p:nvSpPr>
+        <p:spPr>
+          <a:xfrm>
+            <a:off x="588220" y="4979987"/>
+            <a:ext cx="11012512" cy="0"/>
+          </a:xfrm>
+          <a:prstGeom prst="line">
+            <a:avLst/>
+          </a:prstGeom>
+          <a:noFill/>
+          <a:ln w="12698">
+            <a:solidFill>
+              <a:srgbClr val="2A2D35"/>
+            </a:solidFill>
+            <a:prstDash val="solid"/>
+          </a:ln>
+        </p:spPr>
+      </p:sp>
+      <p:sp>
+        <p:nvSpPr>
+          <p:cNvPr id="26" name="Text 24"/>
+          <p:cNvSpPr/>
+          <p:nvPr/>
+        </p:nvSpPr>
+        <p:spPr>
+          <a:xfrm>
+            <a:off x="757445" y="5272286"/>
+            <a:ext cx="1001660" cy="331986"/>
+          </a:xfrm>
+          <a:prstGeom prst="rect">
+            <a:avLst/>
+          </a:prstGeom>
+          <a:noFill/>
+          <a:ln/>
+        </p:spPr>
+        <p:txBody>
+          <a:bodyPr wrap="square" lIns="0" tIns="0" rIns="0" bIns="0" rtlCol="0" anchor="t"/>
+          <a:lstStyle/>
+          <a:p>
+            <a:pPr algn="l" indent="0" marL="0">
+              <a:lnSpc>
+                <a:spcPts val="2613"/>
+              </a:lnSpc>
+              <a:buNone/>
+            </a:pPr>
+            <a:r>
+              <a:rPr lang="en-US" sz="1866" dirty="0">
+                <a:solidFill>
+                  <a:srgbClr val="8A8F9A"/>
+                </a:solidFill>
+                <a:latin typeface="JetBrainsMono" pitchFamily="34" charset="0"/>
+                <a:ea typeface="JetBrainsMono" pitchFamily="34" charset="-122"/>
+                <a:cs typeface="JetBrainsMono" pitchFamily="34" charset="-120"/>
+              </a:rPr>
+              <a:t>SEV-4</a:t>
+            </a:r>
+            <a:endParaRPr lang="en-US" sz="1866" dirty="0"/>
+          </a:p>
+        </p:txBody>
+      </p:sp>
+      <p:sp>
+        <p:nvSpPr>
+          <p:cNvPr id="27" name="Text 25"/>
+          <p:cNvSpPr/>
+          <p:nvPr/>
+        </p:nvSpPr>
+        <p:spPr>
+          <a:xfrm>
+            <a:off x="2077915" y="5094684"/>
+            <a:ext cx="3729819" cy="687388"/>
+          </a:xfrm>
+          <a:prstGeom prst="rect">
+            <a:avLst/>
+          </a:prstGeom>
+          <a:noFill/>
+          <a:ln/>
+        </p:spPr>
+        <p:txBody>
+          <a:bodyPr wrap="square" lIns="0" tIns="0" rIns="0" bIns="0" rtlCol="0" anchor="t"/>
+          <a:lstStyle/>
+          <a:p>
+            <a:pPr algn="l" indent="0" marL="0">
+              <a:lnSpc>
+                <a:spcPts val="2706"/>
+              </a:lnSpc>
+              <a:buNone/>
+            </a:pPr>
+            <a:r>
+              <a:rPr lang="en-US" sz="1866" dirty="0">
+                <a:solidFill>
+                  <a:srgbClr val="8A8F9A"/>
+                </a:solidFill>
+                <a:latin typeface="SpaceGrotesk" pitchFamily="34" charset="0"/>
+                <a:ea typeface="SpaceGrotesk" pitchFamily="34" charset="-122"/>
+                <a:cs typeface="SpaceGrotesk" pitchFamily="34" charset="-120"/>
+              </a:rPr>
+              <a:t>Known and tolerated. Tracked, not chased.</a:t>
+            </a:r>
+            <a:endParaRPr lang="en-US" sz="1866" dirty="0"/>
+          </a:p>
+        </p:txBody>
+      </p:sp>
+      <p:sp>
+        <p:nvSpPr>
+          <p:cNvPr id="28" name="Text 26"/>
+          <p:cNvSpPr/>
+          <p:nvPr/>
+        </p:nvSpPr>
+        <p:spPr>
+          <a:xfrm>
+            <a:off x="6073050" y="5266531"/>
+            <a:ext cx="2728361" cy="343694"/>
+          </a:xfrm>
+          <a:prstGeom prst="rect">
+            <a:avLst/>
+          </a:prstGeom>
+          <a:noFill/>
+          <a:ln/>
+        </p:spPr>
+        <p:txBody>
+          <a:bodyPr wrap="square" lIns="0" tIns="0" rIns="0" bIns="0" rtlCol="0" anchor="t"/>
+          <a:lstStyle/>
+          <a:p>
+            <a:pPr algn="l" indent="0" marL="0">
+              <a:lnSpc>
+                <a:spcPts val="2706"/>
+              </a:lnSpc>
+              <a:buNone/>
+            </a:pPr>
+            <a:r>
+              <a:rPr lang="en-US" sz="1866" dirty="0">
+                <a:solidFill>
+                  <a:srgbClr val="8A8F9A"/>
+                </a:solidFill>
+                <a:latin typeface="SpaceGrotesk" pitchFamily="34" charset="0"/>
+                <a:ea typeface="SpaceGrotesk" pitchFamily="34" charset="-122"/>
+                <a:cs typeface="SpaceGrotesk" pitchFamily="34" charset="-120"/>
+              </a:rPr>
+              <a:t>A ticket, not a page.</a:t>
+            </a:r>
+            <a:endParaRPr lang="en-US" sz="1866" dirty="0"/>
+          </a:p>
+        </p:txBody>
+      </p:sp>
+      <p:sp>
+        <p:nvSpPr>
+          <p:cNvPr id="29" name="Text 27"/>
+          <p:cNvSpPr/>
+          <p:nvPr/>
+        </p:nvSpPr>
+        <p:spPr>
+          <a:xfrm>
+            <a:off x="9086364" y="5094684"/>
+            <a:ext cx="2382940" cy="687388"/>
+          </a:xfrm>
+          <a:prstGeom prst="rect">
+            <a:avLst/>
+          </a:prstGeom>
+          <a:noFill/>
+          <a:ln/>
+        </p:spPr>
+        <p:txBody>
+          <a:bodyPr wrap="square" lIns="0" tIns="0" rIns="0" bIns="0" rtlCol="0" anchor="t"/>
+          <a:lstStyle/>
+          <a:p>
+            <a:pPr algn="l" indent="0" marL="0">
+              <a:lnSpc>
+                <a:spcPts val="2706"/>
+              </a:lnSpc>
+              <a:buNone/>
+            </a:pPr>
+            <a:r>
+              <a:rPr lang="en-US" sz="1866" dirty="0">
+                <a:solidFill>
+                  <a:srgbClr val="8A8F9A"/>
+                </a:solidFill>
+                <a:latin typeface="SpaceGrotesk" pitchFamily="34" charset="0"/>
+                <a:ea typeface="SpaceGrotesk" pitchFamily="34" charset="-122"/>
+                <a:cs typeface="SpaceGrotesk" pitchFamily="34" charset="-120"/>
+              </a:rPr>
+              <a:t>Nobody, until working hours.</a:t>
+            </a:r>
+            <a:endParaRPr lang="en-US" sz="1866" dirty="0"/>
+          </a:p>
+        </p:txBody>
+      </p:sp>
+      <p:sp>
+        <p:nvSpPr>
+          <p:cNvPr id="30" name="Text 28"/>
+          <p:cNvSpPr/>
+          <p:nvPr/>
+        </p:nvSpPr>
+        <p:spPr>
+          <a:xfrm>
+            <a:off x="575523" y="6089253"/>
+            <a:ext cx="4790163" cy="260747"/>
+          </a:xfrm>
+          <a:prstGeom prst="rect">
+            <a:avLst/>
+          </a:prstGeom>
+          <a:noFill/>
+          <a:ln/>
+        </p:spPr>
+        <p:txBody>
+          <a:bodyPr wrap="square" lIns="0" tIns="0" rIns="0" bIns="0" rtlCol="0" anchor="t"/>
+          <a:lstStyle/>
+          <a:p>
+            <a:pPr algn="l" indent="0" marL="0">
+              <a:lnSpc>
+                <a:spcPts val="2053"/>
+              </a:lnSpc>
+              <a:buNone/>
+            </a:pPr>
+            <a:r>
+              <a:rPr lang="en-US" sz="1466" dirty="0">
+                <a:solidFill>
+                  <a:srgbClr val="8A8F9A"/>
+                </a:solidFill>
+                <a:latin typeface="JetBrainsMono" pitchFamily="34" charset="0"/>
+                <a:ea typeface="JetBrainsMono" pitchFamily="34" charset="-122"/>
+                <a:cs typeface="JetBrainsMono" pitchFamily="34" charset="-120"/>
+              </a:rPr>
+              <a:t>A LEVEL IS A PERMISSION TO WAKE PEOPLE</a:t>
+            </a:r>
+            <a:endParaRPr lang="en-US" sz="1466" dirty="0"/>
+          </a:p>
+        </p:txBody>
+      </p:sp>
+      <p:sp>
+        <p:nvSpPr>
+          <p:cNvPr id="31" name="Text 29"/>
+          <p:cNvSpPr/>
+          <p:nvPr/>
+        </p:nvSpPr>
+        <p:spPr>
+          <a:xfrm>
+            <a:off x="7905956" y="6089253"/>
+            <a:ext cx="3781622" cy="260747"/>
+          </a:xfrm>
+          <a:prstGeom prst="rect">
+            <a:avLst/>
+          </a:prstGeom>
+          <a:noFill/>
+          <a:ln/>
+        </p:spPr>
+        <p:txBody>
+          <a:bodyPr wrap="square" lIns="0" tIns="0" rIns="0" bIns="0" rtlCol="0" anchor="t"/>
+          <a:lstStyle/>
+          <a:p>
+            <a:pPr algn="l" indent="0" marL="0">
+              <a:lnSpc>
+                <a:spcPts val="2053"/>
+              </a:lnSpc>
+              <a:buNone/>
+            </a:pPr>
+            <a:r>
+              <a:rPr lang="en-US" sz="1466" dirty="0">
+                <a:solidFill>
+                  <a:srgbClr val="8A8F9A"/>
+                </a:solidFill>
+                <a:latin typeface="JetBrainsMono" pitchFamily="34" charset="0"/>
+                <a:ea typeface="JetBrainsMono" pitchFamily="34" charset="-122"/>
+                <a:cs typeface="JetBrainsMono" pitchFamily="34" charset="-120"/>
+              </a:rPr>
+              <a:t>LADDER PROPOSED FOR DISCUSSION</a:t>
+            </a:r>
+            <a:endParaRPr lang="en-US" sz="1466" dirty="0"/>
+          </a:p>
+        </p:txBody>
+      </p:sp>
     </p:spTree>
   </p:cSld>
   <p:clrMapOvr>
@@ -1544,6 +6251,13 @@
 <file path=ppt/slides/slide6.xml><?xml version="1.0" encoding="utf-8"?>
 <p:sld xmlns:a="http://schemas.openxmlformats.org/drawingml/2006/main" xmlns:r="http://schemas.openxmlformats.org/officeDocument/2006/relationships" xmlns:p="http://schemas.openxmlformats.org/presentationml/2006/main">
   <p:cSld name="Slide 6">
+    <p:bg>
+      <p:bgPr>
+        <a:solidFill>
+          <a:srgbClr val="0C0D10"/>
+        </a:solidFill>
+      </p:bgPr>
+    </p:bg>
     <p:spTree>
       <p:nvGrpSpPr>
         <p:cNvPr id="1" name=""/>
@@ -1558,30 +6272,817 @@
           <a:chExt cx="0" cy="0"/>
         </a:xfrm>
       </p:grpSpPr>
-      <p:pic>
-        <p:nvPicPr>
-          <p:cNvPr id="2" name="Image 0" descr="/tmp/slide-1787840579548-whyej8ju3d.png">    </p:cNvPr>
-          <p:cNvPicPr>
-            <a:picLocks noChangeAspect="1"/>
-          </p:cNvPicPr>
-          <p:nvPr/>
-        </p:nvPicPr>
-        <p:blipFill>
-          <a:blip r:embed="rId1"/>
-          <a:stretch>
-            <a:fillRect/>
-          </a:stretch>
-        </p:blipFill>
-        <p:spPr>
-          <a:xfrm>
-            <a:off x="0" y="0"/>
-            <a:ext cx="12188952" cy="6858000"/>
-          </a:xfrm>
-          <a:prstGeom prst="rect">
-            <a:avLst/>
-          </a:prstGeom>
-        </p:spPr>
-      </p:pic>
+      <p:sp>
+        <p:nvSpPr>
+          <p:cNvPr id="2" name="Text 0"/>
+          <p:cNvSpPr/>
+          <p:nvPr/>
+        </p:nvSpPr>
+        <p:spPr>
+          <a:xfrm>
+            <a:off x="575523" y="440134"/>
+            <a:ext cx="2392451" cy="307975"/>
+          </a:xfrm>
+          <a:prstGeom prst="rect">
+            <a:avLst/>
+          </a:prstGeom>
+          <a:noFill/>
+          <a:ln/>
+        </p:spPr>
+        <p:txBody>
+          <a:bodyPr wrap="square" lIns="0" tIns="0" rIns="0" bIns="0" rtlCol="0" anchor="t"/>
+          <a:lstStyle/>
+          <a:p>
+            <a:pPr algn="l" indent="0" marL="0">
+              <a:lnSpc>
+                <a:spcPts val="2426"/>
+              </a:lnSpc>
+              <a:buNone/>
+            </a:pPr>
+            <a:r>
+              <a:rPr lang="en-US" sz="1733" dirty="0">
+                <a:solidFill>
+                  <a:srgbClr val="3DF5E0"/>
+                </a:solidFill>
+                <a:latin typeface="JetBrainsMono" pitchFamily="34" charset="0"/>
+                <a:ea typeface="JetBrainsMono" pitchFamily="34" charset="-122"/>
+                <a:cs typeface="JetBrainsMono" pitchFamily="34" charset="-120"/>
+              </a:rPr>
+              <a:t>// 06 — DECISIONS</a:t>
+            </a:r>
+            <a:endParaRPr lang="en-US" sz="1733" dirty="0"/>
+          </a:p>
+        </p:txBody>
+      </p:sp>
+      <p:sp>
+        <p:nvSpPr>
+          <p:cNvPr id="3" name="Text 1"/>
+          <p:cNvSpPr/>
+          <p:nvPr/>
+        </p:nvSpPr>
+        <p:spPr>
+          <a:xfrm>
+            <a:off x="10095563" y="440134"/>
+            <a:ext cx="1548223" cy="307975"/>
+          </a:xfrm>
+          <a:prstGeom prst="rect">
+            <a:avLst/>
+          </a:prstGeom>
+          <a:noFill/>
+          <a:ln/>
+        </p:spPr>
+        <p:txBody>
+          <a:bodyPr wrap="square" lIns="0" tIns="0" rIns="0" bIns="0" rtlCol="0" anchor="t"/>
+          <a:lstStyle/>
+          <a:p>
+            <a:pPr algn="l" indent="0" marL="0">
+              <a:lnSpc>
+                <a:spcPts val="2426"/>
+              </a:lnSpc>
+              <a:buNone/>
+            </a:pPr>
+            <a:r>
+              <a:rPr lang="en-US" sz="1733" dirty="0">
+                <a:solidFill>
+                  <a:srgbClr val="8A8F9A"/>
+                </a:solidFill>
+                <a:latin typeface="JetBrainsMono" pitchFamily="34" charset="0"/>
+                <a:ea typeface="JetBrainsMono" pitchFamily="34" charset="-122"/>
+                <a:cs typeface="JetBrainsMono" pitchFamily="34" charset="-120"/>
+              </a:rPr>
+              <a:t>[ 06 / 06 ]</a:t>
+            </a:r>
+            <a:endParaRPr lang="en-US" sz="1733" dirty="0"/>
+          </a:p>
+        </p:txBody>
+      </p:sp>
+      <p:sp>
+        <p:nvSpPr>
+          <p:cNvPr id="4" name="Text 2"/>
+          <p:cNvSpPr/>
+          <p:nvPr/>
+        </p:nvSpPr>
+        <p:spPr>
+          <a:xfrm>
+            <a:off x="575523" y="866577"/>
+            <a:ext cx="11258664" cy="528241"/>
+          </a:xfrm>
+          <a:prstGeom prst="rect">
+            <a:avLst/>
+          </a:prstGeom>
+          <a:noFill/>
+          <a:ln/>
+        </p:spPr>
+        <p:txBody>
+          <a:bodyPr wrap="square" lIns="0" tIns="0" rIns="0" bIns="0" rtlCol="0" anchor="t"/>
+          <a:lstStyle/>
+          <a:p>
+            <a:pPr algn="l" indent="0" marL="0">
+              <a:lnSpc>
+                <a:spcPts val="4159"/>
+              </a:lnSpc>
+              <a:spcAft>
+                <a:spcPts val="1200"/>
+              </a:spcAft>
+              <a:buNone/>
+            </a:pPr>
+            <a:r>
+              <a:rPr lang="en-US" sz="3466" b="1" dirty="0">
+                <a:solidFill>
+                  <a:srgbClr val="E4E6EB"/>
+                </a:solidFill>
+                <a:latin typeface="SpaceGrotesk" pitchFamily="34" charset="0"/>
+                <a:ea typeface="SpaceGrotesk" pitchFamily="34" charset="-122"/>
+                <a:cs typeface="SpaceGrotesk" pitchFamily="34" charset="-120"/>
+              </a:rPr>
+              <a:t>What we need to decide</a:t>
+            </a:r>
+            <a:endParaRPr lang="en-US" sz="3466" dirty="0"/>
+          </a:p>
+        </p:txBody>
+      </p:sp>
+      <p:sp>
+        <p:nvSpPr>
+          <p:cNvPr id="5" name="Text 3"/>
+          <p:cNvSpPr/>
+          <p:nvPr/>
+        </p:nvSpPr>
+        <p:spPr>
+          <a:xfrm>
+            <a:off x="575523" y="1547217"/>
+            <a:ext cx="11037905" cy="12700"/>
+          </a:xfrm>
+          <a:prstGeom prst="rect">
+            <a:avLst/>
+          </a:prstGeom>
+          <a:solidFill>
+            <a:srgbClr val="2A2D35"/>
+          </a:solidFill>
+          <a:ln/>
+        </p:spPr>
+        <p:txBody>
+          <a:bodyPr wrap="square" rtlCol="0" anchor="ctr"/>
+          <a:lstStyle/>
+          <a:p>
+            <a:pPr indent="0" marL="0">
+              <a:buNone/>
+            </a:pPr>
+            <a:endParaRPr lang="en-US" dirty="0"/>
+          </a:p>
+        </p:txBody>
+      </p:sp>
+      <p:sp>
+        <p:nvSpPr>
+          <p:cNvPr id="6" name="Text 4"/>
+          <p:cNvSpPr/>
+          <p:nvPr/>
+        </p:nvSpPr>
+        <p:spPr>
+          <a:xfrm>
+            <a:off x="575523" y="1779984"/>
+            <a:ext cx="11037905" cy="849114"/>
+          </a:xfrm>
+          <a:prstGeom prst="roundRect">
+            <a:avLst>
+              <a:gd name="adj" fmla="val 5982"/>
+            </a:avLst>
+          </a:prstGeom>
+          <a:solidFill>
+            <a:srgbClr val="16181D"/>
+          </a:solidFill>
+          <a:ln w="12698">
+            <a:solidFill>
+              <a:srgbClr val="2A2D35"/>
+            </a:solidFill>
+          </a:ln>
+        </p:spPr>
+        <p:txBody>
+          <a:bodyPr wrap="square" rtlCol="0" anchor="ctr"/>
+          <a:lstStyle/>
+          <a:p>
+            <a:pPr indent="0" marL="0">
+              <a:buNone/>
+            </a:pPr>
+            <a:endParaRPr lang="en-US" dirty="0"/>
+          </a:p>
+        </p:txBody>
+      </p:sp>
+      <p:sp>
+        <p:nvSpPr>
+          <p:cNvPr id="7" name="Text 5"/>
+          <p:cNvSpPr/>
+          <p:nvPr/>
+        </p:nvSpPr>
+        <p:spPr>
+          <a:xfrm>
+            <a:off x="825095" y="2050455"/>
+            <a:ext cx="1243273" cy="307975"/>
+          </a:xfrm>
+          <a:prstGeom prst="rect">
+            <a:avLst/>
+          </a:prstGeom>
+          <a:noFill/>
+          <a:ln/>
+        </p:spPr>
+        <p:txBody>
+          <a:bodyPr wrap="square" lIns="0" tIns="0" rIns="0" bIns="0" rtlCol="0" anchor="t"/>
+          <a:lstStyle/>
+          <a:p>
+            <a:pPr algn="l" indent="0" marL="0">
+              <a:lnSpc>
+                <a:spcPts val="2426"/>
+              </a:lnSpc>
+              <a:buNone/>
+            </a:pPr>
+            <a:r>
+              <a:rPr lang="en-US" sz="1733" dirty="0">
+                <a:solidFill>
+                  <a:srgbClr val="3DF5E0"/>
+                </a:solidFill>
+                <a:latin typeface="JetBrainsMono" pitchFamily="34" charset="0"/>
+                <a:ea typeface="JetBrainsMono" pitchFamily="34" charset="-122"/>
+                <a:cs typeface="JetBrainsMono" pitchFamily="34" charset="-120"/>
+              </a:rPr>
+              <a:t>[ Q1 ]</a:t>
+            </a:r>
+            <a:endParaRPr lang="en-US" sz="1733" dirty="0"/>
+          </a:p>
+        </p:txBody>
+      </p:sp>
+      <p:sp>
+        <p:nvSpPr>
+          <p:cNvPr id="8" name="Text 6"/>
+          <p:cNvSpPr/>
+          <p:nvPr/>
+        </p:nvSpPr>
+        <p:spPr>
+          <a:xfrm>
+            <a:off x="2043990" y="1995884"/>
+            <a:ext cx="6829908" cy="417314"/>
+          </a:xfrm>
+          <a:prstGeom prst="rect">
+            <a:avLst/>
+          </a:prstGeom>
+          <a:noFill/>
+          <a:ln/>
+        </p:spPr>
+        <p:txBody>
+          <a:bodyPr wrap="square" lIns="0" tIns="0" rIns="0" bIns="0" rtlCol="0" anchor="t"/>
+          <a:lstStyle/>
+          <a:p>
+            <a:pPr algn="l" indent="0" marL="0">
+              <a:lnSpc>
+                <a:spcPts val="3286"/>
+              </a:lnSpc>
+              <a:buNone/>
+            </a:pPr>
+            <a:r>
+              <a:rPr lang="en-US" sz="2266" dirty="0">
+                <a:solidFill>
+                  <a:srgbClr val="E4E6EB"/>
+                </a:solidFill>
+                <a:latin typeface="SpaceGrotesk" pitchFamily="34" charset="0"/>
+                <a:ea typeface="SpaceGrotesk" pitchFamily="34" charset="-122"/>
+                <a:cs typeface="SpaceGrotesk" pitchFamily="34" charset="-120"/>
+              </a:rPr>
+              <a:t>Who may declare — and must they ask first?</a:t>
+            </a:r>
+            <a:endParaRPr lang="en-US" sz="2266" dirty="0"/>
+          </a:p>
+        </p:txBody>
+      </p:sp>
+      <p:sp>
+        <p:nvSpPr>
+          <p:cNvPr id="9" name="Text 7"/>
+          <p:cNvSpPr/>
+          <p:nvPr/>
+        </p:nvSpPr>
+        <p:spPr>
+          <a:xfrm>
+            <a:off x="8687501" y="2050455"/>
+            <a:ext cx="2676356" cy="307975"/>
+          </a:xfrm>
+          <a:prstGeom prst="rect">
+            <a:avLst/>
+          </a:prstGeom>
+          <a:noFill/>
+          <a:ln/>
+        </p:spPr>
+        <p:txBody>
+          <a:bodyPr wrap="square" lIns="0" tIns="0" rIns="0" bIns="0" rtlCol="0" anchor="t"/>
+          <a:lstStyle/>
+          <a:p>
+            <a:pPr algn="r" indent="0" marL="0">
+              <a:lnSpc>
+                <a:spcPts val="2426"/>
+              </a:lnSpc>
+              <a:buNone/>
+            </a:pPr>
+            <a:r>
+              <a:rPr lang="en-US" sz="1733" dirty="0">
+                <a:solidFill>
+                  <a:srgbClr val="9D7BFF"/>
+                </a:solidFill>
+                <a:latin typeface="JetBrainsMono" pitchFamily="34" charset="0"/>
+                <a:ea typeface="JetBrainsMono" pitchFamily="34" charset="-122"/>
+                <a:cs typeface="JetBrainsMono" pitchFamily="34" charset="-120"/>
+              </a:rPr>
+              <a:t>[ BLOCKS SEV-1 ]</a:t>
+            </a:r>
+            <a:endParaRPr lang="en-US" sz="1733" dirty="0"/>
+          </a:p>
+        </p:txBody>
+      </p:sp>
+      <p:sp>
+        <p:nvSpPr>
+          <p:cNvPr id="10" name="Text 8"/>
+          <p:cNvSpPr/>
+          <p:nvPr/>
+        </p:nvSpPr>
+        <p:spPr>
+          <a:xfrm>
+            <a:off x="575523" y="2798366"/>
+            <a:ext cx="11037905" cy="849114"/>
+          </a:xfrm>
+          <a:prstGeom prst="roundRect">
+            <a:avLst>
+              <a:gd name="adj" fmla="val 5982"/>
+            </a:avLst>
+          </a:prstGeom>
+          <a:solidFill>
+            <a:srgbClr val="16181D"/>
+          </a:solidFill>
+          <a:ln w="12698">
+            <a:solidFill>
+              <a:srgbClr val="2A2D35"/>
+            </a:solidFill>
+          </a:ln>
+        </p:spPr>
+        <p:txBody>
+          <a:bodyPr wrap="square" rtlCol="0" anchor="ctr"/>
+          <a:lstStyle/>
+          <a:p>
+            <a:pPr indent="0" marL="0">
+              <a:buNone/>
+            </a:pPr>
+            <a:endParaRPr lang="en-US" dirty="0"/>
+          </a:p>
+        </p:txBody>
+      </p:sp>
+      <p:sp>
+        <p:nvSpPr>
+          <p:cNvPr id="11" name="Text 9"/>
+          <p:cNvSpPr/>
+          <p:nvPr/>
+        </p:nvSpPr>
+        <p:spPr>
+          <a:xfrm>
+            <a:off x="825095" y="3068836"/>
+            <a:ext cx="1243273" cy="307975"/>
+          </a:xfrm>
+          <a:prstGeom prst="rect">
+            <a:avLst/>
+          </a:prstGeom>
+          <a:noFill/>
+          <a:ln/>
+        </p:spPr>
+        <p:txBody>
+          <a:bodyPr wrap="square" lIns="0" tIns="0" rIns="0" bIns="0" rtlCol="0" anchor="t"/>
+          <a:lstStyle/>
+          <a:p>
+            <a:pPr algn="l" indent="0" marL="0">
+              <a:lnSpc>
+                <a:spcPts val="2426"/>
+              </a:lnSpc>
+              <a:buNone/>
+            </a:pPr>
+            <a:r>
+              <a:rPr lang="en-US" sz="1733" dirty="0">
+                <a:solidFill>
+                  <a:srgbClr val="3DF5E0"/>
+                </a:solidFill>
+                <a:latin typeface="JetBrainsMono" pitchFamily="34" charset="0"/>
+                <a:ea typeface="JetBrainsMono" pitchFamily="34" charset="-122"/>
+                <a:cs typeface="JetBrainsMono" pitchFamily="34" charset="-120"/>
+              </a:rPr>
+              <a:t>[ Q2 ]</a:t>
+            </a:r>
+            <a:endParaRPr lang="en-US" sz="1733" dirty="0"/>
+          </a:p>
+        </p:txBody>
+      </p:sp>
+      <p:sp>
+        <p:nvSpPr>
+          <p:cNvPr id="12" name="Text 10"/>
+          <p:cNvSpPr/>
+          <p:nvPr/>
+        </p:nvSpPr>
+        <p:spPr>
+          <a:xfrm>
+            <a:off x="2043990" y="3014266"/>
+            <a:ext cx="6829908" cy="417314"/>
+          </a:xfrm>
+          <a:prstGeom prst="rect">
+            <a:avLst/>
+          </a:prstGeom>
+          <a:noFill/>
+          <a:ln/>
+        </p:spPr>
+        <p:txBody>
+          <a:bodyPr wrap="square" lIns="0" tIns="0" rIns="0" bIns="0" rtlCol="0" anchor="t"/>
+          <a:lstStyle/>
+          <a:p>
+            <a:pPr algn="l" indent="0" marL="0">
+              <a:lnSpc>
+                <a:spcPts val="3286"/>
+              </a:lnSpc>
+              <a:buNone/>
+            </a:pPr>
+            <a:r>
+              <a:rPr lang="en-US" sz="2266" dirty="0">
+                <a:solidFill>
+                  <a:srgbClr val="E4E6EB"/>
+                </a:solidFill>
+                <a:latin typeface="SpaceGrotesk" pitchFamily="34" charset="0"/>
+                <a:ea typeface="SpaceGrotesk" pitchFamily="34" charset="-122"/>
+                <a:cs typeface="SpaceGrotesk" pitchFamily="34" charset="-120"/>
+              </a:rPr>
+              <a:t>What is our comms cadence, and who owns it?</a:t>
+            </a:r>
+            <a:endParaRPr lang="en-US" sz="2266" dirty="0"/>
+          </a:p>
+        </p:txBody>
+      </p:sp>
+      <p:sp>
+        <p:nvSpPr>
+          <p:cNvPr id="13" name="Text 11"/>
+          <p:cNvSpPr/>
+          <p:nvPr/>
+        </p:nvSpPr>
+        <p:spPr>
+          <a:xfrm>
+            <a:off x="8687501" y="3068836"/>
+            <a:ext cx="2676356" cy="307975"/>
+          </a:xfrm>
+          <a:prstGeom prst="rect">
+            <a:avLst/>
+          </a:prstGeom>
+          <a:noFill/>
+          <a:ln/>
+        </p:spPr>
+        <p:txBody>
+          <a:bodyPr wrap="square" lIns="0" tIns="0" rIns="0" bIns="0" rtlCol="0" anchor="t"/>
+          <a:lstStyle/>
+          <a:p>
+            <a:pPr algn="r" indent="0" marL="0">
+              <a:lnSpc>
+                <a:spcPts val="2426"/>
+              </a:lnSpc>
+              <a:buNone/>
+            </a:pPr>
+            <a:r>
+              <a:rPr lang="en-US" sz="1733" dirty="0">
+                <a:solidFill>
+                  <a:srgbClr val="9D7BFF"/>
+                </a:solidFill>
+                <a:latin typeface="JetBrainsMono" pitchFamily="34" charset="0"/>
+                <a:ea typeface="JetBrainsMono" pitchFamily="34" charset="-122"/>
+                <a:cs typeface="JetBrainsMono" pitchFamily="34" charset="-120"/>
+              </a:rPr>
+              <a:t>[ BLOCKS COMMS ]</a:t>
+            </a:r>
+            <a:endParaRPr lang="en-US" sz="1733" dirty="0"/>
+          </a:p>
+        </p:txBody>
+      </p:sp>
+      <p:sp>
+        <p:nvSpPr>
+          <p:cNvPr id="14" name="Text 12"/>
+          <p:cNvSpPr/>
+          <p:nvPr/>
+        </p:nvSpPr>
+        <p:spPr>
+          <a:xfrm>
+            <a:off x="575523" y="3816747"/>
+            <a:ext cx="11037905" cy="849114"/>
+          </a:xfrm>
+          <a:prstGeom prst="roundRect">
+            <a:avLst>
+              <a:gd name="adj" fmla="val 5982"/>
+            </a:avLst>
+          </a:prstGeom>
+          <a:solidFill>
+            <a:srgbClr val="16181D"/>
+          </a:solidFill>
+          <a:ln w="12698">
+            <a:solidFill>
+              <a:srgbClr val="2A2D35"/>
+            </a:solidFill>
+          </a:ln>
+        </p:spPr>
+        <p:txBody>
+          <a:bodyPr wrap="square" rtlCol="0" anchor="ctr"/>
+          <a:lstStyle/>
+          <a:p>
+            <a:pPr indent="0" marL="0">
+              <a:buNone/>
+            </a:pPr>
+            <a:endParaRPr lang="en-US" dirty="0"/>
+          </a:p>
+        </p:txBody>
+      </p:sp>
+      <p:sp>
+        <p:nvSpPr>
+          <p:cNvPr id="15" name="Text 13"/>
+          <p:cNvSpPr/>
+          <p:nvPr/>
+        </p:nvSpPr>
+        <p:spPr>
+          <a:xfrm>
+            <a:off x="825095" y="4087217"/>
+            <a:ext cx="1243273" cy="307975"/>
+          </a:xfrm>
+          <a:prstGeom prst="rect">
+            <a:avLst/>
+          </a:prstGeom>
+          <a:noFill/>
+          <a:ln/>
+        </p:spPr>
+        <p:txBody>
+          <a:bodyPr wrap="square" lIns="0" tIns="0" rIns="0" bIns="0" rtlCol="0" anchor="t"/>
+          <a:lstStyle/>
+          <a:p>
+            <a:pPr algn="l" indent="0" marL="0">
+              <a:lnSpc>
+                <a:spcPts val="2426"/>
+              </a:lnSpc>
+              <a:buNone/>
+            </a:pPr>
+            <a:r>
+              <a:rPr lang="en-US" sz="1733" dirty="0">
+                <a:solidFill>
+                  <a:srgbClr val="3DF5E0"/>
+                </a:solidFill>
+                <a:latin typeface="JetBrainsMono" pitchFamily="34" charset="0"/>
+                <a:ea typeface="JetBrainsMono" pitchFamily="34" charset="-122"/>
+                <a:cs typeface="JetBrainsMono" pitchFamily="34" charset="-120"/>
+              </a:rPr>
+              <a:t>[ Q3 ]</a:t>
+            </a:r>
+            <a:endParaRPr lang="en-US" sz="1733" dirty="0"/>
+          </a:p>
+        </p:txBody>
+      </p:sp>
+      <p:sp>
+        <p:nvSpPr>
+          <p:cNvPr id="16" name="Text 14"/>
+          <p:cNvSpPr/>
+          <p:nvPr/>
+        </p:nvSpPr>
+        <p:spPr>
+          <a:xfrm>
+            <a:off x="2043990" y="4032647"/>
+            <a:ext cx="6829908" cy="417314"/>
+          </a:xfrm>
+          <a:prstGeom prst="rect">
+            <a:avLst/>
+          </a:prstGeom>
+          <a:noFill/>
+          <a:ln/>
+        </p:spPr>
+        <p:txBody>
+          <a:bodyPr wrap="square" lIns="0" tIns="0" rIns="0" bIns="0" rtlCol="0" anchor="t"/>
+          <a:lstStyle/>
+          <a:p>
+            <a:pPr algn="l" indent="0" marL="0">
+              <a:lnSpc>
+                <a:spcPts val="3286"/>
+              </a:lnSpc>
+              <a:buNone/>
+            </a:pPr>
+            <a:r>
+              <a:rPr lang="en-US" sz="2266" dirty="0">
+                <a:solidFill>
+                  <a:srgbClr val="E4E6EB"/>
+                </a:solidFill>
+                <a:latin typeface="SpaceGrotesk" pitchFamily="34" charset="0"/>
+                <a:ea typeface="SpaceGrotesk" pitchFamily="34" charset="-122"/>
+                <a:cs typeface="SpaceGrotesk" pitchFamily="34" charset="-120"/>
+              </a:rPr>
+              <a:t>Where does the log live, and who writes it?</a:t>
+            </a:r>
+            <a:endParaRPr lang="en-US" sz="2266" dirty="0"/>
+          </a:p>
+        </p:txBody>
+      </p:sp>
+      <p:sp>
+        <p:nvSpPr>
+          <p:cNvPr id="17" name="Text 15"/>
+          <p:cNvSpPr/>
+          <p:nvPr/>
+        </p:nvSpPr>
+        <p:spPr>
+          <a:xfrm>
+            <a:off x="8687501" y="4087217"/>
+            <a:ext cx="2676356" cy="307975"/>
+          </a:xfrm>
+          <a:prstGeom prst="rect">
+            <a:avLst/>
+          </a:prstGeom>
+          <a:noFill/>
+          <a:ln/>
+        </p:spPr>
+        <p:txBody>
+          <a:bodyPr wrap="square" lIns="0" tIns="0" rIns="0" bIns="0" rtlCol="0" anchor="t"/>
+          <a:lstStyle/>
+          <a:p>
+            <a:pPr algn="r" indent="0" marL="0">
+              <a:lnSpc>
+                <a:spcPts val="2426"/>
+              </a:lnSpc>
+              <a:buNone/>
+            </a:pPr>
+            <a:r>
+              <a:rPr lang="en-US" sz="1733" dirty="0">
+                <a:solidFill>
+                  <a:srgbClr val="9D7BFF"/>
+                </a:solidFill>
+                <a:latin typeface="JetBrainsMono" pitchFamily="34" charset="0"/>
+                <a:ea typeface="JetBrainsMono" pitchFamily="34" charset="-122"/>
+                <a:cs typeface="JetBrainsMono" pitchFamily="34" charset="-120"/>
+              </a:rPr>
+              <a:t>[ BLOCKS REVIEW ]</a:t>
+            </a:r>
+            <a:endParaRPr lang="en-US" sz="1733" dirty="0"/>
+          </a:p>
+        </p:txBody>
+      </p:sp>
+      <p:sp>
+        <p:nvSpPr>
+          <p:cNvPr id="18" name="Text 16"/>
+          <p:cNvSpPr/>
+          <p:nvPr/>
+        </p:nvSpPr>
+        <p:spPr>
+          <a:xfrm>
+            <a:off x="575523" y="4982964"/>
+            <a:ext cx="11037905" cy="12700"/>
+          </a:xfrm>
+          <a:prstGeom prst="rect">
+            <a:avLst/>
+          </a:prstGeom>
+          <a:solidFill>
+            <a:srgbClr val="3DF5E0"/>
+          </a:solidFill>
+          <a:ln/>
+          <a:effectLst>
+            <a:outerShdw sx="100000" sy="100000" kx="0" ky="0" algn="bl" rotWithShape="0" blurRad="101587" dist="50800" dir="16200000">
+              <a:srgbClr val="3df5e0">
+                <a:alpha val="75000"/>
+              </a:srgbClr>
+            </a:outerShdw>
+          </a:effectLst>
+        </p:spPr>
+        <p:txBody>
+          <a:bodyPr wrap="square" rtlCol="0" anchor="ctr"/>
+          <a:lstStyle/>
+          <a:p>
+            <a:pPr indent="0" marL="0">
+              <a:buNone/>
+            </a:pPr>
+            <a:endParaRPr lang="en-US" dirty="0"/>
+          </a:p>
+        </p:txBody>
+      </p:sp>
+      <p:sp>
+        <p:nvSpPr>
+          <p:cNvPr id="19" name="Text 17"/>
+          <p:cNvSpPr/>
+          <p:nvPr/>
+        </p:nvSpPr>
+        <p:spPr>
+          <a:xfrm>
+            <a:off x="575523" y="5266531"/>
+            <a:ext cx="11258664" cy="572294"/>
+          </a:xfrm>
+          <a:prstGeom prst="rect">
+            <a:avLst/>
+          </a:prstGeom>
+          <a:noFill/>
+          <a:ln/>
+        </p:spPr>
+        <p:txBody>
+          <a:bodyPr wrap="square" lIns="0" tIns="0" rIns="0" bIns="0" rtlCol="0" anchor="t"/>
+          <a:lstStyle/>
+          <a:p>
+            <a:pPr algn="l" indent="0" marL="0">
+              <a:lnSpc>
+                <a:spcPts val="4506"/>
+              </a:lnSpc>
+              <a:spcAft>
+                <a:spcPts val="1600"/>
+              </a:spcAft>
+              <a:buNone/>
+            </a:pPr>
+            <a:r>
+              <a:rPr lang="en-US" sz="3466" b="1" dirty="0">
+                <a:solidFill>
+                  <a:srgbClr val="E4E6EB"/>
+                </a:solidFill>
+                <a:latin typeface="SpaceGrotesk" pitchFamily="34" charset="0"/>
+                <a:ea typeface="SpaceGrotesk" pitchFamily="34" charset="-122"/>
+                <a:cs typeface="SpaceGrotesk" pitchFamily="34" charset="-120"/>
+              </a:rPr>
+              <a:t>None of this needs a tool. It needs a decision.</a:t>
+            </a:r>
+            <a:endParaRPr lang="en-US" sz="3466" dirty="0"/>
+          </a:p>
+        </p:txBody>
+      </p:sp>
+      <p:sp>
+        <p:nvSpPr>
+          <p:cNvPr id="20" name="Text 18"/>
+          <p:cNvSpPr/>
+          <p:nvPr/>
+        </p:nvSpPr>
+        <p:spPr>
+          <a:xfrm>
+            <a:off x="575523" y="6042025"/>
+            <a:ext cx="2251814" cy="307975"/>
+          </a:xfrm>
+          <a:prstGeom prst="rect">
+            <a:avLst/>
+          </a:prstGeom>
+          <a:noFill/>
+          <a:ln/>
+        </p:spPr>
+        <p:txBody>
+          <a:bodyPr wrap="square" lIns="0" tIns="0" rIns="0" bIns="0" rtlCol="0" anchor="t"/>
+          <a:lstStyle/>
+          <a:p>
+            <a:pPr algn="l" indent="0" marL="0">
+              <a:lnSpc>
+                <a:spcPts val="2426"/>
+              </a:lnSpc>
+              <a:buNone/>
+            </a:pPr>
+            <a:r>
+              <a:rPr lang="en-US" sz="1733" dirty="0">
+                <a:solidFill>
+                  <a:srgbClr val="E4E6EB"/>
+                </a:solidFill>
+                <a:latin typeface="JetBrainsMono" pitchFamily="34" charset="0"/>
+                <a:ea typeface="JetBrainsMono" pitchFamily="34" charset="-122"/>
+                <a:cs typeface="JetBrainsMono" pitchFamily="34" charset="-120"/>
+              </a:rPr>
+              <a:t>PRESENTER · TEAM</a:t>
+            </a:r>
+            <a:endParaRPr lang="en-US" sz="1733" dirty="0"/>
+          </a:p>
+        </p:txBody>
+      </p:sp>
+      <p:sp>
+        <p:nvSpPr>
+          <p:cNvPr id="21" name="Text 19"/>
+          <p:cNvSpPr/>
+          <p:nvPr/>
+        </p:nvSpPr>
+        <p:spPr>
+          <a:xfrm>
+            <a:off x="10785556" y="6042025"/>
+            <a:ext cx="844430" cy="307975"/>
+          </a:xfrm>
+          <a:prstGeom prst="rect">
+            <a:avLst/>
+          </a:prstGeom>
+          <a:noFill/>
+          <a:ln/>
+        </p:spPr>
+        <p:txBody>
+          <a:bodyPr wrap="square" lIns="0" tIns="0" rIns="0" bIns="0" rtlCol="0" anchor="t"/>
+          <a:lstStyle/>
+          <a:p>
+            <a:pPr algn="l" indent="0" marL="0">
+              <a:lnSpc>
+                <a:spcPts val="2426"/>
+              </a:lnSpc>
+              <a:buNone/>
+            </a:pPr>
+            <a:r>
+              <a:rPr lang="en-US" sz="1733" dirty="0">
+                <a:solidFill>
+                  <a:srgbClr val="8A8F9A"/>
+                </a:solidFill>
+                <a:latin typeface="JetBrainsMono" pitchFamily="34" charset="0"/>
+                <a:ea typeface="JetBrainsMono" pitchFamily="34" charset="-122"/>
+                <a:cs typeface="JetBrainsMono" pitchFamily="34" charset="-120"/>
+              </a:rPr>
+              <a:t>// END</a:t>
+            </a:r>
+            <a:endParaRPr lang="en-US" sz="1733" dirty="0"/>
+          </a:p>
+        </p:txBody>
+      </p:sp>
     </p:spTree>
   </p:cSld>
   <p:clrMapOvr>

--- a/decks/incident-response/incident-response.pptx
+++ b/decks/incident-response/incident-response.pptx
@@ -1338,7 +1338,7 @@
           <a:ln/>
         </p:spPr>
         <p:txBody>
-          <a:bodyPr wrap="square" lIns="0" tIns="0" rIns="0" bIns="0" rtlCol="0" anchor="t"/>
+          <a:bodyPr wrap="none" lIns="0" tIns="0" rIns="0" bIns="0" rtlCol="0" anchor="t"/>
           <a:lstStyle/>
           <a:p>
             <a:pPr algn="l" indent="0" marL="0">
@@ -1380,7 +1380,7 @@
           <a:ln/>
         </p:spPr>
         <p:txBody>
-          <a:bodyPr wrap="square" lIns="0" tIns="0" rIns="0" bIns="0" rtlCol="0" anchor="t"/>
+          <a:bodyPr wrap="none" lIns="0" tIns="0" rIns="0" bIns="0" rtlCol="0" anchor="t"/>
           <a:lstStyle/>
           <a:p>
             <a:pPr algn="l" indent="0" marL="0">
@@ -1422,7 +1422,9 @@
           <a:ln/>
         </p:spPr>
         <p:txBody>
-          <a:bodyPr wrap="square" lIns="0" tIns="0" rIns="0" bIns="0" rtlCol="0" anchor="t"/>
+          <a:bodyPr wrap="square" lIns="0" tIns="0" rIns="0" bIns="0" rtlCol="0" anchor="t">
+            <a:normAutofit/>
+          </a:bodyPr>
           <a:lstStyle/>
           <a:p>
             <a:pPr algn="l" indent="0" marL="0">
@@ -1527,7 +1529,9 @@
           <a:ln/>
         </p:spPr>
         <p:txBody>
-          <a:bodyPr wrap="square" lIns="0" tIns="0" rIns="0" bIns="0" rtlCol="0" anchor="t"/>
+          <a:bodyPr wrap="square" lIns="0" tIns="0" rIns="0" bIns="0" rtlCol="0" anchor="t">
+            <a:normAutofit/>
+          </a:bodyPr>
           <a:lstStyle/>
           <a:p>
             <a:pPr algn="l" indent="0" marL="0">
@@ -1619,7 +1623,7 @@
           <a:ln/>
         </p:spPr>
         <p:txBody>
-          <a:bodyPr wrap="square" lIns="0" tIns="0" rIns="0" bIns="0" rtlCol="0" anchor="t"/>
+          <a:bodyPr wrap="none" lIns="0" tIns="0" rIns="0" bIns="0" rtlCol="0" anchor="t"/>
           <a:lstStyle/>
           <a:p>
             <a:pPr algn="l" indent="0" marL="0">
@@ -1661,7 +1665,7 @@
           <a:ln/>
         </p:spPr>
         <p:txBody>
-          <a:bodyPr wrap="square" lIns="0" tIns="0" rIns="0" bIns="0" rtlCol="0" anchor="t"/>
+          <a:bodyPr wrap="none" lIns="0" tIns="0" rIns="0" bIns="0" rtlCol="0" anchor="t"/>
           <a:lstStyle/>
           <a:p>
             <a:pPr algn="l" indent="0" marL="0">
@@ -1735,7 +1739,7 @@
           <a:ln/>
         </p:spPr>
         <p:txBody>
-          <a:bodyPr wrap="square" lIns="0" tIns="0" rIns="0" bIns="0" rtlCol="0" anchor="t"/>
+          <a:bodyPr wrap="none" lIns="0" tIns="0" rIns="0" bIns="0" rtlCol="0" anchor="t"/>
           <a:lstStyle/>
           <a:p>
             <a:pPr algn="l" indent="0" marL="0">
@@ -1777,7 +1781,7 @@
           <a:ln/>
         </p:spPr>
         <p:txBody>
-          <a:bodyPr wrap="square" lIns="0" tIns="0" rIns="0" bIns="0" rtlCol="0" anchor="t"/>
+          <a:bodyPr wrap="none" lIns="0" tIns="0" rIns="0" bIns="0" rtlCol="0" anchor="t"/>
           <a:lstStyle/>
           <a:p>
             <a:pPr algn="l" indent="0" marL="0">
@@ -1819,7 +1823,7 @@
           <a:ln/>
         </p:spPr>
         <p:txBody>
-          <a:bodyPr wrap="square" lIns="0" tIns="0" rIns="0" bIns="0" rtlCol="0" anchor="t"/>
+          <a:bodyPr wrap="none" lIns="0" tIns="0" rIns="0" bIns="0" rtlCol="0" anchor="t"/>
           <a:lstStyle/>
           <a:p>
             <a:pPr algn="l" indent="0" marL="0">
@@ -1930,7 +1934,7 @@
           <a:ln/>
         </p:spPr>
         <p:txBody>
-          <a:bodyPr wrap="square" lIns="0" tIns="0" rIns="0" bIns="0" rtlCol="0" anchor="t"/>
+          <a:bodyPr wrap="none" lIns="0" tIns="0" rIns="0" bIns="0" rtlCol="0" anchor="t"/>
           <a:lstStyle/>
           <a:p>
             <a:pPr algn="l" indent="0" marL="0">
@@ -1972,7 +1976,9 @@
           <a:ln/>
         </p:spPr>
         <p:txBody>
-          <a:bodyPr wrap="square" lIns="0" tIns="0" rIns="0" bIns="0" rtlCol="0" anchor="t"/>
+          <a:bodyPr wrap="square" lIns="0" tIns="0" rIns="0" bIns="0" rtlCol="0" anchor="t">
+            <a:normAutofit/>
+          </a:bodyPr>
           <a:lstStyle/>
           <a:p>
             <a:pPr algn="l" indent="0" marL="0">
@@ -2046,7 +2052,9 @@
           <a:ln/>
         </p:spPr>
         <p:txBody>
-          <a:bodyPr wrap="square" lIns="0" tIns="0" rIns="0" bIns="0" rtlCol="0" anchor="t"/>
+          <a:bodyPr wrap="square" lIns="0" tIns="0" rIns="0" bIns="0" rtlCol="0" anchor="t">
+            <a:normAutofit/>
+          </a:bodyPr>
           <a:lstStyle/>
           <a:p>
             <a:pPr algn="l" indent="0" marL="0">
@@ -2124,7 +2132,7 @@
           <a:ln/>
         </p:spPr>
         <p:txBody>
-          <a:bodyPr wrap="square" lIns="0" tIns="0" rIns="0" bIns="0" rtlCol="0" anchor="t"/>
+          <a:bodyPr wrap="none" lIns="0" tIns="0" rIns="0" bIns="0" rtlCol="0" anchor="t"/>
           <a:lstStyle/>
           <a:p>
             <a:pPr algn="l" indent="0" marL="0">
@@ -2166,7 +2174,9 @@
           <a:ln/>
         </p:spPr>
         <p:txBody>
-          <a:bodyPr wrap="square" lIns="0" tIns="0" rIns="0" bIns="0" rtlCol="0" anchor="t"/>
+          <a:bodyPr wrap="square" lIns="0" tIns="0" rIns="0" bIns="0" rtlCol="0" anchor="t">
+            <a:normAutofit/>
+          </a:bodyPr>
           <a:lstStyle/>
           <a:p>
             <a:pPr algn="l" indent="0" marL="0">
@@ -2240,7 +2250,9 @@
           <a:ln/>
         </p:spPr>
         <p:txBody>
-          <a:bodyPr wrap="square" lIns="0" tIns="0" rIns="0" bIns="0" rtlCol="0" anchor="t"/>
+          <a:bodyPr wrap="square" lIns="0" tIns="0" rIns="0" bIns="0" rtlCol="0" anchor="t">
+            <a:normAutofit/>
+          </a:bodyPr>
           <a:lstStyle/>
           <a:p>
             <a:pPr algn="l" indent="0" marL="0">
@@ -2318,7 +2330,7 @@
           <a:ln/>
         </p:spPr>
         <p:txBody>
-          <a:bodyPr wrap="square" lIns="0" tIns="0" rIns="0" bIns="0" rtlCol="0" anchor="t"/>
+          <a:bodyPr wrap="none" lIns="0" tIns="0" rIns="0" bIns="0" rtlCol="0" anchor="t"/>
           <a:lstStyle/>
           <a:p>
             <a:pPr algn="l" indent="0" marL="0">
@@ -2360,7 +2372,9 @@
           <a:ln/>
         </p:spPr>
         <p:txBody>
-          <a:bodyPr wrap="square" lIns="0" tIns="0" rIns="0" bIns="0" rtlCol="0" anchor="t"/>
+          <a:bodyPr wrap="square" lIns="0" tIns="0" rIns="0" bIns="0" rtlCol="0" anchor="t">
+            <a:normAutofit/>
+          </a:bodyPr>
           <a:lstStyle/>
           <a:p>
             <a:pPr algn="l" indent="0" marL="0">
@@ -2434,7 +2448,9 @@
           <a:ln/>
         </p:spPr>
         <p:txBody>
-          <a:bodyPr wrap="square" lIns="0" tIns="0" rIns="0" bIns="0" rtlCol="0" anchor="t"/>
+          <a:bodyPr wrap="square" lIns="0" tIns="0" rIns="0" bIns="0" rtlCol="0" anchor="t">
+            <a:normAutofit/>
+          </a:bodyPr>
           <a:lstStyle/>
           <a:p>
             <a:pPr algn="l" indent="0" marL="0">
@@ -2476,7 +2492,7 @@
           <a:ln/>
         </p:spPr>
         <p:txBody>
-          <a:bodyPr wrap="square" lIns="0" tIns="0" rIns="0" bIns="0" rtlCol="0" anchor="t"/>
+          <a:bodyPr wrap="none" lIns="0" tIns="0" rIns="0" bIns="0" rtlCol="0" anchor="t"/>
           <a:lstStyle/>
           <a:p>
             <a:pPr algn="l" indent="0" marL="0">
@@ -2521,7 +2537,7 @@
           <a:ln/>
         </p:spPr>
         <p:txBody>
-          <a:bodyPr wrap="square" lIns="0" tIns="0" rIns="0" bIns="0" rtlCol="0" anchor="t"/>
+          <a:bodyPr wrap="none" lIns="0" tIns="0" rIns="0" bIns="0" rtlCol="0" anchor="t"/>
           <a:lstStyle/>
           <a:p>
             <a:pPr algn="l" indent="0" marL="0">
@@ -2563,7 +2579,7 @@
           <a:ln/>
         </p:spPr>
         <p:txBody>
-          <a:bodyPr wrap="square" lIns="0" tIns="0" rIns="0" bIns="0" rtlCol="0" anchor="t"/>
+          <a:bodyPr wrap="none" lIns="0" tIns="0" rIns="0" bIns="0" rtlCol="0" anchor="t"/>
           <a:lstStyle/>
           <a:p>
             <a:pPr algn="l" indent="0" marL="0">
@@ -2637,7 +2653,7 @@
           <a:ln/>
         </p:spPr>
         <p:txBody>
-          <a:bodyPr wrap="square" lIns="0" tIns="0" rIns="0" bIns="0" rtlCol="0" anchor="t"/>
+          <a:bodyPr wrap="none" lIns="0" tIns="0" rIns="0" bIns="0" rtlCol="0" anchor="t"/>
           <a:lstStyle/>
           <a:p>
             <a:pPr algn="l" indent="0" marL="0">
@@ -2679,7 +2695,7 @@
           <a:ln/>
         </p:spPr>
         <p:txBody>
-          <a:bodyPr wrap="square" lIns="0" tIns="0" rIns="0" bIns="0" rtlCol="0" anchor="t"/>
+          <a:bodyPr wrap="none" lIns="0" tIns="0" rIns="0" bIns="0" rtlCol="0" anchor="t"/>
           <a:lstStyle/>
           <a:p>
             <a:pPr algn="l" indent="0" marL="0">
@@ -2721,7 +2737,7 @@
           <a:ln/>
         </p:spPr>
         <p:txBody>
-          <a:bodyPr wrap="square" lIns="0" tIns="0" rIns="0" bIns="0" rtlCol="0" anchor="t"/>
+          <a:bodyPr wrap="none" lIns="0" tIns="0" rIns="0" bIns="0" rtlCol="0" anchor="t"/>
           <a:lstStyle/>
           <a:p>
             <a:pPr algn="l" indent="0" marL="0">
@@ -2832,7 +2848,7 @@
           <a:ln/>
         </p:spPr>
         <p:txBody>
-          <a:bodyPr wrap="square" lIns="0" tIns="0" rIns="0" bIns="0" rtlCol="0" anchor="t"/>
+          <a:bodyPr wrap="none" lIns="0" tIns="0" rIns="0" bIns="0" rtlCol="0" anchor="t"/>
           <a:lstStyle/>
           <a:p>
             <a:pPr algn="l" indent="0" marL="0">
@@ -2877,7 +2893,7 @@
           <a:ln/>
         </p:spPr>
         <p:txBody>
-          <a:bodyPr wrap="square" lIns="0" tIns="0" rIns="0" bIns="0" rtlCol="0" anchor="t"/>
+          <a:bodyPr wrap="none" lIns="0" tIns="0" rIns="0" bIns="0" rtlCol="0" anchor="t"/>
           <a:lstStyle/>
           <a:p>
             <a:pPr algn="l" indent="0" marL="0">
@@ -2922,7 +2938,9 @@
           <a:ln/>
         </p:spPr>
         <p:txBody>
-          <a:bodyPr wrap="square" lIns="0" tIns="0" rIns="0" bIns="0" rtlCol="0" anchor="t"/>
+          <a:bodyPr wrap="square" lIns="0" tIns="0" rIns="0" bIns="0" rtlCol="0" anchor="t">
+            <a:normAutofit/>
+          </a:bodyPr>
           <a:lstStyle/>
           <a:p>
             <a:pPr algn="l" indent="0" marL="0">
@@ -2994,7 +3012,7 @@
           <a:ln/>
         </p:spPr>
         <p:txBody>
-          <a:bodyPr wrap="square" lIns="0" tIns="0" rIns="0" bIns="0" rtlCol="0" anchor="t"/>
+          <a:bodyPr wrap="none" lIns="0" tIns="0" rIns="0" bIns="0" rtlCol="0" anchor="t"/>
           <a:lstStyle/>
           <a:p>
             <a:pPr algn="l" indent="0" marL="0">
@@ -3039,7 +3057,9 @@
           <a:ln/>
         </p:spPr>
         <p:txBody>
-          <a:bodyPr wrap="square" lIns="0" tIns="0" rIns="0" bIns="0" rtlCol="0" anchor="t"/>
+          <a:bodyPr wrap="square" lIns="0" tIns="0" rIns="0" bIns="0" rtlCol="0" anchor="t">
+            <a:normAutofit/>
+          </a:bodyPr>
           <a:lstStyle/>
           <a:p>
             <a:pPr algn="l" indent="0" marL="0">
@@ -3117,7 +3137,7 @@
           <a:ln/>
         </p:spPr>
         <p:txBody>
-          <a:bodyPr wrap="square" lIns="0" tIns="0" rIns="0" bIns="0" rtlCol="0" anchor="t"/>
+          <a:bodyPr wrap="none" lIns="0" tIns="0" rIns="0" bIns="0" rtlCol="0" anchor="t"/>
           <a:lstStyle/>
           <a:p>
             <a:pPr algn="l" indent="0" marL="0">
@@ -3162,7 +3182,7 @@
           <a:ln/>
         </p:spPr>
         <p:txBody>
-          <a:bodyPr wrap="square" lIns="0" tIns="0" rIns="0" bIns="0" rtlCol="0" anchor="t"/>
+          <a:bodyPr wrap="none" lIns="0" tIns="0" rIns="0" bIns="0" rtlCol="0" anchor="t"/>
           <a:lstStyle/>
           <a:p>
             <a:pPr algn="l" indent="0" marL="0">
@@ -3207,7 +3227,9 @@
           <a:ln/>
         </p:spPr>
         <p:txBody>
-          <a:bodyPr wrap="square" lIns="0" tIns="0" rIns="0" bIns="0" rtlCol="0" anchor="t"/>
+          <a:bodyPr wrap="square" lIns="0" tIns="0" rIns="0" bIns="0" rtlCol="0" anchor="t">
+            <a:normAutofit/>
+          </a:bodyPr>
           <a:lstStyle/>
           <a:p>
             <a:pPr algn="l" indent="0" marL="0">
@@ -3279,7 +3301,7 @@
           <a:ln/>
         </p:spPr>
         <p:txBody>
-          <a:bodyPr wrap="square" lIns="0" tIns="0" rIns="0" bIns="0" rtlCol="0" anchor="t"/>
+          <a:bodyPr wrap="none" lIns="0" tIns="0" rIns="0" bIns="0" rtlCol="0" anchor="t"/>
           <a:lstStyle/>
           <a:p>
             <a:pPr algn="l" indent="0" marL="0">
@@ -3324,7 +3346,9 @@
           <a:ln/>
         </p:spPr>
         <p:txBody>
-          <a:bodyPr wrap="square" lIns="0" tIns="0" rIns="0" bIns="0" rtlCol="0" anchor="t"/>
+          <a:bodyPr wrap="square" lIns="0" tIns="0" rIns="0" bIns="0" rtlCol="0" anchor="t">
+            <a:normAutofit/>
+          </a:bodyPr>
           <a:lstStyle/>
           <a:p>
             <a:pPr algn="l" indent="0" marL="0">
@@ -3402,7 +3426,7 @@
           <a:ln/>
         </p:spPr>
         <p:txBody>
-          <a:bodyPr wrap="square" lIns="0" tIns="0" rIns="0" bIns="0" rtlCol="0" anchor="t"/>
+          <a:bodyPr wrap="none" lIns="0" tIns="0" rIns="0" bIns="0" rtlCol="0" anchor="t"/>
           <a:lstStyle/>
           <a:p>
             <a:pPr algn="l" indent="0" marL="0">
@@ -3447,7 +3471,7 @@
           <a:ln/>
         </p:spPr>
         <p:txBody>
-          <a:bodyPr wrap="square" lIns="0" tIns="0" rIns="0" bIns="0" rtlCol="0" anchor="t"/>
+          <a:bodyPr wrap="none" lIns="0" tIns="0" rIns="0" bIns="0" rtlCol="0" anchor="t"/>
           <a:lstStyle/>
           <a:p>
             <a:pPr algn="l" indent="0" marL="0">
@@ -3492,7 +3516,9 @@
           <a:ln/>
         </p:spPr>
         <p:txBody>
-          <a:bodyPr wrap="square" lIns="0" tIns="0" rIns="0" bIns="0" rtlCol="0" anchor="t"/>
+          <a:bodyPr wrap="square" lIns="0" tIns="0" rIns="0" bIns="0" rtlCol="0" anchor="t">
+            <a:normAutofit/>
+          </a:bodyPr>
           <a:lstStyle/>
           <a:p>
             <a:pPr algn="l" indent="0" marL="0">
@@ -3564,7 +3590,7 @@
           <a:ln/>
         </p:spPr>
         <p:txBody>
-          <a:bodyPr wrap="square" lIns="0" tIns="0" rIns="0" bIns="0" rtlCol="0" anchor="t"/>
+          <a:bodyPr wrap="none" lIns="0" tIns="0" rIns="0" bIns="0" rtlCol="0" anchor="t"/>
           <a:lstStyle/>
           <a:p>
             <a:pPr algn="l" indent="0" marL="0">
@@ -3609,7 +3635,9 @@
           <a:ln/>
         </p:spPr>
         <p:txBody>
-          <a:bodyPr wrap="square" lIns="0" tIns="0" rIns="0" bIns="0" rtlCol="0" anchor="t"/>
+          <a:bodyPr wrap="square" lIns="0" tIns="0" rIns="0" bIns="0" rtlCol="0" anchor="t">
+            <a:normAutofit/>
+          </a:bodyPr>
           <a:lstStyle/>
           <a:p>
             <a:pPr algn="l" indent="0" marL="0">
@@ -3651,7 +3679,7 @@
           <a:ln/>
         </p:spPr>
         <p:txBody>
-          <a:bodyPr wrap="square" lIns="0" tIns="0" rIns="0" bIns="0" rtlCol="0" anchor="t"/>
+          <a:bodyPr wrap="none" lIns="0" tIns="0" rIns="0" bIns="0" rtlCol="0" anchor="t"/>
           <a:lstStyle/>
           <a:p>
             <a:pPr algn="l" indent="0" marL="0">
@@ -3693,7 +3721,7 @@
           <a:ln/>
         </p:spPr>
         <p:txBody>
-          <a:bodyPr wrap="square" lIns="0" tIns="0" rIns="0" bIns="0" rtlCol="0" anchor="t"/>
+          <a:bodyPr wrap="none" lIns="0" tIns="0" rIns="0" bIns="0" rtlCol="0" anchor="t"/>
           <a:lstStyle/>
           <a:p>
             <a:pPr algn="l" indent="0" marL="0">
@@ -3767,7 +3795,7 @@
           <a:ln/>
         </p:spPr>
         <p:txBody>
-          <a:bodyPr wrap="square" lIns="0" tIns="0" rIns="0" bIns="0" rtlCol="0" anchor="t"/>
+          <a:bodyPr wrap="none" lIns="0" tIns="0" rIns="0" bIns="0" rtlCol="0" anchor="t"/>
           <a:lstStyle/>
           <a:p>
             <a:pPr algn="l" indent="0" marL="0">
@@ -3809,7 +3837,7 @@
           <a:ln/>
         </p:spPr>
         <p:txBody>
-          <a:bodyPr wrap="square" lIns="0" tIns="0" rIns="0" bIns="0" rtlCol="0" anchor="t"/>
+          <a:bodyPr wrap="none" lIns="0" tIns="0" rIns="0" bIns="0" rtlCol="0" anchor="t"/>
           <a:lstStyle/>
           <a:p>
             <a:pPr algn="l" indent="0" marL="0">
@@ -3851,7 +3879,7 @@
           <a:ln/>
         </p:spPr>
         <p:txBody>
-          <a:bodyPr wrap="square" lIns="0" tIns="0" rIns="0" bIns="0" rtlCol="0" anchor="t"/>
+          <a:bodyPr wrap="none" lIns="0" tIns="0" rIns="0" bIns="0" rtlCol="0" anchor="t"/>
           <a:lstStyle/>
           <a:p>
             <a:pPr algn="l" indent="0" marL="0">
@@ -3926,7 +3954,7 @@
           <a:ln/>
         </p:spPr>
         <p:txBody>
-          <a:bodyPr wrap="square" lIns="0" tIns="0" rIns="0" bIns="0" rtlCol="0" anchor="t"/>
+          <a:bodyPr wrap="none" lIns="0" tIns="0" rIns="0" bIns="0" rtlCol="0" anchor="t"/>
           <a:lstStyle/>
           <a:p>
             <a:pPr algn="l" indent="0" marL="0">
@@ -3968,7 +3996,7 @@
           <a:ln/>
         </p:spPr>
         <p:txBody>
-          <a:bodyPr wrap="square" lIns="0" tIns="0" rIns="0" bIns="0" rtlCol="0" anchor="t"/>
+          <a:bodyPr wrap="none" lIns="0" tIns="0" rIns="0" bIns="0" rtlCol="0" anchor="t"/>
           <a:lstStyle/>
           <a:p>
             <a:pPr algn="l" indent="0" marL="0">
@@ -4053,7 +4081,7 @@
           <a:ln/>
         </p:spPr>
         <p:txBody>
-          <a:bodyPr wrap="square" lIns="0" tIns="0" rIns="0" bIns="0" rtlCol="0" anchor="t"/>
+          <a:bodyPr wrap="none" lIns="0" tIns="0" rIns="0" bIns="0" rtlCol="0" anchor="t"/>
           <a:lstStyle/>
           <a:p>
             <a:pPr algn="l" indent="0" marL="0">
@@ -4095,7 +4123,7 @@
           <a:ln/>
         </p:spPr>
         <p:txBody>
-          <a:bodyPr wrap="square" lIns="0" tIns="0" rIns="0" bIns="0" rtlCol="0" anchor="t"/>
+          <a:bodyPr wrap="none" lIns="0" tIns="0" rIns="0" bIns="0" rtlCol="0" anchor="t"/>
           <a:lstStyle/>
           <a:p>
             <a:pPr algn="l" indent="0" marL="0">
@@ -4137,7 +4165,7 @@
           <a:ln/>
         </p:spPr>
         <p:txBody>
-          <a:bodyPr wrap="square" lIns="0" tIns="0" rIns="0" bIns="0" rtlCol="0" anchor="t"/>
+          <a:bodyPr wrap="none" lIns="0" tIns="0" rIns="0" bIns="0" rtlCol="0" anchor="t"/>
           <a:lstStyle/>
           <a:p>
             <a:pPr algn="l" indent="0" marL="0">
@@ -4245,7 +4273,7 @@
           <a:ln/>
         </p:spPr>
         <p:txBody>
-          <a:bodyPr wrap="square" lIns="0" tIns="0" rIns="0" bIns="0" rtlCol="0" anchor="t"/>
+          <a:bodyPr wrap="none" lIns="0" tIns="0" rIns="0" bIns="0" rtlCol="0" anchor="t"/>
           <a:lstStyle/>
           <a:p>
             <a:pPr algn="l" indent="0" marL="0">
@@ -4287,7 +4315,7 @@
           <a:ln/>
         </p:spPr>
         <p:txBody>
-          <a:bodyPr wrap="square" lIns="0" tIns="0" rIns="0" bIns="0" rtlCol="0" anchor="t"/>
+          <a:bodyPr wrap="none" lIns="0" tIns="0" rIns="0" bIns="0" rtlCol="0" anchor="t"/>
           <a:lstStyle/>
           <a:p>
             <a:pPr algn="l" indent="0" marL="0">
@@ -4329,7 +4357,7 @@
           <a:ln/>
         </p:spPr>
         <p:txBody>
-          <a:bodyPr wrap="square" lIns="0" tIns="0" rIns="0" bIns="0" rtlCol="0" anchor="t"/>
+          <a:bodyPr wrap="none" lIns="0" tIns="0" rIns="0" bIns="0" rtlCol="0" anchor="t"/>
           <a:lstStyle/>
           <a:p>
             <a:pPr algn="l" indent="0" marL="0">
@@ -4437,7 +4465,7 @@
           <a:ln/>
         </p:spPr>
         <p:txBody>
-          <a:bodyPr wrap="square" lIns="0" tIns="0" rIns="0" bIns="0" rtlCol="0" anchor="t"/>
+          <a:bodyPr wrap="none" lIns="0" tIns="0" rIns="0" bIns="0" rtlCol="0" anchor="t"/>
           <a:lstStyle/>
           <a:p>
             <a:pPr algn="l" indent="0" marL="0">
@@ -4479,7 +4507,7 @@
           <a:ln/>
         </p:spPr>
         <p:txBody>
-          <a:bodyPr wrap="square" lIns="0" tIns="0" rIns="0" bIns="0" rtlCol="0" anchor="t"/>
+          <a:bodyPr wrap="none" lIns="0" tIns="0" rIns="0" bIns="0" rtlCol="0" anchor="t"/>
           <a:lstStyle/>
           <a:p>
             <a:pPr algn="l" indent="0" marL="0">
@@ -4521,7 +4549,7 @@
           <a:ln/>
         </p:spPr>
         <p:txBody>
-          <a:bodyPr wrap="square" lIns="0" tIns="0" rIns="0" bIns="0" rtlCol="0" anchor="t"/>
+          <a:bodyPr wrap="none" lIns="0" tIns="0" rIns="0" bIns="0" rtlCol="0" anchor="t"/>
           <a:lstStyle/>
           <a:p>
             <a:pPr algn="l" indent="0" marL="0">
@@ -4629,7 +4657,7 @@
           <a:ln/>
         </p:spPr>
         <p:txBody>
-          <a:bodyPr wrap="square" lIns="0" tIns="0" rIns="0" bIns="0" rtlCol="0" anchor="t"/>
+          <a:bodyPr wrap="none" lIns="0" tIns="0" rIns="0" bIns="0" rtlCol="0" anchor="t"/>
           <a:lstStyle/>
           <a:p>
             <a:pPr algn="l" indent="0" marL="0">
@@ -4671,7 +4699,7 @@
           <a:ln/>
         </p:spPr>
         <p:txBody>
-          <a:bodyPr wrap="square" lIns="0" tIns="0" rIns="0" bIns="0" rtlCol="0" anchor="t"/>
+          <a:bodyPr wrap="none" lIns="0" tIns="0" rIns="0" bIns="0" rtlCol="0" anchor="t"/>
           <a:lstStyle/>
           <a:p>
             <a:pPr algn="l" indent="0" marL="0">
@@ -4713,7 +4741,7 @@
           <a:ln/>
         </p:spPr>
         <p:txBody>
-          <a:bodyPr wrap="square" lIns="0" tIns="0" rIns="0" bIns="0" rtlCol="0" anchor="t"/>
+          <a:bodyPr wrap="none" lIns="0" tIns="0" rIns="0" bIns="0" rtlCol="0" anchor="t"/>
           <a:lstStyle/>
           <a:p>
             <a:pPr algn="l" indent="0" marL="0">
@@ -4821,7 +4849,7 @@
           <a:ln/>
         </p:spPr>
         <p:txBody>
-          <a:bodyPr wrap="square" lIns="0" tIns="0" rIns="0" bIns="0" rtlCol="0" anchor="t"/>
+          <a:bodyPr wrap="none" lIns="0" tIns="0" rIns="0" bIns="0" rtlCol="0" anchor="t"/>
           <a:lstStyle/>
           <a:p>
             <a:pPr algn="l" indent="0" marL="0">
@@ -4863,7 +4891,7 @@
           <a:ln/>
         </p:spPr>
         <p:txBody>
-          <a:bodyPr wrap="square" lIns="0" tIns="0" rIns="0" bIns="0" rtlCol="0" anchor="t"/>
+          <a:bodyPr wrap="none" lIns="0" tIns="0" rIns="0" bIns="0" rtlCol="0" anchor="t"/>
           <a:lstStyle/>
           <a:p>
             <a:pPr algn="l" indent="0" marL="0">
@@ -4905,7 +4933,7 @@
           <a:ln/>
         </p:spPr>
         <p:txBody>
-          <a:bodyPr wrap="square" lIns="0" tIns="0" rIns="0" bIns="0" rtlCol="0" anchor="t"/>
+          <a:bodyPr wrap="none" lIns="0" tIns="0" rIns="0" bIns="0" rtlCol="0" anchor="t"/>
           <a:lstStyle/>
           <a:p>
             <a:pPr algn="l" indent="0" marL="0">
@@ -4947,7 +4975,7 @@
           <a:ln/>
         </p:spPr>
         <p:txBody>
-          <a:bodyPr wrap="square" lIns="0" tIns="0" rIns="0" bIns="0" rtlCol="0" anchor="t"/>
+          <a:bodyPr wrap="none" lIns="0" tIns="0" rIns="0" bIns="0" rtlCol="0" anchor="t"/>
           <a:lstStyle/>
           <a:p>
             <a:pPr algn="l" indent="0" marL="0">
@@ -4989,7 +5017,7 @@
           <a:ln/>
         </p:spPr>
         <p:txBody>
-          <a:bodyPr wrap="square" lIns="0" tIns="0" rIns="0" bIns="0" rtlCol="0" anchor="t"/>
+          <a:bodyPr wrap="none" lIns="0" tIns="0" rIns="0" bIns="0" rtlCol="0" anchor="t"/>
           <a:lstStyle/>
           <a:p>
             <a:pPr algn="l" indent="0" marL="0">
@@ -5063,7 +5091,7 @@
           <a:ln/>
         </p:spPr>
         <p:txBody>
-          <a:bodyPr wrap="square" lIns="0" tIns="0" rIns="0" bIns="0" rtlCol="0" anchor="t"/>
+          <a:bodyPr wrap="none" lIns="0" tIns="0" rIns="0" bIns="0" rtlCol="0" anchor="t"/>
           <a:lstStyle/>
           <a:p>
             <a:pPr algn="l" indent="0" marL="0">
@@ -5105,7 +5133,7 @@
           <a:ln/>
         </p:spPr>
         <p:txBody>
-          <a:bodyPr wrap="square" lIns="0" tIns="0" rIns="0" bIns="0" rtlCol="0" anchor="t"/>
+          <a:bodyPr wrap="none" lIns="0" tIns="0" rIns="0" bIns="0" rtlCol="0" anchor="t"/>
           <a:lstStyle/>
           <a:p>
             <a:pPr algn="l" indent="0" marL="0">
@@ -5147,7 +5175,7 @@
           <a:ln/>
         </p:spPr>
         <p:txBody>
-          <a:bodyPr wrap="square" lIns="0" tIns="0" rIns="0" bIns="0" rtlCol="0" anchor="t"/>
+          <a:bodyPr wrap="none" lIns="0" tIns="0" rIns="0" bIns="0" rtlCol="0" anchor="t"/>
           <a:lstStyle/>
           <a:p>
             <a:pPr algn="l" indent="0" marL="0">
@@ -5222,7 +5250,7 @@
           <a:ln/>
         </p:spPr>
         <p:txBody>
-          <a:bodyPr wrap="square" lIns="169312" tIns="0" rIns="169312" bIns="0" rtlCol="0" anchor="t"/>
+          <a:bodyPr wrap="none" lIns="169312" tIns="0" rIns="169312" bIns="0" rtlCol="0" anchor="t"/>
           <a:lstStyle/>
           <a:p>
             <a:pPr algn="l" indent="0" marL="0">
@@ -5264,7 +5292,7 @@
           <a:ln/>
         </p:spPr>
         <p:txBody>
-          <a:bodyPr wrap="square" lIns="169312" tIns="0" rIns="169312" bIns="0" rtlCol="0" anchor="t"/>
+          <a:bodyPr wrap="none" lIns="169312" tIns="0" rIns="169312" bIns="0" rtlCol="0" anchor="t"/>
           <a:lstStyle/>
           <a:p>
             <a:pPr algn="l" indent="0" marL="0">
@@ -5306,7 +5334,7 @@
           <a:ln/>
         </p:spPr>
         <p:txBody>
-          <a:bodyPr wrap="square" lIns="169312" tIns="0" rIns="169312" bIns="0" rtlCol="0" anchor="t"/>
+          <a:bodyPr wrap="none" lIns="169312" tIns="0" rIns="169312" bIns="0" rtlCol="0" anchor="t"/>
           <a:lstStyle/>
           <a:p>
             <a:pPr algn="l" indent="0" marL="0">
@@ -5348,7 +5376,7 @@
           <a:ln/>
         </p:spPr>
         <p:txBody>
-          <a:bodyPr wrap="square" lIns="169312" tIns="0" rIns="169312" bIns="0" rtlCol="0" anchor="t"/>
+          <a:bodyPr wrap="none" lIns="169312" tIns="0" rIns="169312" bIns="0" rtlCol="0" anchor="t"/>
           <a:lstStyle/>
           <a:p>
             <a:pPr algn="l" indent="0" marL="0">
@@ -5433,7 +5461,7 @@
           <a:ln/>
         </p:spPr>
         <p:txBody>
-          <a:bodyPr wrap="square" lIns="0" tIns="0" rIns="0" bIns="0" rtlCol="0" anchor="t"/>
+          <a:bodyPr wrap="none" lIns="0" tIns="0" rIns="0" bIns="0" rtlCol="0" anchor="t"/>
           <a:lstStyle/>
           <a:p>
             <a:pPr algn="l" indent="0" marL="0">
@@ -5475,7 +5503,9 @@
           <a:ln/>
         </p:spPr>
         <p:txBody>
-          <a:bodyPr wrap="square" lIns="0" tIns="0" rIns="0" bIns="0" rtlCol="0" anchor="t"/>
+          <a:bodyPr wrap="square" lIns="0" tIns="0" rIns="0" bIns="0" rtlCol="0" anchor="t">
+            <a:normAutofit/>
+          </a:bodyPr>
           <a:lstStyle/>
           <a:p>
             <a:pPr algn="l" indent="0" marL="0">
@@ -5517,7 +5547,9 @@
           <a:ln/>
         </p:spPr>
         <p:txBody>
-          <a:bodyPr wrap="square" lIns="0" tIns="0" rIns="0" bIns="0" rtlCol="0" anchor="t"/>
+          <a:bodyPr wrap="square" lIns="0" tIns="0" rIns="0" bIns="0" rtlCol="0" anchor="t">
+            <a:normAutofit/>
+          </a:bodyPr>
           <a:lstStyle/>
           <a:p>
             <a:pPr algn="l" indent="0" marL="0">
@@ -5559,7 +5591,9 @@
           <a:ln/>
         </p:spPr>
         <p:txBody>
-          <a:bodyPr wrap="square" lIns="0" tIns="0" rIns="0" bIns="0" rtlCol="0" anchor="t"/>
+          <a:bodyPr wrap="square" lIns="0" tIns="0" rIns="0" bIns="0" rtlCol="0" anchor="t">
+            <a:normAutofit/>
+          </a:bodyPr>
           <a:lstStyle/>
           <a:p>
             <a:pPr algn="l" indent="0" marL="0">
@@ -5605,6 +5639,10 @@
             <a:prstDash val="solid"/>
           </a:ln>
         </p:spPr>
+        <p:txBody>
+          <a:bodyPr/>
+          <a:p/>
+        </p:txBody>
       </p:sp>
       <p:sp>
         <p:nvSpPr>
@@ -5624,7 +5662,7 @@
           <a:ln/>
         </p:spPr>
         <p:txBody>
-          <a:bodyPr wrap="square" lIns="0" tIns="0" rIns="0" bIns="0" rtlCol="0" anchor="t"/>
+          <a:bodyPr wrap="none" lIns="0" tIns="0" rIns="0" bIns="0" rtlCol="0" anchor="t"/>
           <a:lstStyle/>
           <a:p>
             <a:pPr algn="l" indent="0" marL="0">
@@ -5666,7 +5704,9 @@
           <a:ln/>
         </p:spPr>
         <p:txBody>
-          <a:bodyPr wrap="square" lIns="0" tIns="0" rIns="0" bIns="0" rtlCol="0" anchor="t"/>
+          <a:bodyPr wrap="square" lIns="0" tIns="0" rIns="0" bIns="0" rtlCol="0" anchor="t">
+            <a:normAutofit/>
+          </a:bodyPr>
           <a:lstStyle/>
           <a:p>
             <a:pPr algn="l" indent="0" marL="0">
@@ -5708,7 +5748,9 @@
           <a:ln/>
         </p:spPr>
         <p:txBody>
-          <a:bodyPr wrap="square" lIns="0" tIns="0" rIns="0" bIns="0" rtlCol="0" anchor="t"/>
+          <a:bodyPr wrap="square" lIns="0" tIns="0" rIns="0" bIns="0" rtlCol="0" anchor="t">
+            <a:normAutofit/>
+          </a:bodyPr>
           <a:lstStyle/>
           <a:p>
             <a:pPr algn="l" indent="0" marL="0">
@@ -5750,7 +5792,9 @@
           <a:ln/>
         </p:spPr>
         <p:txBody>
-          <a:bodyPr wrap="square" lIns="0" tIns="0" rIns="0" bIns="0" rtlCol="0" anchor="t"/>
+          <a:bodyPr wrap="square" lIns="0" tIns="0" rIns="0" bIns="0" rtlCol="0" anchor="t">
+            <a:normAutofit/>
+          </a:bodyPr>
           <a:lstStyle/>
           <a:p>
             <a:pPr algn="l" indent="0" marL="0">
@@ -5796,6 +5840,10 @@
             <a:prstDash val="solid"/>
           </a:ln>
         </p:spPr>
+        <p:txBody>
+          <a:bodyPr/>
+          <a:p/>
+        </p:txBody>
       </p:sp>
       <p:sp>
         <p:nvSpPr>
@@ -5815,7 +5863,7 @@
           <a:ln/>
         </p:spPr>
         <p:txBody>
-          <a:bodyPr wrap="square" lIns="0" tIns="0" rIns="0" bIns="0" rtlCol="0" anchor="t"/>
+          <a:bodyPr wrap="none" lIns="0" tIns="0" rIns="0" bIns="0" rtlCol="0" anchor="t"/>
           <a:lstStyle/>
           <a:p>
             <a:pPr algn="l" indent="0" marL="0">
@@ -5857,7 +5905,9 @@
           <a:ln/>
         </p:spPr>
         <p:txBody>
-          <a:bodyPr wrap="square" lIns="0" tIns="0" rIns="0" bIns="0" rtlCol="0" anchor="t"/>
+          <a:bodyPr wrap="square" lIns="0" tIns="0" rIns="0" bIns="0" rtlCol="0" anchor="t">
+            <a:normAutofit/>
+          </a:bodyPr>
           <a:lstStyle/>
           <a:p>
             <a:pPr algn="l" indent="0" marL="0">
@@ -5899,7 +5949,9 @@
           <a:ln/>
         </p:spPr>
         <p:txBody>
-          <a:bodyPr wrap="square" lIns="0" tIns="0" rIns="0" bIns="0" rtlCol="0" anchor="t"/>
+          <a:bodyPr wrap="square" lIns="0" tIns="0" rIns="0" bIns="0" rtlCol="0" anchor="t">
+            <a:normAutofit/>
+          </a:bodyPr>
           <a:lstStyle/>
           <a:p>
             <a:pPr algn="l" indent="0" marL="0">
@@ -5941,7 +5993,7 @@
           <a:ln/>
         </p:spPr>
         <p:txBody>
-          <a:bodyPr wrap="square" lIns="0" tIns="0" rIns="0" bIns="0" rtlCol="0" anchor="t"/>
+          <a:bodyPr wrap="none" lIns="0" tIns="0" rIns="0" bIns="0" rtlCol="0" anchor="t"/>
           <a:lstStyle/>
           <a:p>
             <a:pPr algn="l" indent="0" marL="0">
@@ -5987,6 +6039,10 @@
             <a:prstDash val="solid"/>
           </a:ln>
         </p:spPr>
+        <p:txBody>
+          <a:bodyPr/>
+          <a:p/>
+        </p:txBody>
       </p:sp>
       <p:sp>
         <p:nvSpPr>
@@ -6006,7 +6062,7 @@
           <a:ln/>
         </p:spPr>
         <p:txBody>
-          <a:bodyPr wrap="square" lIns="0" tIns="0" rIns="0" bIns="0" rtlCol="0" anchor="t"/>
+          <a:bodyPr wrap="none" lIns="0" tIns="0" rIns="0" bIns="0" rtlCol="0" anchor="t"/>
           <a:lstStyle/>
           <a:p>
             <a:pPr algn="l" indent="0" marL="0">
@@ -6048,7 +6104,9 @@
           <a:ln/>
         </p:spPr>
         <p:txBody>
-          <a:bodyPr wrap="square" lIns="0" tIns="0" rIns="0" bIns="0" rtlCol="0" anchor="t"/>
+          <a:bodyPr wrap="square" lIns="0" tIns="0" rIns="0" bIns="0" rtlCol="0" anchor="t">
+            <a:normAutofit/>
+          </a:bodyPr>
           <a:lstStyle/>
           <a:p>
             <a:pPr algn="l" indent="0" marL="0">
@@ -6090,7 +6148,7 @@
           <a:ln/>
         </p:spPr>
         <p:txBody>
-          <a:bodyPr wrap="square" lIns="0" tIns="0" rIns="0" bIns="0" rtlCol="0" anchor="t"/>
+          <a:bodyPr wrap="none" lIns="0" tIns="0" rIns="0" bIns="0" rtlCol="0" anchor="t"/>
           <a:lstStyle/>
           <a:p>
             <a:pPr algn="l" indent="0" marL="0">
@@ -6132,7 +6190,9 @@
           <a:ln/>
         </p:spPr>
         <p:txBody>
-          <a:bodyPr wrap="square" lIns="0" tIns="0" rIns="0" bIns="0" rtlCol="0" anchor="t"/>
+          <a:bodyPr wrap="square" lIns="0" tIns="0" rIns="0" bIns="0" rtlCol="0" anchor="t">
+            <a:normAutofit/>
+          </a:bodyPr>
           <a:lstStyle/>
           <a:p>
             <a:pPr algn="l" indent="0" marL="0">
@@ -6174,7 +6234,7 @@
           <a:ln/>
         </p:spPr>
         <p:txBody>
-          <a:bodyPr wrap="square" lIns="0" tIns="0" rIns="0" bIns="0" rtlCol="0" anchor="t"/>
+          <a:bodyPr wrap="none" lIns="0" tIns="0" rIns="0" bIns="0" rtlCol="0" anchor="t"/>
           <a:lstStyle/>
           <a:p>
             <a:pPr algn="l" indent="0" marL="0">
@@ -6216,7 +6276,7 @@
           <a:ln/>
         </p:spPr>
         <p:txBody>
-          <a:bodyPr wrap="square" lIns="0" tIns="0" rIns="0" bIns="0" rtlCol="0" anchor="t"/>
+          <a:bodyPr wrap="none" lIns="0" tIns="0" rIns="0" bIns="0" rtlCol="0" anchor="t"/>
           <a:lstStyle/>
           <a:p>
             <a:pPr algn="l" indent="0" marL="0">
@@ -6290,7 +6350,7 @@
           <a:ln/>
         </p:spPr>
         <p:txBody>
-          <a:bodyPr wrap="square" lIns="0" tIns="0" rIns="0" bIns="0" rtlCol="0" anchor="t"/>
+          <a:bodyPr wrap="none" lIns="0" tIns="0" rIns="0" bIns="0" rtlCol="0" anchor="t"/>
           <a:lstStyle/>
           <a:p>
             <a:pPr algn="l" indent="0" marL="0">
@@ -6332,7 +6392,7 @@
           <a:ln/>
         </p:spPr>
         <p:txBody>
-          <a:bodyPr wrap="square" lIns="0" tIns="0" rIns="0" bIns="0" rtlCol="0" anchor="t"/>
+          <a:bodyPr wrap="none" lIns="0" tIns="0" rIns="0" bIns="0" rtlCol="0" anchor="t"/>
           <a:lstStyle/>
           <a:p>
             <a:pPr algn="l" indent="0" marL="0">
@@ -6374,7 +6434,7 @@
           <a:ln/>
         </p:spPr>
         <p:txBody>
-          <a:bodyPr wrap="square" lIns="0" tIns="0" rIns="0" bIns="0" rtlCol="0" anchor="t"/>
+          <a:bodyPr wrap="none" lIns="0" tIns="0" rIns="0" bIns="0" rtlCol="0" anchor="t"/>
           <a:lstStyle/>
           <a:p>
             <a:pPr algn="l" indent="0" marL="0">
@@ -6485,7 +6545,7 @@
           <a:ln/>
         </p:spPr>
         <p:txBody>
-          <a:bodyPr wrap="square" lIns="0" tIns="0" rIns="0" bIns="0" rtlCol="0" anchor="t"/>
+          <a:bodyPr wrap="none" lIns="0" tIns="0" rIns="0" bIns="0" rtlCol="0" anchor="t"/>
           <a:lstStyle/>
           <a:p>
             <a:pPr algn="l" indent="0" marL="0">
@@ -6527,7 +6587,7 @@
           <a:ln/>
         </p:spPr>
         <p:txBody>
-          <a:bodyPr wrap="square" lIns="0" tIns="0" rIns="0" bIns="0" rtlCol="0" anchor="t"/>
+          <a:bodyPr wrap="none" lIns="0" tIns="0" rIns="0" bIns="0" rtlCol="0" anchor="t"/>
           <a:lstStyle/>
           <a:p>
             <a:pPr algn="l" indent="0" marL="0">
@@ -6569,7 +6629,7 @@
           <a:ln/>
         </p:spPr>
         <p:txBody>
-          <a:bodyPr wrap="square" lIns="0" tIns="0" rIns="0" bIns="0" rtlCol="0" anchor="t"/>
+          <a:bodyPr wrap="none" lIns="0" tIns="0" rIns="0" bIns="0" rtlCol="0" anchor="t"/>
           <a:lstStyle/>
           <a:p>
             <a:pPr algn="r" indent="0" marL="0">
@@ -6647,7 +6707,7 @@
           <a:ln/>
         </p:spPr>
         <p:txBody>
-          <a:bodyPr wrap="square" lIns="0" tIns="0" rIns="0" bIns="0" rtlCol="0" anchor="t"/>
+          <a:bodyPr wrap="none" lIns="0" tIns="0" rIns="0" bIns="0" rtlCol="0" anchor="t"/>
           <a:lstStyle/>
           <a:p>
             <a:pPr algn="l" indent="0" marL="0">
@@ -6689,7 +6749,7 @@
           <a:ln/>
         </p:spPr>
         <p:txBody>
-          <a:bodyPr wrap="square" lIns="0" tIns="0" rIns="0" bIns="0" rtlCol="0" anchor="t"/>
+          <a:bodyPr wrap="none" lIns="0" tIns="0" rIns="0" bIns="0" rtlCol="0" anchor="t"/>
           <a:lstStyle/>
           <a:p>
             <a:pPr algn="l" indent="0" marL="0">
@@ -6731,7 +6791,7 @@
           <a:ln/>
         </p:spPr>
         <p:txBody>
-          <a:bodyPr wrap="square" lIns="0" tIns="0" rIns="0" bIns="0" rtlCol="0" anchor="t"/>
+          <a:bodyPr wrap="none" lIns="0" tIns="0" rIns="0" bIns="0" rtlCol="0" anchor="t"/>
           <a:lstStyle/>
           <a:p>
             <a:pPr algn="r" indent="0" marL="0">
@@ -6809,7 +6869,7 @@
           <a:ln/>
         </p:spPr>
         <p:txBody>
-          <a:bodyPr wrap="square" lIns="0" tIns="0" rIns="0" bIns="0" rtlCol="0" anchor="t"/>
+          <a:bodyPr wrap="none" lIns="0" tIns="0" rIns="0" bIns="0" rtlCol="0" anchor="t"/>
           <a:lstStyle/>
           <a:p>
             <a:pPr algn="l" indent="0" marL="0">
@@ -6851,7 +6911,7 @@
           <a:ln/>
         </p:spPr>
         <p:txBody>
-          <a:bodyPr wrap="square" lIns="0" tIns="0" rIns="0" bIns="0" rtlCol="0" anchor="t"/>
+          <a:bodyPr wrap="none" lIns="0" tIns="0" rIns="0" bIns="0" rtlCol="0" anchor="t"/>
           <a:lstStyle/>
           <a:p>
             <a:pPr algn="l" indent="0" marL="0">
@@ -6893,7 +6953,7 @@
           <a:ln/>
         </p:spPr>
         <p:txBody>
-          <a:bodyPr wrap="square" lIns="0" tIns="0" rIns="0" bIns="0" rtlCol="0" anchor="t"/>
+          <a:bodyPr wrap="none" lIns="0" tIns="0" rIns="0" bIns="0" rtlCol="0" anchor="t"/>
           <a:lstStyle/>
           <a:p>
             <a:pPr algn="r" indent="0" marL="0">
@@ -6972,7 +7032,7 @@
           <a:ln/>
         </p:spPr>
         <p:txBody>
-          <a:bodyPr wrap="square" lIns="0" tIns="0" rIns="0" bIns="0" rtlCol="0" anchor="t"/>
+          <a:bodyPr wrap="none" lIns="0" tIns="0" rIns="0" bIns="0" rtlCol="0" anchor="t"/>
           <a:lstStyle/>
           <a:p>
             <a:pPr algn="l" indent="0" marL="0">
@@ -7017,7 +7077,7 @@
           <a:ln/>
         </p:spPr>
         <p:txBody>
-          <a:bodyPr wrap="square" lIns="0" tIns="0" rIns="0" bIns="0" rtlCol="0" anchor="t"/>
+          <a:bodyPr wrap="none" lIns="0" tIns="0" rIns="0" bIns="0" rtlCol="0" anchor="t"/>
           <a:lstStyle/>
           <a:p>
             <a:pPr algn="l" indent="0" marL="0">
@@ -7059,7 +7119,7 @@
           <a:ln/>
         </p:spPr>
         <p:txBody>
-          <a:bodyPr wrap="square" lIns="0" tIns="0" rIns="0" bIns="0" rtlCol="0" anchor="t"/>
+          <a:bodyPr wrap="none" lIns="0" tIns="0" rIns="0" bIns="0" rtlCol="0" anchor="t"/>
           <a:lstStyle/>
           <a:p>
             <a:pPr algn="l" indent="0" marL="0">

--- a/decks/incident-response/incident-response.pptx
+++ b/decks/incident-response/incident-response.pptx
@@ -1422,9 +1422,7 @@
           <a:ln/>
         </p:spPr>
         <p:txBody>
-          <a:bodyPr wrap="square" lIns="0" tIns="0" rIns="0" bIns="0" rtlCol="0" anchor="t">
-            <a:normAutofit/>
-          </a:bodyPr>
+          <a:bodyPr wrap="none" lIns="0" tIns="0" rIns="0" bIns="0" rtlCol="0" anchor="t"/>
           <a:lstStyle/>
           <a:p>
             <a:pPr algn="l" indent="0" marL="0">
@@ -1529,9 +1527,7 @@
           <a:ln/>
         </p:spPr>
         <p:txBody>
-          <a:bodyPr wrap="square" lIns="0" tIns="0" rIns="0" bIns="0" rtlCol="0" anchor="t">
-            <a:normAutofit/>
-          </a:bodyPr>
+          <a:bodyPr wrap="none" lIns="0" tIns="0" rIns="0" bIns="0" rtlCol="0" anchor="t"/>
           <a:lstStyle/>
           <a:p>
             <a:pPr algn="l" indent="0" marL="0">
@@ -1976,9 +1972,7 @@
           <a:ln/>
         </p:spPr>
         <p:txBody>
-          <a:bodyPr wrap="square" lIns="0" tIns="0" rIns="0" bIns="0" rtlCol="0" anchor="t">
-            <a:normAutofit/>
-          </a:bodyPr>
+          <a:bodyPr wrap="none" lIns="0" tIns="0" rIns="0" bIns="0" rtlCol="0" anchor="t"/>
           <a:lstStyle/>
           <a:p>
             <a:pPr algn="l" indent="0" marL="0">
@@ -2174,9 +2168,7 @@
           <a:ln/>
         </p:spPr>
         <p:txBody>
-          <a:bodyPr wrap="square" lIns="0" tIns="0" rIns="0" bIns="0" rtlCol="0" anchor="t">
-            <a:normAutofit/>
-          </a:bodyPr>
+          <a:bodyPr wrap="none" lIns="0" tIns="0" rIns="0" bIns="0" rtlCol="0" anchor="t"/>
           <a:lstStyle/>
           <a:p>
             <a:pPr algn="l" indent="0" marL="0">
@@ -2372,9 +2364,7 @@
           <a:ln/>
         </p:spPr>
         <p:txBody>
-          <a:bodyPr wrap="square" lIns="0" tIns="0" rIns="0" bIns="0" rtlCol="0" anchor="t">
-            <a:normAutofit/>
-          </a:bodyPr>
+          <a:bodyPr wrap="none" lIns="0" tIns="0" rIns="0" bIns="0" rtlCol="0" anchor="t"/>
           <a:lstStyle/>
           <a:p>
             <a:pPr algn="l" indent="0" marL="0">
